--- a/ADG/02장/2장_데이터보호모드와리두전송서비스.pptx
+++ b/ADG/02장/2장_데이터보호모드와리두전송서비스.pptx
@@ -41,6 +41,22 @@
     <p:sldId id="289" r:id="rId41"/>
     <p:sldId id="290" r:id="rId42"/>
     <p:sldId id="291" r:id="rId43"/>
+    <p:sldId id="292" r:id="rId44"/>
+    <p:sldId id="293" r:id="rId45"/>
+    <p:sldId id="294" r:id="rId46"/>
+    <p:sldId id="295" r:id="rId47"/>
+    <p:sldId id="296" r:id="rId48"/>
+    <p:sldId id="297" r:id="rId49"/>
+    <p:sldId id="298" r:id="rId50"/>
+    <p:sldId id="299" r:id="rId51"/>
+    <p:sldId id="300" r:id="rId52"/>
+    <p:sldId id="301" r:id="rId53"/>
+    <p:sldId id="302" r:id="rId54"/>
+    <p:sldId id="303" r:id="rId55"/>
+    <p:sldId id="304" r:id="rId56"/>
+    <p:sldId id="305" r:id="rId57"/>
+    <p:sldId id="306" r:id="rId58"/>
+    <p:sldId id="307" r:id="rId59"/>
   </p:sldIdLst>
   <p:sldSz cx="12191695" cy="6858000" type="screen4x3"/>
   <p:notesSz cx="6858000" cy="9144000"/>
@@ -537,7 +553,7 @@
           <a:lstStyle/>
           <a:p>
             <a:r>
-              <a:t>이 파라미터의 특징은 여러 결정을 문자열 하나에 몰아넣었다는 점입니다. 그래서 읽기는 편하지만 실수하기도 쉽습니다. 특히 속성을 생략하면 조용히 기본값으로 되돌아간다는 점을 강조해 주십시오. SYNC만 쓰고 AFFIRM을 빠뜨리면 NOAFFIRM이 되어 보장 수준이 달라집니다. 전체 문자열을 항상 완전하게 적는 습관이 필요합니다. 또 하나, DB_UNIQUE_NAME 속성은 단순한 표기가 아니라 오배송 방지 장치입니다. 목적지 데이터베이스의 고유 이름이 다르면 오라클이 전송을 거부하므로, 여러 Standby를 운영할 때 리두가 엉뚱한 곳으로 가는 사고를 막아 줍니다.</a:t>
+              <a:t>Data Guard 서비스는 전송, 적용, 역할 관리 세 가지로 나뉘고 이 장은 그중 전송을 다룹니다. 리두를 보내는 쪽은 대부분 Primary지만, Far Sync나 다른 Standby로 리두를 넘겨주는 Standby도 소스가 됩니다. 목적지는 파라미터 번호 하나에 하나씩 대응하므로, 목적지 수만큼 LOG_ARCHIVE_DEST_n이 늘어납니다. 전송 서비스는 Standby의 로그 파일에 리두를 써 넣는 순간 일을 마칩니다. 데이터 파일 반영은 7장의 Redo Apply가 맡으니, 이 장에서 말하는 무손실은 리두가 Standby 디스크나 메모리에 도착했는지를 기준으로 합니다.</a:t>
             </a:r>
           </a:p>
         </p:txBody>
@@ -607,7 +623,7 @@
           <a:lstStyle/>
           <a:p>
             <a:r>
-              <a:t>모니터링을 설계할 때 이 구분이 그대로 쓰입니다. 순간값으로 경보를 걸면 로그 스위치마다 오탐이 납니다. "MISMATCH가 5분 이상 지속"처럼 지속 시간을 조건에 넣어야 합니다. 그리고 STATUS와 ERROR를 함께 수집해 두면 설정 문제인지 장애인지 자동으로 분류할 수 있습니다. 실습 05 마지막에 판정용 조회를 만들어 봅니다. CASE 문으로 OK와 MISMATCH를 내는 한 줄짜리 조회인데, 그대로 스케줄러에 걸어 두면 바로 모니터링이 됩니다.</a:t>
+              <a:t>표의 손실 가능성은 목적지 하나만 놓고 본 값입니다. 구성 전체에서 실제로 무엇을 잃을 수 있는지는 보호 모드 규칙과 합쳐서 판단해야 합니다. 예를 들어 SYNC AFFIRM 목적지라도 Maximum Performance 구성이면 Standby가 끊긴 동안 Primary가 계속 커밋하므로, 그 뒤 Primary까지 잃으면 끊긴 구간을 잃습니다. Broker 이름으로는 SYNC, FASTSYNC, ASYNC 세 가지만 있고, 디프리케이트된 조합은 Broker가 만들지 않습니다.</a:t>
             </a:r>
           </a:p>
         </p:txBody>
@@ -677,7 +693,7 @@
           <a:lstStyle/>
           <a:p>
             <a:r>
-              <a:t>같은 오류 번호가 서로 다른 두 원인으로 발생합니다. 첫 번째는 중간 단계를 거치지 않았기 때문이고, 두 번째는 아직 동기화가 끝나지 않았기 때문입니다. 문면은 "마운트하라"지만 실제 원인은 요건 미충족입니다. 마운트가 통하는 이유는 그 상태에서 커밋이 없어 요건 검사가 느슨해지기 때문이며, 해결책이 아니라 우회로일 뿐입니다. 문서에도 이 두 번째 조건은 명시적으로 드러나지 않습니다. 실습에서 직접 부딪혀 알아낸 규칙이며, 이런 것이 실측으로 만든 교재의 값어치입니다.</a:t>
+              <a:t>SYNC 목적지 두 개를 두면 보호가 두 배가 된다고 생각하기 쉬운데, 커밋 비용 쪽에서 보면 가장 느린 목적지의 지연을 모든 커밋이 지불합니다. 보호 모드는 동기화된 목적지가 하나라도 있으면 성립하므로, 두 번째 SYNC 목적지의 가치는 첫 번째가 끊겼을 때 보호 수준이 떨어지지 않게 받쳐 주는 데 있습니다. 가까운 두 곳은 SYNC로, 먼 곳은 ASYNC로 두는 구성이 일반적입니다.</a:t>
             </a:r>
           </a:p>
         </p:txBody>
@@ -747,7 +763,7 @@
           <a:lstStyle/>
           <a:p>
             <a:r>
-              <a:t>실습 03에서 이 순서를 그대로 밟습니다. ④를 건너뛰면 첫 번째 ORA-01126, ⑤를 건너뛰면 두 번째 ORA-01126이 납니다. 두 번 다 오류 번호가 같아서 문면만으로는 어느 단계를 놓쳤는지 알 수 없습니다. 순서를 절차로 만들어 두는 것이 시행착오를 줄이는 가장 확실한 방법입니다. 특히 ⑦을 강조해 주십시오. 명령이 성공했다는 것만 확인하고 넘어가면 실제로는 낮은 수준으로 운영되는 상태를 놓치게 됩니다. 확인까지가 작업입니다.</a:t>
+              <a:t>왕복 지연에 초당 커밋 수를 곱하면 Primary 세션들이 추가로 기다리게 될 시간의 대략적인 크기가 나옵니다. 정밀한 값은 아니지만 SYNC가 감당 가능한지 처음 판단하는 데는 충분합니다. 전환 뒤에는 반드시 피크 시간대의 log file sync 평균을 이전과 비교합니다. 차이가 업무 허용 범위를 넘으면 FASTSYNC로 한 단계 낮추거나, Primary 가까이에 Far Sync를 두는 설계로 넘어갑니다. Far Sync는 Active Data Guard 옵션이 필요한 기능으로 10장에서 다룹니다.</a:t>
             </a:r>
           </a:p>
         </p:txBody>
@@ -817,7 +833,7 @@
           <a:lstStyle/>
           <a:p>
             <a:r>
-              <a:t>사람이 개입한 것은 Standby를 다시 켠 것뿐입니다. 나머지는 전부 자동입니다. 이것이 Maximum Availability가 "가용성을 해치지 않는 최고 수준의 보호"라 불리는 이유입니다. ORA-03113은 "연결이 끊겼다"는 뜻으로 네트워크 문제일 수도 인스턴스 다운일 수도 있으므로, Standby 쪽 상태를 확인해 구분해야 합니다. 유지보수 계획을 세울 때 이 실측이 근거가 됩니다. Availability 구성이라면 Standby를 계획적으로 내려도 서비스에 영향이 없고, 켜기만 하면 자동으로 회복된다는 것을 미리 확인해 둔 셈입니다.</a:t>
+              <a:t>목적지 문자열은 통째로 다시 지정해야 하므로, 운영 중에 속성 하나를 바꾸다 다른 속성을 빠뜨리는 실수가 잦습니다. 현재 값을 V$PARAMETER에서 그대로 복사한 뒤 고치는 방식을 권합니다. 속성 이름을 잘못 쓰면 ORA-02097과 함께 ORA-16024가 나오고 값은 바뀌지 않으니, 두 번째 줄의 오류 번호가 실제 원인입니다. 빠른 복구 영역을 로컬 아카이브로 쓰려면 11gR2부터는 USE_DB_RECOVERY_FILE_DEST를 명시해야 합니다.</a:t>
             </a:r>
           </a:p>
         </p:txBody>
@@ -887,7 +903,7 @@
           <a:lstStyle/>
           <a:p>
             <a:r>
-              <a:t>이 거부는 오류가 아니라 보호 장치입니다. 운영 중이라면 이것이 정답입니다. 다만 유지보수 계획을 세울 때는 반드시 고려해야 합니다. Standby를 내리려면 보호 모드 하향이 선행되어야 하고, 그 사이에는 무손실 보장이 없습니다. Standby를 둘 이상 두면 이 문제가 사라진다는 점도 다중화의 실용적 이유입니다. ORA-01154의 문면은 'database busy'라 다른 원인을 의심하기 쉽습니다. Maximum Protection 구성에서 이 오류를 만나면 트랜잭션이 아니라 보호 모드를 먼저 의심해야 한다는 점을 기억하게 해 주십시오.</a:t>
+              <a:t>Primary와 물리 Standby는 DB_NAME이 같습니다. 예시 구성에서는 둘 다 chicago이고, 고유 이름이 chicago와 boston으로 나뉩니다. 목적지에 적은 고유 이름은 LOG_ARCHIVE_CONFIG의 DG_CONFIG 목록에 들어 있어야 하며, 목록에 없는 이름을 쓰면 ORA-16053으로 설정 자체가 거부됩니다. DG_CONFIG는 리두를 주고받을 수 있는 상대를 정하는 파라미터라 Net 구성과 함께 3장에서 자세히 다룹니다.</a:t>
             </a:r>
           </a:p>
         </p:txBody>
@@ -957,7 +973,7 @@
           <a:lstStyle/>
           <a:p>
             <a:r>
-              <a:t>알림 로그의 문장이 그대로 설명입니다. 모든 standby 목적지가 실패했고, primary를 보호하기 위해 인스턴스 종료가 필요하며, LGWR이 그것을 수행했습니다. 종료를 수행한 것이 PMON이나 SMON이 아니라 LGWR이라는 점이 의미심장합니다. 커밋을 책임지는 프로세스가 "더 이상 약속을 지킬 수 없다"고 판단한 것입니다. 실습 04에서 학습자가 직접 이 장면을 만들어 봅니다. Primary가 실제로 죽는 실습이라 처음에는 당황하지만, 설계된 동작임을 알고 나면 Maximum Protection의 성격이 확실히 각인됩니다.</a:t>
+              <a:t>VALID_FOR가 있는 이유는 역할 전환입니다. Primary와 Standby 양쪽에 상대를 향하는 목적지를 미리 넣어 두면, 각 데이터베이스는 지금 역할에 맞는 것만 쓰고 나머지는 조용히 무시합니다. Switchover가 끝나면 파라미터를 고치지 않아도 반대 방향 목적지가 살아납니다. 단수형과 복수형을 모두 받고 두 값의 순서를 바꿔도 같은 의미라서, 자료마다 표기가 달라 보여도 같은 설정입니다.</a:t>
             </a:r>
           </a:p>
         </p:txBody>
@@ -1027,7 +1043,7 @@
           <a:lstStyle/>
           <a:p>
             <a:r>
-              <a:t>Maximum Protection의 진짜 비용은 평소의 성능이 아니라 이 복구 시간입니다. 도입 검토에서 반드시 계산에 넣어야 할 항목입니다. 그리고 선택 B로 갔다면 그 순간부터 무손실 보장이 없다는 사실을 관계자에게 알리고 기록으로 남겨야 합니다. 장애 한복판에서 누가 이 결정을 내릴지도 미리 정해 두어야 합니다. 순서를 어기면 어떻게 되는지도 짚어 주십시오. 보호 모드를 낮추기 전에 OPEN을 시도하면 다시 막힙니다. MOUNT → 모드 하향 → OPEN이 정해진 순서입니다.</a:t>
+              <a:t>물리 Standby는 자기 온라인 리두 로그를 만들지 않으므로 ONLINE_LOGFILE과 STANDBY_ROLE을 짝지은 목적지는 물리 Standby에서 늘 무시됩니다. 이 조합을 쓰는 곳은 논리 Standby뿐입니다. 로컬 아카이브 목적지를 ALL_LOGFILES로 두는 것은 Standby가 SRL도 아카이브해야 하기 때문입니다. 원격 목적지에서 VALID_FOR를 생략하면 기본값이 모든 경우에 쓰는 것이어서, Standby 역할일 때도 리두를 보내려 하는 의도치 않은 캐스케이딩이 생길 수 있습니다.</a:t>
             </a:r>
           </a:p>
         </p:txBody>
@@ -1097,7 +1113,7 @@
           <a:lstStyle/>
           <a:p>
             <a:r>
-              <a:t>AFFIRM을 쓰면 Standby의 SRL 디스크 기록까지 기다리므로 응답시간이 더 늘어납니다. NOAFFIRM은 메모리 수신 시점에 확인하므로 빠르지만 그만큼 보장이 약합니다. Maximum Protection과 Availability에서는 AFFIRM이 사실상 필수입니다. 원거리인데 무손실이 필요하다면 10장의 Far Sync가 답이 됩니다. 비동기의 잠재 손실량은 V$DATAGUARD_STATS의 transport lag로 가늠합니다. 이 값이 0에 가깝게 유지되면 실질 손실 위험도 작으므로, ASYNC라고 무조건 위험하다고 말할 것은 아닙니다.</a:t>
+              <a:t>NET_TIMEOUT은 Maximum Availability를 운영할 때 체감 동작을 정하는 값입니다. Standby가 응답하지 않으면 Primary 커밋은 최대 이 시간만큼 멈춰 있다가 목적지를 끊고 진행합니다. 너무 짧게 잡으면 잠깐의 네트워크 흔들림에도 목적지가 끊겨 보호 수준이 수시로 떨어지고, 너무 길게 잡으면 장애 때 업무가 그만큼 멈춥니다. REOPEN은 끊긴 목적지에 다시 붙어 보기까지의 간격이며, 0이면 재시도하지 않으니 일부러 0을 주는 경우는 드뭅니다.</a:t>
             </a:r>
           </a:p>
         </p:txBody>
@@ -1167,7 +1183,7 @@
           <a:lstStyle/>
           <a:p>
             <a:r>
-              <a:t>순서를 정해 두면 진단이 빨라집니다. VALID_NOW가 YES가 아니면 설정 문제이므로 오류를 찾을 필요가 없습니다. DEFERRED와 DISABLED는 겉보기가 비슷하지만 원인이 정반대입니다. 전자는 LOG_ARCHIVE_DEST_STATE_n을 DEFER로 사람이 껐고, 후자는 재시도 한도를 넘겨 오라클이 껐습니다. 오류 번호로도 방향을 가를 수 있습니다. ORA-03113이면 연결 단절, ORA-12514면 리스너는 살아 있으나 서비스가 없음, ORA-01034면 인스턴스가 없음입니다. 3장에서 이 구분을 실습으로 다룹니다.</a:t>
+              <a:t>MAX_FAILURE와 ALTERNATE는 짝으로 쓰입니다. 대표적인 예가 Far Sync 구성인데, Primary가 Far Sync로 보내다 실패하면 정해진 횟수 뒤에 최종 Standby로 직접 ASYNC 전송하도록 대체 목적지를 걸어 둡니다. 구체적인 구성은 10장에서 봅니다. MANDATORY는 그 목적지에 아카이브가 성공해야 온라인 리두 로그를 재사용할 수 있게 만드는 속성이라, 원격 목적지에 걸면 Standby가 오래 끊겼을 때 Primary가 로그를 돌리지 못하고 멈춥니다. 원격은 OPTIONAL이 일반적입니다.</a:t>
             </a:r>
           </a:p>
         </p:txBody>
@@ -1237,7 +1253,7 @@
           <a:lstStyle/>
           <a:p>
             <a:r>
-              <a:t>실무에서 가장 흔한 선택은 Maximum Availability입니다. 정상 운영 중에는 Protection과 똑같이 무손실이고 장애 시에만 판단이 갈리기 때문입니다. "평소에는 무손실, 장애 시에는 서비스 유지"라는 절충이 대부분의 요구 사항에 맞습니다. 모드를 정한 뒤에도 PROTECTION_LEVEL 확인을 자동화해 두는 것이 운영의 기본입니다. 표의 마지막 행이 10장으로 이어집니다. 원거리인데 무손실이 필요한 경우는 동기 전송의 왕복 시간이 감당되지 않으므로, 가까운 곳에 Far Sync 인스턴스를 두어 동기로 받고 그곳에서 원거리 Standby로 비동기 전달하는 구성을 씁니다.</a:t>
+              <a:t>압축 전송은 대역폭이 좁은 원거리 링크에서 transport lag를 줄이는 데 쓸모가 있지만, Primary CPU를 더 쓰고 Advanced Compression 옵션 라이선스가 필요합니다. 한 번 켜면 기능 사용 기록이 남으므로 라이선스를 확인한 뒤에 설정합니다. DELAY는 이름만 보면 전송 속성 같지만 전송은 즉시 하고 적용만 늦추는 속성이라 7장에서 다룹니다. Broker를 쓰면 이 속성들이 Broker 속성 이름으로 바뀌어도 최종 결과는 같은 목적지 문자열로 내려갑니다.</a:t>
             </a:r>
           </a:p>
         </p:txBody>
@@ -1307,7 +1323,7 @@
           <a:lstStyle/>
           <a:p>
             <a:r>
-              <a:t>진단할 때 파라미터 문자열을 보면 안 되는 이유가 여기 있습니다. 문자열은 사람이 쓴 것이고 뷰는 오라클이 해석한 결과입니다. 생략된 속성의 기본값까지 반영된 실제 적용값은 뷰에만 나타납니다. 실습 02에서 두 가지를 나란히 놓고 비교하며 각 속성이 어느 열로 가는지 직접 대응시킵니다. 한 가지 더 짚을 것은 로컬 목적지인 dest_1의 TRANSMIT_MODE가 SYNCHRONOUS로 표시된다는 점입니다. 원격 전송을 동기로 설정했다는 뜻이 아니라 로컬 디스크 기록이라 애초에 동기라는 의미이므로 혼동하지 않도록 미리 짚어 주십시오.</a:t>
+              <a:t>SYNC와 ASYNC의 차이는 LGWR가 전송에 얼마나 관여하느냐로 설명됩니다. SYNC에서는 LGWR가 리두를 NSS에 넘기고 그 확인을 받을 때까지 커밋 응답을 보내지 않습니다. ASYNC에서는 LGWR가 TTnn을 띄우기만 하고 손을 뗍니다. TTnn은 평소 리두 버퍼에서 읽지만, 전송이 밀려 버퍼에서 리두가 빠져나가면 온라인 리두 로그 파일을 읽어 따라갑니다. 예전 자료의 LNS라는 이름은 지금의 NSS와 TTnn으로 나뉘었다고 보면 됩니다.</a:t>
             </a:r>
           </a:p>
         </p:txBody>
@@ -1377,7 +1393,7 @@
           <a:lstStyle/>
           <a:p>
             <a:r>
-              <a:t>다섯 번째 항목이 실무에서 자주 빠집니다. 장애 한복판에서 "무손실을 포기하고 서비스를 살릴 것인가"를 결정할 권한이 누구에게 있는지 미리 정해 두지 않으면, 그 논의를 하는 동안 서비스가 계속 멈춰 있게 됩니다. 기술 준비만큼 의사결정 준비도 중요합니다. 다섯 번째 항목이 실무에서 자주 빠집니다. 장애 한복판에서 '무손실을 포기하고 서비스를 살릴 것인가'를 결정할 권한이 누구에게 있는지 미리 정해 두지 않으면, 그 논의를 하는 동안 서비스가 계속 멈춰 있게 됩니다. 기술 준비만큼 의사결정 준비도 중요합니다.</a:t>
+              <a:t>파라미터 문자열은 사람이 쓴 그대로 보여 줄 뿐이고, 데이터베이스가 어떻게 해석했는지는 V$ARCHIVE_DEST에 열 단위로 나옵니다. SYNC로 바꿨다면 TRANSMIT_MODE가 SYNCHRONOUS 계열로, AFFIRM 열이 YES로 바뀌어야 합니다. VALID_NOW가 YES가 아니면 VALID_FOR 때문에 지금 역할에서 무시되는 목적지입니다. 연결이 끊기면 STATUS가 ERROR가 되고 ERROR 열에 ORA 번호가 남는데, 여기서부터 이어지는 진단 절차는 15장에서 다룹니다.</a:t>
             </a:r>
           </a:p>
         </p:txBody>
@@ -1447,7 +1463,7 @@
           <a:lstStyle/>
           <a:p>
             <a:r>
-              <a:t>이 장에서 ORA-01126을 만나며 시행착오로 알아낸 요건을, Broker는 VALIDATE DATABASE 명령 하나로 알려 줍니다. 편리하지만 그것만 쓰면 원리를 모르게 됩니다. SHOW CONFIGURATION이 경고를 띄웠을 때 그 뒤에 PROTECTION_LEVEL과 VALID_NOW가 있다는 것을 아는 사람과 모르는 사람의 진단 속도는 크게 다릅니다.</a:t>
+              <a:t>대칭 구성은 Switchover를 준비하는 가장 기본적인 방법입니다. 지금은 chicago의 2번 목적지만 쓰이고 boston의 2번은 VALID_FOR 때문에 무시되다가, 역할이 바뀌면 그 반대가 됩니다. 이때 boston 쪽 목적지가 ASYNC로 남아 있으면 Switchover 직후 Maximum Availability의 요건이 깨져 보호 수준이 떨어집니다. 전송 방식과 SRL까지 양쪽을 똑같이 맞춰 두어야 하며, Broker는 이 대칭을 LogXptMode 속성으로 관리합니다.</a:t>
             </a:r>
           </a:p>
         </p:txBody>
@@ -1517,7 +1533,7 @@
           <a:lstStyle/>
           <a:p>
             <a:r>
-              <a:t>유지보수로 Standby를 오래 내려야 할 때 이 파라미터를 DEFER로 두면 Primary가 실패한 목적지에 계속 재시도하지 않습니다. 알림 로그가 오류로 뒤덮이는 것을 막을 수 있고, 재시도 부담도 없어집니다. 작업이 끝나면 ENABLE로 되돌리는 것을 잊지 않아야 하며, 되돌리지 않아 리두가 몇 시간씩 안 가는 사고가 실제로 흔합니다. DEFERRED와 DISABLED를 구분해야 하는 이유이기도 합니다.</a:t>
+              <a:t>새로 만든 구성은 특별히 바꾸지 않으면 이 모드로 동작합니다. Primary 입장에서는 Standby가 있든 없든 커밋 경로가 같으므로 성능 영향이 거의 없습니다. 네트워크가 충분히 빠르면 transport lag가 몇 초 수준이라 실제 보호 수준도 생각보다 높습니다. 다만 무손실을 보장하지는 않으니, 이 모드를 쓰는 구성에서는 transport lag를 감시하는 것이 곧 손실 범위를 관리하는 일입니다. SYNC 목적지를 두더라도 이 모드에서는 Standby 장애 때 Primary가 기다리지 않습니다.</a:t>
             </a:r>
           </a:p>
         </p:txBody>
@@ -1587,7 +1603,7 @@
           <a:lstStyle/>
           <a:p>
             <a:r>
-              <a:t>압축은 만능이 아닙니다. CPU를 써서 대역폭을 아끼는 맞바꿈이므로, 대역폭이 넉넉하고 CPU가 빠듯한 환경에서는 오히려 손해입니다. 판단하려면 먼저 현재 리두 생성량과 회선 용량을 측정해야 합니다. 갭이 생겼을 때 밀린 아카이브를 한꺼번에 보내는 구간에서는 효과가 확실하므로, 상시 압축 대신 그런 상황에만 쓰는 구성도 검토할 만합니다. 커밋 경로가 바뀌었다는 점도 함께 짚어 주십시오. 비동기에서는 LGWR이 전송에 관여하지 않았지만, 동기에서는 LGWR이 NSSn의 응답을 기다린 뒤에야 커밋을 완료합니다. 이 한 줄의 차이가 커밋 응답시간에 네트워크 왕복을 더하는 이유입니다.</a:t>
+              <a:t>실무에서 무손실을 원할 때 가장 많이 고르는 모드입니다. 평소에는 SYNC로 무손실을 지키다가, Standby나 네트워크에 문제가 생기면 NET_TIMEOUT만큼 기다린 뒤 Primary를 살리는 쪽을 택합니다. 이후 Primary는 사실상 Maximum Performance처럼 돌다가, 장애가 풀리고 갭이 해소되면 사람이 손대지 않아도 원래 보호 수준으로 돌아옵니다. 약점은 그 비동기화 구간입니다. 그 사이에 Primary까지 잃으면 구간 동안의 커밋은 Standby에 없습니다.</a:t>
             </a:r>
           </a:p>
         </p:txBody>
@@ -1657,7 +1673,357 @@
           <a:lstStyle/>
           <a:p>
             <a:r>
-              <a:t>세 습관이 사실은 하나의 원칙입니다. 설정한 것과 실제로 동작하는 것이 다를 수 있다는 것입니다. 파라미터에 SYNC라고 써 있어도 실제로는 아닐 수 있고, 명령이 성공해도 그 수준으로 운영되지 않을 수 있으며, 오류 메시지가 말하는 원인이 진짜 원인이 아닐 수 있습니다. Data Guard 운영에서 이 회의적 태도가 진단 속도를 결정합니다. 커밋 경로가 바뀌었다는 점도 함께 짚어 주십시오. 비동기에서는 LGWR이 전송에 관여하지 않았지만, 동기에서는 LGWR이 NSSn의 응답을 기다린 뒤에야 커밋을 완료합니다. 이 한 줄의 차이가 커밋 응답시간에 네트워크 왕복을 더하는 이유입니다.</a:t>
+              <a:t>이 모드는 보호하지 못하는 커밋을 하나라도 허용하느니 Primary를 멈추는 쪽을 고릅니다. Standby가 하나뿐이면 Standby 서버의 장애나 네트워크 단절이 곧 운영 DB 정지로 이어집니다. Oracle이 Standby를 둘 이상 두라고 권하는 이유가 여기에 있습니다. 마지막 동기 Standby를 SHUTDOWN으로 내리려 하면 ORA-01154로 거부되므로, Standby 유지 보수는 모드를 Maximum Availability로 내리는 것부터 시작해야 합니다.</a:t>
+            </a:r>
+          </a:p>
+        </p:txBody>
+      </p:sp>
+      <p:sp>
+        <p:nvSpPr>
+          <p:cNvPr id="4" name="Slide Number Placeholder 3"/>
+          <p:cNvSpPr>
+            <a:spLocks noGrp="1"/>
+          </p:cNvSpPr>
+          <p:nvPr>
+            <p:ph type="sldNum" idx="5" sz="quarter"/>
+          </p:nvPr>
+        </p:nvSpPr>
+        <p:spPr/>
+      </p:sp>
+    </p:spTree>
+  </p:cSld>
+  <p:clrMapOvr>
+    <a:masterClrMapping/>
+  </p:clrMapOvr>
+</p:notes>
+</file>
+
+<file path=ppt/notesSlides/notesSlide25.xml><?xml version="1.0" encoding="utf-8"?>
+<p:notes xmlns:a="http://schemas.openxmlformats.org/drawingml/2006/main" xmlns:p="http://schemas.openxmlformats.org/presentationml/2006/main" xmlns:r="http://schemas.openxmlformats.org/officeDocument/2006/relationships">
+  <p:cSld>
+    <p:spTree>
+      <p:nvGrpSpPr>
+        <p:cNvPr id="1" name=""/>
+        <p:cNvGrpSpPr/>
+        <p:nvPr/>
+      </p:nvGrpSpPr>
+      <p:grpSpPr>
+        <a:xfrm>
+          <a:off x="0" y="0"/>
+          <a:ext cx="0" cy="0"/>
+          <a:chOff x="0" y="0"/>
+          <a:chExt cx="0" cy="0"/>
+        </a:xfrm>
+      </p:grpSpPr>
+      <p:sp>
+        <p:nvSpPr>
+          <p:cNvPr id="2" name="Slide Image Placeholder 1"/>
+          <p:cNvSpPr>
+            <a:spLocks noGrp="1"/>
+          </p:cNvSpPr>
+          <p:nvPr>
+            <p:ph type="sldImg" idx="2"/>
+          </p:nvPr>
+        </p:nvSpPr>
+        <p:spPr/>
+      </p:sp>
+      <p:sp>
+        <p:nvSpPr>
+          <p:cNvPr id="3" name="Notes Placeholder 2"/>
+          <p:cNvSpPr>
+            <a:spLocks noGrp="1"/>
+          </p:cNvSpPr>
+          <p:nvPr>
+            <p:ph type="body" idx="3" sz="quarter"/>
+          </p:nvPr>
+        </p:nvSpPr>
+        <p:spPr/>
+        <p:txBody>
+          <a:bodyPr/>
+          <a:lstStyle/>
+          <a:p>
+            <a:r>
+              <a:t>표를 읽을 때 Maximum Availability의 무손실 조건을 정확히 보아야 합니다. SYNC AFFIRM을 쓰면 단일 장애에서 무손실이고, SYNC NOAFFIRM이면 여러 사이트가 동시에 장애를 겪을 때 손실 가능성이 생깁니다. Maximum Protection만이 이중 장애에서도 무손실을 보장하는데, 그 대가가 Standby 장애 시 Primary 종료입니다. 세 모드 가운데 Standby 쪽 문제가 Primary 정지로 번지는 모드는 Maximum Protection 하나뿐입니다.</a:t>
+            </a:r>
+          </a:p>
+        </p:txBody>
+      </p:sp>
+      <p:sp>
+        <p:nvSpPr>
+          <p:cNvPr id="4" name="Slide Number Placeholder 3"/>
+          <p:cNvSpPr>
+            <a:spLocks noGrp="1"/>
+          </p:cNvSpPr>
+          <p:nvPr>
+            <p:ph type="sldNum" idx="5" sz="quarter"/>
+          </p:nvPr>
+        </p:nvSpPr>
+        <p:spPr/>
+      </p:sp>
+    </p:spTree>
+  </p:cSld>
+  <p:clrMapOvr>
+    <a:masterClrMapping/>
+  </p:clrMapOvr>
+</p:notes>
+</file>
+
+<file path=ppt/notesSlides/notesSlide26.xml><?xml version="1.0" encoding="utf-8"?>
+<p:notes xmlns:a="http://schemas.openxmlformats.org/drawingml/2006/main" xmlns:p="http://schemas.openxmlformats.org/presentationml/2006/main" xmlns:r="http://schemas.openxmlformats.org/officeDocument/2006/relationships">
+  <p:cSld>
+    <p:spTree>
+      <p:nvGrpSpPr>
+        <p:cNvPr id="1" name=""/>
+        <p:cNvGrpSpPr/>
+        <p:nvPr/>
+      </p:nvGrpSpPr>
+      <p:grpSpPr>
+        <a:xfrm>
+          <a:off x="0" y="0"/>
+          <a:ext cx="0" cy="0"/>
+          <a:chOff x="0" y="0"/>
+          <a:chExt cx="0" cy="0"/>
+        </a:xfrm>
+      </p:grpSpPr>
+      <p:sp>
+        <p:nvSpPr>
+          <p:cNvPr id="2" name="Slide Image Placeholder 1"/>
+          <p:cNvSpPr>
+            <a:spLocks noGrp="1"/>
+          </p:cNvSpPr>
+          <p:nvPr>
+            <p:ph type="sldImg" idx="2"/>
+          </p:nvPr>
+        </p:nvSpPr>
+        <p:spPr/>
+      </p:sp>
+      <p:sp>
+        <p:nvSpPr>
+          <p:cNvPr id="3" name="Notes Placeholder 2"/>
+          <p:cNvSpPr>
+            <a:spLocks noGrp="1"/>
+          </p:cNvSpPr>
+          <p:nvPr>
+            <p:ph type="body" idx="3" sz="quarter"/>
+          </p:nvPr>
+        </p:nvSpPr>
+        <p:spPr/>
+        <p:txBody>
+          <a:bodyPr/>
+          <a:lstStyle/>
+          <a:p>
+            <a:r>
+              <a:t>모드 정의를 장애 상황에 대입해 보면 차이가 훨씬 구체적으로 보입니다. Maximum Availability의 약점은 장애가 순서대로 두 번 올 때입니다. 네트워크가 먼저 끊겨 보호 수준이 내려간 사이에 Primary까지 잃으면, 끊긴 이후의 커밋은 Standby에 없습니다. Maximum Protection은 그 구간 자체를 만들지 않는 대신 Primary를 멈춥니다. 한 가지 덧붙이면, 손실 여부는 도착한 리두 기준입니다. 적용이 밀려 있어도 도착한 리두는 Failover 전에 모두 적용됩니다.</a:t>
+            </a:r>
+          </a:p>
+        </p:txBody>
+      </p:sp>
+      <p:sp>
+        <p:nvSpPr>
+          <p:cNvPr id="4" name="Slide Number Placeholder 3"/>
+          <p:cNvSpPr>
+            <a:spLocks noGrp="1"/>
+          </p:cNvSpPr>
+          <p:nvPr>
+            <p:ph type="sldNum" idx="5" sz="quarter"/>
+          </p:nvPr>
+        </p:nvSpPr>
+        <p:spPr/>
+      </p:sp>
+    </p:spTree>
+  </p:cSld>
+  <p:clrMapOvr>
+    <a:masterClrMapping/>
+  </p:clrMapOvr>
+</p:notes>
+</file>
+
+<file path=ppt/notesSlides/notesSlide27.xml><?xml version="1.0" encoding="utf-8"?>
+<p:notes xmlns:a="http://schemas.openxmlformats.org/drawingml/2006/main" xmlns:p="http://schemas.openxmlformats.org/presentationml/2006/main" xmlns:r="http://schemas.openxmlformats.org/officeDocument/2006/relationships">
+  <p:cSld>
+    <p:spTree>
+      <p:nvGrpSpPr>
+        <p:cNvPr id="1" name=""/>
+        <p:cNvGrpSpPr/>
+        <p:nvPr/>
+      </p:nvGrpSpPr>
+      <p:grpSpPr>
+        <a:xfrm>
+          <a:off x="0" y="0"/>
+          <a:ext cx="0" cy="0"/>
+          <a:chOff x="0" y="0"/>
+          <a:chExt cx="0" cy="0"/>
+        </a:xfrm>
+      </p:grpSpPr>
+      <p:sp>
+        <p:nvSpPr>
+          <p:cNvPr id="2" name="Slide Image Placeholder 1"/>
+          <p:cNvSpPr>
+            <a:spLocks noGrp="1"/>
+          </p:cNvSpPr>
+          <p:nvPr>
+            <p:ph type="sldImg" idx="2"/>
+          </p:nvPr>
+        </p:nvSpPr>
+        <p:spPr/>
+      </p:sp>
+      <p:sp>
+        <p:nvSpPr>
+          <p:cNvPr id="3" name="Notes Placeholder 2"/>
+          <p:cNvSpPr>
+            <a:spLocks noGrp="1"/>
+          </p:cNvSpPr>
+          <p:nvPr>
+            <p:ph type="body" idx="3" sz="quarter"/>
+          </p:nvPr>
+        </p:nvSpPr>
+        <p:spPr/>
+        <p:txBody>
+          <a:bodyPr/>
+          <a:lstStyle/>
+          <a:p>
+            <a:r>
+              <a:t>V$DATABASE의 두 열은 이름이 비슷해 한 열만 보는 경우가 많습니다. Maximum Availability에서 Standby가 끊기면 PROTECTION_MODE는 그대로 MAXIMUM AVAILABILITY이고 PROTECTION_LEVEL만 RESYNCHRONIZATION으로 내려갑니다. 업무는 아무 이상 없이 돌기 때문에, 감시 스크립트가 MODE만 보고 있으면 무손실 보장이 사라진 상태를 몇 주씩 모르고 지낼 수 있습니다. 두 열의 값이 서로 다른 상태가 일정 시간 이상 계속되면 경보를 내도록 만드는 것이 기본입니다.</a:t>
+            </a:r>
+          </a:p>
+        </p:txBody>
+      </p:sp>
+      <p:sp>
+        <p:nvSpPr>
+          <p:cNvPr id="4" name="Slide Number Placeholder 3"/>
+          <p:cNvSpPr>
+            <a:spLocks noGrp="1"/>
+          </p:cNvSpPr>
+          <p:nvPr>
+            <p:ph type="sldNum" idx="5" sz="quarter"/>
+          </p:nvPr>
+        </p:nvSpPr>
+        <p:spPr/>
+      </p:sp>
+    </p:spTree>
+  </p:cSld>
+  <p:clrMapOvr>
+    <a:masterClrMapping/>
+  </p:clrMapOvr>
+</p:notes>
+</file>
+
+<file path=ppt/notesSlides/notesSlide28.xml><?xml version="1.0" encoding="utf-8"?>
+<p:notes xmlns:a="http://schemas.openxmlformats.org/drawingml/2006/main" xmlns:p="http://schemas.openxmlformats.org/presentationml/2006/main" xmlns:r="http://schemas.openxmlformats.org/officeDocument/2006/relationships">
+  <p:cSld>
+    <p:spTree>
+      <p:nvGrpSpPr>
+        <p:cNvPr id="1" name=""/>
+        <p:cNvGrpSpPr/>
+        <p:nvPr/>
+      </p:nvGrpSpPr>
+      <p:grpSpPr>
+        <a:xfrm>
+          <a:off x="0" y="0"/>
+          <a:ext cx="0" cy="0"/>
+          <a:chOff x="0" y="0"/>
+          <a:chExt cx="0" cy="0"/>
+        </a:xfrm>
+      </p:grpSpPr>
+      <p:sp>
+        <p:nvSpPr>
+          <p:cNvPr id="2" name="Slide Image Placeholder 1"/>
+          <p:cNvSpPr>
+            <a:spLocks noGrp="1"/>
+          </p:cNvSpPr>
+          <p:nvPr>
+            <p:ph type="sldImg" idx="2"/>
+          </p:nvPr>
+        </p:nvSpPr>
+        <p:spPr/>
+      </p:sp>
+      <p:sp>
+        <p:nvSpPr>
+          <p:cNvPr id="3" name="Notes Placeholder 2"/>
+          <p:cNvSpPr>
+            <a:spLocks noGrp="1"/>
+          </p:cNvSpPr>
+          <p:nvPr>
+            <p:ph type="body" idx="3" sz="quarter"/>
+          </p:nvPr>
+        </p:nvSpPr>
+        <p:spPr/>
+        <p:txBody>
+          <a:bodyPr/>
+          <a:lstStyle/>
+          <a:p>
+            <a:r>
+              <a:t>RESYNCHRONIZATION이 보였다고 곧장 장애로 판단할 필요는 없습니다. 모드를 막 올린 직후나 Standby가 재기동한 직후에는 SYNC 전송이 자리를 잡는 동안 잠시 나타나며, 로그 스위치를 한 번 일으키면 대개 금방 사라집니다. 오래 남아 있다면 V$ARCHIVE_DEST에서 목적지 상태를 봅니다. ERROR와 ORA 번호가 있으면 네트워크나 Standby 쪽 장애이고, 오류는 없는데 목적지가 ASYNC라면 모드만 올리고 전송 속성을 바꾸지 않은 설정 실수입니다.</a:t>
+            </a:r>
+          </a:p>
+        </p:txBody>
+      </p:sp>
+      <p:sp>
+        <p:nvSpPr>
+          <p:cNvPr id="4" name="Slide Number Placeholder 3"/>
+          <p:cNvSpPr>
+            <a:spLocks noGrp="1"/>
+          </p:cNvSpPr>
+          <p:nvPr>
+            <p:ph type="sldNum" idx="5" sz="quarter"/>
+          </p:nvPr>
+        </p:nvSpPr>
+        <p:spPr/>
+      </p:sp>
+    </p:spTree>
+  </p:cSld>
+  <p:clrMapOvr>
+    <a:masterClrMapping/>
+  </p:clrMapOvr>
+</p:notes>
+</file>
+
+<file path=ppt/notesSlides/notesSlide29.xml><?xml version="1.0" encoding="utf-8"?>
+<p:notes xmlns:a="http://schemas.openxmlformats.org/drawingml/2006/main" xmlns:p="http://schemas.openxmlformats.org/presentationml/2006/main" xmlns:r="http://schemas.openxmlformats.org/officeDocument/2006/relationships">
+  <p:cSld>
+    <p:spTree>
+      <p:nvGrpSpPr>
+        <p:cNvPr id="1" name=""/>
+        <p:cNvGrpSpPr/>
+        <p:nvPr/>
+      </p:nvGrpSpPr>
+      <p:grpSpPr>
+        <a:xfrm>
+          <a:off x="0" y="0"/>
+          <a:ext cx="0" cy="0"/>
+          <a:chOff x="0" y="0"/>
+          <a:chExt cx="0" cy="0"/>
+        </a:xfrm>
+      </p:grpSpPr>
+      <p:sp>
+        <p:nvSpPr>
+          <p:cNvPr id="2" name="Slide Image Placeholder 1"/>
+          <p:cNvSpPr>
+            <a:spLocks noGrp="1"/>
+          </p:cNvSpPr>
+          <p:nvPr>
+            <p:ph type="sldImg" idx="2"/>
+          </p:nvPr>
+        </p:nvSpPr>
+        <p:spPr/>
+      </p:sp>
+      <p:sp>
+        <p:nvSpPr>
+          <p:cNvPr id="3" name="Notes Placeholder 2"/>
+          <p:cNvSpPr>
+            <a:spLocks noGrp="1"/>
+          </p:cNvSpPr>
+          <p:nvPr>
+            <p:ph type="body" idx="3" sz="quarter"/>
+          </p:nvPr>
+        </p:nvSpPr>
+        <p:spPr/>
+        <p:txBody>
+          <a:bodyPr/>
+          <a:lstStyle/>
+          <a:p>
+            <a:r>
+              <a:t>요건을 갖추지 않고 모드를 올리면 두 가지 결과가 나옵니다. Maximum Protection은 ORA-01126으로 거부되고, Maximum Availability는 명령은 성공하지만 PROTECTION_LEVEL이 RESYNCHRONIZATION에 머물러 이름만 바뀐 상태가 됩니다. 후자가 더 위험합니다. 오류가 없으니 작업자는 끝났다고 생각하기 쉽기 때문입니다. Primary 쪽 SRL과 Standby 쪽 목적지는 지금 당장 쓰이지 않지만, Switchover 뒤에도 같은 보호 모드를 유지하려면 함께 갖춰야 합니다.</a:t>
             </a:r>
           </a:p>
         </p:txBody>
@@ -1727,7 +2093,637 @@
           <a:lstStyle/>
           <a:p>
             <a:r>
-              <a:t>PARALLELSYNC라는 값이 낯설 수 있는데, 여러 동기 목적지가 있을 때 병렬로 전송한다는 뜻이며 동기 전송이 켜졌음을 나타냅니다. 실측에서 SYNC로 바꾼 직후 TT02와 TT04가 CLOSING으로 보였는데, 이는 전환 과정이지 오류가 아닙니다. ALTER SYSTEM ARCHIVE LOG CURRENT를 한 번 실행하면 전환이 빨리 매듭지어집니다.</a:t>
+              <a:t>SRL은 Standby가 남에게서 받은 리두를 담는 전용 그릇입니다. SRL이 없어도 전송 자체는 되지만 RFS가 아카이브 로그 파일에 직접 쓰게 되고, 실시간 적용이 동작하지 않으며 SYNC 기반 보호 모드의 요건도 채우지 못합니다. 공식 교재가 세 모드 모두의 요건에 SRL을 넣은 것도 이 때문입니다. Primary에도 SRL을 미리 만들어 두는데, Switchover로 역할이 바뀌는 순간부터 옛 Primary가 리두를 받아야 하기 때문입니다. 몇 개를 어떤 크기로 만드는지는 4장에서 계산합니다.</a:t>
+            </a:r>
+          </a:p>
+        </p:txBody>
+      </p:sp>
+      <p:sp>
+        <p:nvSpPr>
+          <p:cNvPr id="4" name="Slide Number Placeholder 3"/>
+          <p:cNvSpPr>
+            <a:spLocks noGrp="1"/>
+          </p:cNvSpPr>
+          <p:nvPr>
+            <p:ph type="sldNum" idx="5" sz="quarter"/>
+          </p:nvPr>
+        </p:nvSpPr>
+        <p:spPr/>
+      </p:sp>
+    </p:spTree>
+  </p:cSld>
+  <p:clrMapOvr>
+    <a:masterClrMapping/>
+  </p:clrMapOvr>
+</p:notes>
+</file>
+
+<file path=ppt/notesSlides/notesSlide30.xml><?xml version="1.0" encoding="utf-8"?>
+<p:notes xmlns:a="http://schemas.openxmlformats.org/drawingml/2006/main" xmlns:p="http://schemas.openxmlformats.org/presentationml/2006/main" xmlns:r="http://schemas.openxmlformats.org/officeDocument/2006/relationships">
+  <p:cSld>
+    <p:spTree>
+      <p:nvGrpSpPr>
+        <p:cNvPr id="1" name=""/>
+        <p:cNvGrpSpPr/>
+        <p:nvPr/>
+      </p:nvGrpSpPr>
+      <p:grpSpPr>
+        <a:xfrm>
+          <a:off x="0" y="0"/>
+          <a:ext cx="0" cy="0"/>
+          <a:chOff x="0" y="0"/>
+          <a:chExt cx="0" cy="0"/>
+        </a:xfrm>
+      </p:grpSpPr>
+      <p:sp>
+        <p:nvSpPr>
+          <p:cNvPr id="2" name="Slide Image Placeholder 1"/>
+          <p:cNvSpPr>
+            <a:spLocks noGrp="1"/>
+          </p:cNvSpPr>
+          <p:nvPr>
+            <p:ph type="sldImg" idx="2"/>
+          </p:nvPr>
+        </p:nvSpPr>
+        <p:spPr/>
+      </p:sp>
+      <p:sp>
+        <p:nvSpPr>
+          <p:cNvPr id="3" name="Notes Placeholder 2"/>
+          <p:cNvSpPr>
+            <a:spLocks noGrp="1"/>
+          </p:cNvSpPr>
+          <p:nvPr>
+            <p:ph type="body" idx="3" sz="quarter"/>
+          </p:nvPr>
+        </p:nvSpPr>
+        <p:spPr/>
+        <p:txBody>
+          <a:bodyPr/>
+          <a:lstStyle/>
+          <a:p>
+            <a:r>
+              <a:t>명령 자체는 짧지만 그 앞뒤가 중요합니다. 앞에서는 목적지 문자열을 모드에 맞게 바꾸고, 뒤에서는 ALTER SYSTEM ARCHIVE LOG CURRENT로 로그 스위치를 한 번 일으킨 다음 V$DATABASE의 두 열을 함께 확인합니다. Performance와 Availability 사이는 열린 상태에서 자유롭게 오르내릴 수 있습니다. Broker가 관리하는 구성이라면 SQL로 모드나 목적지를 바꾸면 안 됩니다. Broker가 자기 속성 값으로 다시 덮어쓰고 불일치 경고를 남기기 때문입니다.</a:t>
+            </a:r>
+          </a:p>
+        </p:txBody>
+      </p:sp>
+      <p:sp>
+        <p:nvSpPr>
+          <p:cNvPr id="4" name="Slide Number Placeholder 3"/>
+          <p:cNvSpPr>
+            <a:spLocks noGrp="1"/>
+          </p:cNvSpPr>
+          <p:nvPr>
+            <p:ph type="sldNum" idx="5" sz="quarter"/>
+          </p:nvPr>
+        </p:nvSpPr>
+        <p:spPr/>
+      </p:sp>
+    </p:spTree>
+  </p:cSld>
+  <p:clrMapOvr>
+    <a:masterClrMapping/>
+  </p:clrMapOvr>
+</p:notes>
+</file>
+
+<file path=ppt/notesSlides/notesSlide31.xml><?xml version="1.0" encoding="utf-8"?>
+<p:notes xmlns:a="http://schemas.openxmlformats.org/drawingml/2006/main" xmlns:p="http://schemas.openxmlformats.org/presentationml/2006/main" xmlns:r="http://schemas.openxmlformats.org/officeDocument/2006/relationships">
+  <p:cSld>
+    <p:spTree>
+      <p:nvGrpSpPr>
+        <p:cNvPr id="1" name=""/>
+        <p:cNvGrpSpPr/>
+        <p:nvPr/>
+      </p:nvGrpSpPr>
+      <p:grpSpPr>
+        <a:xfrm>
+          <a:off x="0" y="0"/>
+          <a:ext cx="0" cy="0"/>
+          <a:chOff x="0" y="0"/>
+          <a:chExt cx="0" cy="0"/>
+        </a:xfrm>
+      </p:grpSpPr>
+      <p:sp>
+        <p:nvSpPr>
+          <p:cNvPr id="2" name="Slide Image Placeholder 1"/>
+          <p:cNvSpPr>
+            <a:spLocks noGrp="1"/>
+          </p:cNvSpPr>
+          <p:nvPr>
+            <p:ph type="sldImg" idx="2"/>
+          </p:nvPr>
+        </p:nvSpPr>
+        <p:spPr/>
+      </p:sp>
+      <p:sp>
+        <p:nvSpPr>
+          <p:cNvPr id="3" name="Notes Placeholder 2"/>
+          <p:cNvSpPr>
+            <a:spLocks noGrp="1"/>
+          </p:cNvSpPr>
+          <p:nvPr>
+            <p:ph type="body" idx="3" sz="quarter"/>
+          </p:nvPr>
+        </p:nvSpPr>
+        <p:spPr/>
+        <p:txBody>
+          <a:bodyPr/>
+          <a:lstStyle/>
+          <a:p>
+            <a:r>
+              <a:t>ORA-01126의 메시지는 데이터베이스를 마운트 상태로 두라고 말합니다. 실제로 마운트 상태에서는 명령이 통과하지만, 요건 검사를 건너뛴 결과입니다. 요건이 갖춰지지 않은 채 Maximum Protection으로 Primary를 열면 동기화된 Standby가 없어 곧바로 멈출 수 있습니다. 열린 상태에서 거부당했다면 메시지대로 마운트하기보다 Maximum Availability로 먼저 올리고 PROTECTION_LEVEL이 MAXIMUM AVAILABILITY로 올라온 것을 확인한 뒤 다시 시도하는 것이 올바른 순서입니다.</a:t>
+            </a:r>
+          </a:p>
+        </p:txBody>
+      </p:sp>
+      <p:sp>
+        <p:nvSpPr>
+          <p:cNvPr id="4" name="Slide Number Placeholder 3"/>
+          <p:cNvSpPr>
+            <a:spLocks noGrp="1"/>
+          </p:cNvSpPr>
+          <p:nvPr>
+            <p:ph type="sldNum" idx="5" sz="quarter"/>
+          </p:nvPr>
+        </p:nvSpPr>
+        <p:spPr/>
+      </p:sp>
+    </p:spTree>
+  </p:cSld>
+  <p:clrMapOvr>
+    <a:masterClrMapping/>
+  </p:clrMapOvr>
+</p:notes>
+</file>
+
+<file path=ppt/notesSlides/notesSlide32.xml><?xml version="1.0" encoding="utf-8"?>
+<p:notes xmlns:a="http://schemas.openxmlformats.org/drawingml/2006/main" xmlns:p="http://schemas.openxmlformats.org/presentationml/2006/main" xmlns:r="http://schemas.openxmlformats.org/officeDocument/2006/relationships">
+  <p:cSld>
+    <p:spTree>
+      <p:nvGrpSpPr>
+        <p:cNvPr id="1" name=""/>
+        <p:cNvGrpSpPr/>
+        <p:nvPr/>
+      </p:nvGrpSpPr>
+      <p:grpSpPr>
+        <a:xfrm>
+          <a:off x="0" y="0"/>
+          <a:ext cx="0" cy="0"/>
+          <a:chOff x="0" y="0"/>
+          <a:chExt cx="0" cy="0"/>
+        </a:xfrm>
+      </p:grpSpPr>
+      <p:sp>
+        <p:nvSpPr>
+          <p:cNvPr id="2" name="Slide Image Placeholder 1"/>
+          <p:cNvSpPr>
+            <a:spLocks noGrp="1"/>
+          </p:cNvSpPr>
+          <p:nvPr>
+            <p:ph type="sldImg" idx="2"/>
+          </p:nvPr>
+        </p:nvSpPr>
+        <p:spPr/>
+      </p:sp>
+      <p:sp>
+        <p:nvSpPr>
+          <p:cNvPr id="3" name="Notes Placeholder 2"/>
+          <p:cNvSpPr>
+            <a:spLocks noGrp="1"/>
+          </p:cNvSpPr>
+          <p:nvPr>
+            <p:ph type="body" idx="3" sz="quarter"/>
+          </p:nvPr>
+        </p:nvSpPr>
+        <p:spPr/>
+        <p:txBody>
+          <a:bodyPr/>
+          <a:lstStyle/>
+          <a:p>
+            <a:r>
+              <a:t>Broker를 쓰면 목적지 문자열을 직접 만들 일이 없습니다. Standby마다 LogXptMode를 정하면 Broker가 SYNC AFFIRM, SYNC NOAFFIRM, ASYNC NOAFFIRM 가운데 맞는 문자열을 만들어 넣습니다. 이때 현재 Primary의 LogXptMode도 함께 지정하는데, 이 값은 역할이 바뀌어 Standby가 Primary가 되었을 때 옛 Primary로 향하는 목적지에 쓰입니다. Broker 구성 생성과 속성 관리의 세부는 13장과 14장에서 다루고, 여기서는 순서가 SQL과 같다는 것만 확인하면 됩니다.</a:t>
+            </a:r>
+          </a:p>
+        </p:txBody>
+      </p:sp>
+      <p:sp>
+        <p:nvSpPr>
+          <p:cNvPr id="4" name="Slide Number Placeholder 3"/>
+          <p:cNvSpPr>
+            <a:spLocks noGrp="1"/>
+          </p:cNvSpPr>
+          <p:nvPr>
+            <p:ph type="sldNum" idx="5" sz="quarter"/>
+          </p:nvPr>
+        </p:nvSpPr>
+        <p:spPr/>
+      </p:sp>
+    </p:spTree>
+  </p:cSld>
+  <p:clrMapOvr>
+    <a:masterClrMapping/>
+  </p:clrMapOvr>
+</p:notes>
+</file>
+
+<file path=ppt/notesSlides/notesSlide33.xml><?xml version="1.0" encoding="utf-8"?>
+<p:notes xmlns:a="http://schemas.openxmlformats.org/drawingml/2006/main" xmlns:p="http://schemas.openxmlformats.org/presentationml/2006/main" xmlns:r="http://schemas.openxmlformats.org/officeDocument/2006/relationships">
+  <p:cSld>
+    <p:spTree>
+      <p:nvGrpSpPr>
+        <p:cNvPr id="1" name=""/>
+        <p:cNvGrpSpPr/>
+        <p:nvPr/>
+      </p:nvGrpSpPr>
+      <p:grpSpPr>
+        <a:xfrm>
+          <a:off x="0" y="0"/>
+          <a:ext cx="0" cy="0"/>
+          <a:chOff x="0" y="0"/>
+          <a:chExt cx="0" cy="0"/>
+        </a:xfrm>
+      </p:grpSpPr>
+      <p:sp>
+        <p:nvSpPr>
+          <p:cNvPr id="2" name="Slide Image Placeholder 1"/>
+          <p:cNvSpPr>
+            <a:spLocks noGrp="1"/>
+          </p:cNvSpPr>
+          <p:nvPr>
+            <p:ph type="sldImg" idx="2"/>
+          </p:nvPr>
+        </p:nvSpPr>
+        <p:spPr/>
+      </p:sp>
+      <p:sp>
+        <p:nvSpPr>
+          <p:cNvPr id="3" name="Notes Placeholder 2"/>
+          <p:cNvSpPr>
+            <a:spLocks noGrp="1"/>
+          </p:cNvSpPr>
+          <p:nvPr>
+            <p:ph type="body" idx="3" sz="quarter"/>
+          </p:nvPr>
+        </p:nvSpPr>
+        <p:spPr/>
+        <p:txBody>
+          <a:bodyPr/>
+          <a:lstStyle/>
+          <a:p>
+            <a:r>
+              <a:t>보호 모드는 DBA 혼자 정할 수 있는 값이 아닙니다. 업무 담당자에게 Primary가 사라졌을 때 마지막 몇 초 분량을 잃어도 되는지, 그리고 Standby 문제로 운영 DB가 멈춰도 되는지를 숫자로 물어야 합니다. 대부분의 업무는 서비스 중단이 더 큰 손해라서 Maximum Protection까지 가는 경우는 드뭅니다. 손실 한 건이 법적, 금전적으로 치명적인 결제 원장 같은 시스템에서만 Primary 정지 위험을 감수할 이유가 생깁니다.</a:t>
+            </a:r>
+          </a:p>
+        </p:txBody>
+      </p:sp>
+      <p:sp>
+        <p:nvSpPr>
+          <p:cNvPr id="4" name="Slide Number Placeholder 3"/>
+          <p:cNvSpPr>
+            <a:spLocks noGrp="1"/>
+          </p:cNvSpPr>
+          <p:nvPr>
+            <p:ph type="sldNum" idx="5" sz="quarter"/>
+          </p:nvPr>
+        </p:nvSpPr>
+        <p:spPr/>
+      </p:sp>
+    </p:spTree>
+  </p:cSld>
+  <p:clrMapOvr>
+    <a:masterClrMapping/>
+  </p:clrMapOvr>
+</p:notes>
+</file>
+
+<file path=ppt/notesSlides/notesSlide34.xml><?xml version="1.0" encoding="utf-8"?>
+<p:notes xmlns:a="http://schemas.openxmlformats.org/drawingml/2006/main" xmlns:p="http://schemas.openxmlformats.org/presentationml/2006/main" xmlns:r="http://schemas.openxmlformats.org/officeDocument/2006/relationships">
+  <p:cSld>
+    <p:spTree>
+      <p:nvGrpSpPr>
+        <p:cNvPr id="1" name=""/>
+        <p:cNvGrpSpPr/>
+        <p:nvPr/>
+      </p:nvGrpSpPr>
+      <p:grpSpPr>
+        <a:xfrm>
+          <a:off x="0" y="0"/>
+          <a:ext cx="0" cy="0"/>
+          <a:chOff x="0" y="0"/>
+          <a:chExt cx="0" cy="0"/>
+        </a:xfrm>
+      </p:grpSpPr>
+      <p:sp>
+        <p:nvSpPr>
+          <p:cNvPr id="2" name="Slide Image Placeholder 1"/>
+          <p:cNvSpPr>
+            <a:spLocks noGrp="1"/>
+          </p:cNvSpPr>
+          <p:nvPr>
+            <p:ph type="sldImg" idx="2"/>
+          </p:nvPr>
+        </p:nvSpPr>
+        <p:spPr/>
+      </p:sp>
+      <p:sp>
+        <p:nvSpPr>
+          <p:cNvPr id="3" name="Notes Placeholder 2"/>
+          <p:cNvSpPr>
+            <a:spLocks noGrp="1"/>
+          </p:cNvSpPr>
+          <p:nvPr>
+            <p:ph type="body" idx="3" sz="quarter"/>
+          </p:nvPr>
+        </p:nvSpPr>
+        <p:spPr/>
+        <p:txBody>
+          <a:bodyPr/>
+          <a:lstStyle/>
+          <a:p>
+            <a:r>
+              <a:t>빛의 속도에는 한계가 있어서 거리가 멀어지면 왕복 지연은 줄일 방법이 없습니다. FASTSYNC는 Standby 디스크 쓰기 시간을 빼 주지만 네트워크 왕복은 그대로입니다. 원거리 재해 복구 Standby를 두면서 무손실도 원한다면, Primary 가까이에 Far Sync를 두고 SYNC로 받은 다음 먼 Standby로 ASYNC로 넘기는 구조를 씁니다. 반대로 대역폭이 좁으면 ASYNC라도 리두 생성 피크 때 lag가 쌓여 손실 범위가 커지므로, 피크 리두량과 링크 대역폭을 비교해 둡니다.</a:t>
+            </a:r>
+          </a:p>
+        </p:txBody>
+      </p:sp>
+      <p:sp>
+        <p:nvSpPr>
+          <p:cNvPr id="4" name="Slide Number Placeholder 3"/>
+          <p:cNvSpPr>
+            <a:spLocks noGrp="1"/>
+          </p:cNvSpPr>
+          <p:nvPr>
+            <p:ph type="sldNum" idx="5" sz="quarter"/>
+          </p:nvPr>
+        </p:nvSpPr>
+        <p:spPr/>
+      </p:sp>
+    </p:spTree>
+  </p:cSld>
+  <p:clrMapOvr>
+    <a:masterClrMapping/>
+  </p:clrMapOvr>
+</p:notes>
+</file>
+
+<file path=ppt/notesSlides/notesSlide35.xml><?xml version="1.0" encoding="utf-8"?>
+<p:notes xmlns:a="http://schemas.openxmlformats.org/drawingml/2006/main" xmlns:p="http://schemas.openxmlformats.org/presentationml/2006/main" xmlns:r="http://schemas.openxmlformats.org/officeDocument/2006/relationships">
+  <p:cSld>
+    <p:spTree>
+      <p:nvGrpSpPr>
+        <p:cNvPr id="1" name=""/>
+        <p:cNvGrpSpPr/>
+        <p:nvPr/>
+      </p:nvGrpSpPr>
+      <p:grpSpPr>
+        <a:xfrm>
+          <a:off x="0" y="0"/>
+          <a:ext cx="0" cy="0"/>
+          <a:chOff x="0" y="0"/>
+          <a:chExt cx="0" cy="0"/>
+        </a:xfrm>
+      </p:grpSpPr>
+      <p:sp>
+        <p:nvSpPr>
+          <p:cNvPr id="2" name="Slide Image Placeholder 1"/>
+          <p:cNvSpPr>
+            <a:spLocks noGrp="1"/>
+          </p:cNvSpPr>
+          <p:nvPr>
+            <p:ph type="sldImg" idx="2"/>
+          </p:nvPr>
+        </p:nvSpPr>
+        <p:spPr/>
+      </p:sp>
+      <p:sp>
+        <p:nvSpPr>
+          <p:cNvPr id="3" name="Notes Placeholder 2"/>
+          <p:cNvSpPr>
+            <a:spLocks noGrp="1"/>
+          </p:cNvSpPr>
+          <p:nvPr>
+            <p:ph type="body" idx="3" sz="quarter"/>
+          </p:nvPr>
+        </p:nvSpPr>
+        <p:spPr/>
+        <p:txBody>
+          <a:bodyPr/>
+          <a:lstStyle/>
+          <a:p>
+            <a:r>
+              <a:t>가까운 곳에 SYNC Standby, 먼 곳에 ASYNC Standby를 두고 Maximum Availability로 운영하는 구성이 가장 흔합니다. 가까운 Standby는 무손실 Failover와 백업, 조회 분산을 맡고, 먼 Standby는 지역 전체 재해에 대비합니다. 보호 모드는 동기화된 SYNC 목적지가 하나라도 있으면 성립하므로, 먼 ASYNC 쪽 링크가 끊겨도 보호 수준은 내려가지 않습니다. Maximum Protection을 고른다면 SYNC AFFIRM Standby를 반드시 둘 이상으로 늘립니다.</a:t>
+            </a:r>
+          </a:p>
+        </p:txBody>
+      </p:sp>
+      <p:sp>
+        <p:nvSpPr>
+          <p:cNvPr id="4" name="Slide Number Placeholder 3"/>
+          <p:cNvSpPr>
+            <a:spLocks noGrp="1"/>
+          </p:cNvSpPr>
+          <p:nvPr>
+            <p:ph type="sldNum" idx="5" sz="quarter"/>
+          </p:nvPr>
+        </p:nvSpPr>
+        <p:spPr/>
+      </p:sp>
+    </p:spTree>
+  </p:cSld>
+  <p:clrMapOvr>
+    <a:masterClrMapping/>
+  </p:clrMapOvr>
+</p:notes>
+</file>
+
+<file path=ppt/notesSlides/notesSlide36.xml><?xml version="1.0" encoding="utf-8"?>
+<p:notes xmlns:a="http://schemas.openxmlformats.org/drawingml/2006/main" xmlns:p="http://schemas.openxmlformats.org/presentationml/2006/main" xmlns:r="http://schemas.openxmlformats.org/officeDocument/2006/relationships">
+  <p:cSld>
+    <p:spTree>
+      <p:nvGrpSpPr>
+        <p:cNvPr id="1" name=""/>
+        <p:cNvGrpSpPr/>
+        <p:nvPr/>
+      </p:nvGrpSpPr>
+      <p:grpSpPr>
+        <a:xfrm>
+          <a:off x="0" y="0"/>
+          <a:ext cx="0" cy="0"/>
+          <a:chOff x="0" y="0"/>
+          <a:chExt cx="0" cy="0"/>
+        </a:xfrm>
+      </p:grpSpPr>
+      <p:sp>
+        <p:nvSpPr>
+          <p:cNvPr id="2" name="Slide Image Placeholder 1"/>
+          <p:cNvSpPr>
+            <a:spLocks noGrp="1"/>
+          </p:cNvSpPr>
+          <p:nvPr>
+            <p:ph type="sldImg" idx="2"/>
+          </p:nvPr>
+        </p:nvSpPr>
+        <p:spPr/>
+      </p:sp>
+      <p:sp>
+        <p:nvSpPr>
+          <p:cNvPr id="3" name="Notes Placeholder 2"/>
+          <p:cNvSpPr>
+            <a:spLocks noGrp="1"/>
+          </p:cNvSpPr>
+          <p:nvPr>
+            <p:ph type="body" idx="3" sz="quarter"/>
+          </p:nvPr>
+        </p:nvSpPr>
+        <p:spPr/>
+        <p:txBody>
+          <a:bodyPr/>
+          <a:lstStyle/>
+          <a:p>
+            <a:r>
+              <a:t>Fast-Start Failover는 Observer가 Primary 장애를 감지해 사람 대신 Failover를 실행하는 Broker 기능으로 16장에서 다룹니다. 보호 모드에 따라 자동 Failover가 허용하는 손실이 달라집니다. Maximum Availability에서는 동기화된 Standby로 무손실 전환을 하고, Maximum Performance에서는 미리 정한 lag 한도 안에 있을 때만 전환합니다. 자동 Failover까지 고려한다면 Maximum Availability에 SYNC나 FASTSYNC를 쓰는 조합이 가장 무난합니다.</a:t>
+            </a:r>
+          </a:p>
+        </p:txBody>
+      </p:sp>
+      <p:sp>
+        <p:nvSpPr>
+          <p:cNvPr id="4" name="Slide Number Placeholder 3"/>
+          <p:cNvSpPr>
+            <a:spLocks noGrp="1"/>
+          </p:cNvSpPr>
+          <p:nvPr>
+            <p:ph type="sldNum" idx="5" sz="quarter"/>
+          </p:nvPr>
+        </p:nvSpPr>
+        <p:spPr/>
+      </p:sp>
+    </p:spTree>
+  </p:cSld>
+  <p:clrMapOvr>
+    <a:masterClrMapping/>
+  </p:clrMapOvr>
+</p:notes>
+</file>
+
+<file path=ppt/notesSlides/notesSlide37.xml><?xml version="1.0" encoding="utf-8"?>
+<p:notes xmlns:a="http://schemas.openxmlformats.org/drawingml/2006/main" xmlns:p="http://schemas.openxmlformats.org/presentationml/2006/main" xmlns:r="http://schemas.openxmlformats.org/officeDocument/2006/relationships">
+  <p:cSld>
+    <p:spTree>
+      <p:nvGrpSpPr>
+        <p:cNvPr id="1" name=""/>
+        <p:cNvGrpSpPr/>
+        <p:nvPr/>
+      </p:nvGrpSpPr>
+      <p:grpSpPr>
+        <a:xfrm>
+          <a:off x="0" y="0"/>
+          <a:ext cx="0" cy="0"/>
+          <a:chOff x="0" y="0"/>
+          <a:chExt cx="0" cy="0"/>
+        </a:xfrm>
+      </p:grpSpPr>
+      <p:sp>
+        <p:nvSpPr>
+          <p:cNvPr id="2" name="Slide Image Placeholder 1"/>
+          <p:cNvSpPr>
+            <a:spLocks noGrp="1"/>
+          </p:cNvSpPr>
+          <p:nvPr>
+            <p:ph type="sldImg" idx="2"/>
+          </p:nvPr>
+        </p:nvSpPr>
+        <p:spPr/>
+      </p:sp>
+      <p:sp>
+        <p:nvSpPr>
+          <p:cNvPr id="3" name="Notes Placeholder 2"/>
+          <p:cNvSpPr>
+            <a:spLocks noGrp="1"/>
+          </p:cNvSpPr>
+          <p:nvPr>
+            <p:ph type="body" idx="3" sz="quarter"/>
+          </p:nvPr>
+        </p:nvSpPr>
+        <p:spPr/>
+        <p:txBody>
+          <a:bodyPr/>
+          <a:lstStyle/>
+          <a:p>
+            <a:r>
+              <a:t>예시는 출발점입니다. 같은 온라인 주문 시스템이라도 Standby가 같은 건물에 있으면 SYNC AFFIRM이 부담 없고, 다른 도시에 있으면 FASTSYNC도 무거울 수 있습니다. 처음에는 한 단계 낮은 모드로 운영하면서 transport lag와 log file sync 대기를 측정하고, 근거가 쌓이면 올리는 순서가 안전합니다. 결제 원장처럼 Maximum Protection을 검토하는 경우에도 Standby 장애로 Primary가 멈출 수 있다는 사실을 업무 쪽이 받아들였는지 먼저 확인합니다.</a:t>
+            </a:r>
+          </a:p>
+        </p:txBody>
+      </p:sp>
+      <p:sp>
+        <p:nvSpPr>
+          <p:cNvPr id="4" name="Slide Number Placeholder 3"/>
+          <p:cNvSpPr>
+            <a:spLocks noGrp="1"/>
+          </p:cNvSpPr>
+          <p:nvPr>
+            <p:ph type="sldNum" idx="5" sz="quarter"/>
+          </p:nvPr>
+        </p:nvSpPr>
+        <p:spPr/>
+      </p:sp>
+    </p:spTree>
+  </p:cSld>
+  <p:clrMapOvr>
+    <a:masterClrMapping/>
+  </p:clrMapOvr>
+</p:notes>
+</file>
+
+<file path=ppt/notesSlides/notesSlide38.xml><?xml version="1.0" encoding="utf-8"?>
+<p:notes xmlns:a="http://schemas.openxmlformats.org/drawingml/2006/main" xmlns:p="http://schemas.openxmlformats.org/presentationml/2006/main" xmlns:r="http://schemas.openxmlformats.org/officeDocument/2006/relationships">
+  <p:cSld>
+    <p:spTree>
+      <p:nvGrpSpPr>
+        <p:cNvPr id="1" name=""/>
+        <p:cNvGrpSpPr/>
+        <p:nvPr/>
+      </p:nvGrpSpPr>
+      <p:grpSpPr>
+        <a:xfrm>
+          <a:off x="0" y="0"/>
+          <a:ext cx="0" cy="0"/>
+          <a:chOff x="0" y="0"/>
+          <a:chExt cx="0" cy="0"/>
+        </a:xfrm>
+      </p:grpSpPr>
+      <p:sp>
+        <p:nvSpPr>
+          <p:cNvPr id="2" name="Slide Image Placeholder 1"/>
+          <p:cNvSpPr>
+            <a:spLocks noGrp="1"/>
+          </p:cNvSpPr>
+          <p:nvPr>
+            <p:ph type="sldImg" idx="2"/>
+          </p:nvPr>
+        </p:nvSpPr>
+        <p:spPr/>
+      </p:sp>
+      <p:sp>
+        <p:nvSpPr>
+          <p:cNvPr id="3" name="Notes Placeholder 2"/>
+          <p:cNvSpPr>
+            <a:spLocks noGrp="1"/>
+          </p:cNvSpPr>
+          <p:nvPr>
+            <p:ph type="body" idx="3" sz="quarter"/>
+          </p:nvPr>
+        </p:nvSpPr>
+        <p:spPr/>
+        <p:txBody>
+          <a:bodyPr/>
+          <a:lstStyle/>
+          <a:p>
+            <a:r>
+              <a:t>이 장의 문제들은 대부분 경보 없이 생깁니다. Maximum Availability가 RESYNCHRONIZATION으로 내려가도 업무는 정상이고, 대칭이 맞지 않는 목적지도 Switchover 전까지는 아무 증상이 없습니다. 정기 점검 항목에 두 열의 비교와 양쪽 목적지 문자열의 대조를 넣어 두는 것이 가장 확실한 대책입니다. NET_TIMEOUT을 바꿀 때는 Standby 장애 때 Primary가 멈출 수 있는 최대 시간도 함께 바뀐다는 사실을 변경 기록에 남겨 둡니다.</a:t>
             </a:r>
           </a:p>
         </p:txBody>
@@ -1797,7 +2793,7 @@
           <a:lstStyle/>
           <a:p>
             <a:r>
-              <a:t>이 슬라이드가 2장에서 가장 실무적인 대목입니다. 오설정인데 아무것도 실패하지 않습니다. 명령은 성공하고, 목적지 상태는 VALID이며, 알림 로그에도 오류가 없습니다. 유일한 단서가 VALID_NOW 열입니다. "STATUS가 VALID"와 "VALID_NOW가 YES"는 서로 다른 질문에 답한다는 점을 반드시 짚어 주십시오. 양쪽 노드에 대칭적인 목적지 설정을 미리 넣어 두는 것이 표준적인 구성 방식입니다. 그래야 역할이 바뀌는 순간 별도 작업 없이 리두 방향이 뒤집힙니다.</a:t>
+              <a:t>수강생이 가장 자주 하는 착각이 SYNC로 바꾸면 무손실 구성이 된다는 생각입니다. 목적지를 SYNC AFFIRM으로 바꿔도 보호 모드가 Maximum Performance로 남아 있으면, Standby가 사라졌을 때 Primary는 NET_TIMEOUT 뒤 아무 일 없다는 듯 계속 진행합니다. 보호 모드를 설정해야 Primary 내부에 그 모드의 규칙이 걸립니다. 또 목적지마다 방식을 다르게 줄 수 있어서, SYNC 목적지 하나와 ASYNC 목적지 하나를 함께 두는 구성도 흔합니다.</a:t>
             </a:r>
           </a:p>
         </p:txBody>
@@ -1867,7 +2863,7 @@
           <a:lstStyle/>
           <a:p>
             <a:r>
-              <a:t>NET_TIMEOUT이 실질적으로 결정하는 것은 "네트워크가 몇 초 흔들리면 서비스를 멈출 것인가"입니다. 이 시간이 지나면 Maximum Availability는 비동기화로 내려가고 Maximum Protection은 인스턴스를 종료합니다. 기본 30초가 짧다고 무작정 늘리면 그 시간만큼 커밋이 정지하므로, 회선 품질을 측정한 뒤 정해야 합니다. DELAY는 요즘 잘 쓰지 않습니다. 지연된 Standby는 최신 데이터를 보여 주지 못해 Active Data Guard의 실시간 조회와 목적이 충돌하기 때문이며, 같은 목적을 Flashback Database로 달성하는 편이 일반적입니다.</a:t>
+              <a:t>순서를 하나씩 따라가 보면 각 속성이 경로의 어느 지점을 바꾸는지 보입니다. SYNC냐 ASYNC냐는 커밋 완료가 원격 확인까지 기다리느냐를 정하고, AFFIRM이냐 NOAFFIRM이냐는 그 확인이 Standby 디스크 쓰기 전에 오느냐 뒤에 오느냐를 정합니다. 확인이 NET_TIMEOUT 안에 오지 않으면 그 목적지는 실패로 처리됩니다. 그다음 Primary가 계속 갈지 멈출지는 전송 속성이 아니라 보호 모드가 결정합니다.</a:t>
             </a:r>
           </a:p>
         </p:txBody>
@@ -1937,7 +2933,7 @@
           <a:lstStyle/>
           <a:p>
             <a:r>
-              <a:t>크기가 다르면 오라클이 오류를 내지 않고 그 SRL을 조용히 건너뜁니다. 그래서 "만들었는데 실시간 적용이 안 된다"는 증상으로 나타나며 원인을 찾기 어렵습니다. 실습 01에서 양쪽 SRL을 조회해 개수와 크기를 직접 확인합니다. Primary의 SRL이 전부 UNASSIGNED인 것도 함께 보면 왜 미리 만들어 두는지 이해가 빠릅니다. 개수 규칙의 근거도 함께 설명해 주십시오. 하나가 아카이브되는 동안 다른 하나가 계속 받아야 하므로 온라인 리두 그룹 수보다 최소 하나는 많아야 합니다.</a:t>
+              <a:t>SYNC의 비용은 커밋마다 왕복 네트워크 지연이 붙는다는 데서 나옵니다. LGWR가 로컬 쓰기와 원격 전송을 동시에 진행하므로 커밋 시간은 둘 중 긴 쪽에 가깝습니다. 같은 데이터 센터 안이면 로컬 디스크 쓰기와 비슷한 수준이라 체감이 적지만, 도시를 넘어가면 원격 쪽이 길어집니다. Primary의 AWR이나 대기 이벤트에서 log file sync 평균 시간이 늘어나는 것으로 확인할 수 있으니, 전환 전후 값을 기록해 두는 습관이 필요합니다.</a:t>
             </a:r>
           </a:p>
         </p:txBody>
@@ -2007,7 +3003,7 @@
           <a:lstStyle/>
           <a:p>
             <a:r>
-              <a:t>보호 모드가 관여하는 지점은 ②와 ⑤ 사이의 결합 여부 하나뿐입니다. Maximum Performance는 둘을 끊어 놓고, 나머지 두 모드는 묶습니다. 묶었을 때 ⑤가 오지 않으면 어떻게 할 것인가 — 그 답이 Availability와 Protection을 가릅니다. 그리고 ⑥은 전송과 독립이라 전송이 정상인데 적용만 밀릴 수 있습니다. 그래서 7장에서 transport lag와 apply lag를 나누어 봅니다. 두 지표가 각각 ③–⑤ 구간과 ⑥ 구간을 재기 때문에, 어느 쪽이 큰지에 따라 조치 방향이 완전히 달라집니다.</a:t>
+              <a:t>ASYNC라고 해서 로그 스위치 때 한꺼번에 보내는 방식은 아닙니다. 리두가 생기는 대로 TTnn이 따라 보내므로, 대역폭이 넉넉하면 Standby는 몇 초 이내로 따라옵니다. Primary가 갑자기 사라지면 그 몇 초, 정확히는 그 순간의 transport lag만큼을 잃습니다. 대륙 간 원거리 Standby에 ASYNC를 쓰는 것도 지연이 커밋에 붙지 않기 때문입니다. 다만 전송이 오래 밀리면 TTnn이 디스크의 온라인 로그를 읽어야 해서 Primary I/O에 읽기 부하가 생깁니다.</a:t>
             </a:r>
           </a:p>
         </p:txBody>
@@ -2077,7 +3073,7 @@
           <a:lstStyle/>
           <a:p>
             <a:r>
-              <a:t>이 사실이 도입 판단의 핵심입니다. 커밋 조건이 같다는 것은 정상 운영 중에는 두 모드의 보호 수준이 똑같다는 뜻입니다. 차이는 오직 장애 상황에서만 드러납니다. 따라서 "무손실이 필요하다"는 요구는 대부분 Maximum Availability로 충족되고, Protection이 추가로 주는 것은 "어떤 경우에도 예외를 두지 않겠다"는 보장뿐입니다. 이 표를 외우기보다 '조건은 같고 행동만 다르다'는 한 문장으로 기억하게 하는 편이 오래갑니다. 나머지는 그 문장에서 따라 나옵니다.</a:t>
+              <a:t>AFFIRM은 Standby의 디스크 쓰기까지 커밋 경로에 넣습니다. Standby 스토리지가 느리면 그만큼 Primary 커밋이 느려지는 구조입니다. NOAFFIRM은 메모리에 받은 시점에 확인을 보내므로 그 시간이 빠집니다. 대신 확인을 보낸 직후, SRL에 쓰기 전에 Standby까지 함께 무너지면 그 리두는 어디에도 남지 않습니다. 실제로 Primary와 Standby가 수 밀리초 안에 함께 장애를 겪을 확률은 낮지만, 보장의 강도는 분명히 한 단계 약해집니다.</a:t>
             </a:r>
           </a:p>
         </p:txBody>
@@ -2147,7 +3143,7 @@
           <a:lstStyle/>
           <a:p>
             <a:r>
-              <a:t>이 장에서 가장 중요한 원칙이 나오는 슬라이드입니다. 명령이 성공했다는 것은 설정이 받아들여졌다는 뜻이지 그 수준으로 운영된다는 뜻이 아닙니다. 이 구분을 놓치면 운영자는 무손실 구성이라 믿는데 실제로는 아닌 상태가 됩니다. 보호 모드를 바꿀 때마다 LEVEL을 확인하는 절차를 반드시 넣어야 합니다. 실습 05에서 이 상황을 두 가지 경로로 재현합니다. 하나는 요건을 갖추지 못한 설정 문제이고 다른 하나는 전송이 끊긴 장애인데, 두 열만 봐서는 구분되지 않는다는 점이 진단의 출발점이 됩니다.</a:t>
+              <a:t>파라미터 문자열에 FASTSYNC라고 쓰는 곳은 없습니다. SQL로 구성할 때는 SYNC NOAFFIRM이라고 쓰고, Broker의 LogXptMode에서 FASTSYNC를 고르면 Broker가 같은 문자열을 만들어 줍니다. 12c에서 이 조합이 강조된 이유는 SYNC 목적지 거리를 제한하던 요소 가운데 Standby I/O 시간을 빼 주기 때문입니다. 네트워크 왕복은 그대로 남으니 거리 문제가 사라지는 것은 아닙니다. Maximum Protection은 AFFIRM을 요구하므로 이 조합으로는 그 모드를 설정할 수 없습니다.</a:t>
             </a:r>
           </a:p>
         </p:txBody>
@@ -5397,7 +6393,7 @@
                 </a:solidFill>
                 <a:latin typeface="맑은 고딕"/>
               </a:rPr>
-              <a:t>Data Protection Modes and Redo Transport — 리두를 어떻게 보낼 것인가</a:t>
+              <a:t>커밋은 어디까지 기다리는가, 무엇을 잃을 수 있는가</a:t>
             </a:r>
           </a:p>
         </p:txBody>
@@ -5436,7 +6432,7 @@
                 </a:solidFill>
                 <a:latin typeface="맑은 고딕"/>
               </a:rPr>
-              <a:t>SYNC/ASYNC · AFFIRM · VALID_FOR · 세 가지 보호 모드 · Maximum Protection의 위험</a:t>
+              <a:t>제2장</a:t>
             </a:r>
           </a:p>
         </p:txBody>
@@ -5468,7 +6464,7 @@
         <p:spPr>
           <a:xfrm>
             <a:off x="0" y="0"/>
-            <a:ext cx="12191695" cy="1005840"/>
+            <a:ext cx="12191695" cy="6858000"/>
           </a:xfrm>
           <a:prstGeom prst="rect">
             <a:avLst/>
@@ -5511,8 +6507,8 @@
         </p:nvSpPr>
         <p:spPr>
           <a:xfrm>
-            <a:off x="548640" y="91440"/>
-            <a:ext cx="10972800" cy="777240"/>
+            <a:off x="822960" y="2011680"/>
+            <a:ext cx="10515600" cy="1097280"/>
           </a:xfrm>
           <a:prstGeom prst="rect">
             <a:avLst/>
@@ -5531,13 +6527,13 @@
               </a:spcAft>
             </a:pPr>
             <a:r>
-              <a:rPr sz="2600" b="1">
+              <a:rPr sz="4000" b="1">
                 <a:solidFill>
                   <a:srgbClr val="FFFFFF"/>
                 </a:solidFill>
                 <a:latin typeface="맑은 고딕"/>
               </a:rPr>
-              <a:t>Standby Redo Log</a:t>
+              <a:t>2.3</a:t>
             </a:r>
           </a:p>
         </p:txBody>
@@ -5550,8 +6546,8 @@
         </p:nvSpPr>
         <p:spPr>
           <a:xfrm>
-            <a:off x="640080" y="1078992"/>
-            <a:ext cx="10881360" cy="457200"/>
+            <a:off x="822960" y="3017520"/>
+            <a:ext cx="10515600" cy="914400"/>
           </a:xfrm>
           <a:prstGeom prst="rect">
             <a:avLst/>
@@ -5570,27 +6566,71 @@
               </a:spcAft>
             </a:pPr>
             <a:r>
-              <a:rPr sz="1500" b="0">
-                <a:solidFill>
-                  <a:srgbClr val="5A6672"/>
-                </a:solidFill>
-                <a:latin typeface="맑은 고딕"/>
-              </a:rPr>
-              <a:t>동기 전송의 전제</a:t>
-            </a:r>
-          </a:p>
-        </p:txBody>
-      </p:sp>
-      <p:sp>
-        <p:nvSpPr>
-          <p:cNvPr id="5" name="TextBox 4"/>
+              <a:rPr sz="2800" b="1">
+                <a:solidFill>
+                  <a:srgbClr val="FFFFFF"/>
+                </a:solidFill>
+                <a:latin typeface="맑은 고딕"/>
+              </a:rPr>
+              <a:t>전송 방식과 확인 응답</a:t>
+            </a:r>
+          </a:p>
+        </p:txBody>
+      </p:sp>
+      <p:sp>
+        <p:nvSpPr>
+          <p:cNvPr id="5" name="Rectangle 4"/>
+          <p:cNvSpPr/>
+          <p:nvPr/>
+        </p:nvSpPr>
+        <p:spPr>
+          <a:xfrm>
+            <a:off x="822960" y="4114800"/>
+            <a:ext cx="5486400" cy="54864"/>
+          </a:xfrm>
+          <a:prstGeom prst="rect">
+            <a:avLst/>
+          </a:prstGeom>
+          <a:solidFill>
+            <a:srgbClr val="FFFFFF"/>
+          </a:solidFill>
+          <a:ln>
+            <a:noFill/>
+          </a:ln>
+          <a:effectLst/>
+        </p:spPr>
+        <p:style>
+          <a:lnRef idx="1">
+            <a:schemeClr val="accent1"/>
+          </a:lnRef>
+          <a:fillRef idx="3">
+            <a:schemeClr val="accent1"/>
+          </a:fillRef>
+          <a:effectRef idx="2">
+            <a:schemeClr val="accent1"/>
+          </a:effectRef>
+          <a:fontRef idx="minor">
+            <a:schemeClr val="lt1"/>
+          </a:fontRef>
+        </p:style>
+        <p:txBody>
+          <a:bodyPr rtlCol="0" anchor="ctr"/>
+          <a:lstStyle/>
+          <a:p>
+            <a:pPr algn="ctr"/>
+          </a:p>
+        </p:txBody>
+      </p:sp>
+      <p:sp>
+        <p:nvSpPr>
+          <p:cNvPr id="6" name="TextBox 5"/>
           <p:cNvSpPr txBox="1"/>
           <p:nvPr/>
         </p:nvSpPr>
         <p:spPr>
           <a:xfrm>
-            <a:off x="640080" y="1737360"/>
-            <a:ext cx="10881360" cy="4754880"/>
+            <a:off x="822960" y="4297680"/>
+            <a:ext cx="10058400" cy="2011680"/>
           </a:xfrm>
           <a:prstGeom prst="rect">
             <a:avLst/>
@@ -5605,81 +6645,49 @@
           <a:p>
             <a:pPr algn="l">
               <a:spcAft>
-                <a:spcPts val="1000"/>
-              </a:spcAft>
-            </a:pPr>
-            <a:r>
-              <a:rPr sz="1700" b="0">
-                <a:solidFill>
-                  <a:srgbClr val="222222"/>
-                </a:solidFill>
-                <a:latin typeface="맑은 고딕"/>
-              </a:rPr>
-              <a:t>•  RFS가 받은 리두를 즉시 쓸 곳이 필요하다</a:t>
-            </a:r>
-          </a:p>
-          <a:p>
-            <a:pPr algn="l">
-              <a:spcAft>
-                <a:spcPts val="1000"/>
-              </a:spcAft>
-            </a:pPr>
-            <a:r>
-              <a:rPr sz="1700" b="0">
-                <a:solidFill>
-                  <a:srgbClr val="222222"/>
-                </a:solidFill>
-                <a:latin typeface="맑은 고딕"/>
-              </a:rPr>
-              <a:t>•  SRL이 없으면 아카이브 완료 뒤에야 전송 → 지연 상존</a:t>
-            </a:r>
-          </a:p>
-          <a:p>
-            <a:pPr algn="l">
-              <a:spcAft>
-                <a:spcPts val="1000"/>
-              </a:spcAft>
-            </a:pPr>
-            <a:r>
-              <a:rPr sz="1700" b="0">
-                <a:solidFill>
-                  <a:srgbClr val="222222"/>
-                </a:solidFill>
-                <a:latin typeface="맑은 고딕"/>
-              </a:rPr>
-              <a:t>•  개수 : 온라인 리두 그룹 수 + 1 이상 (실습 환경 3 + 1 = 4)</a:t>
-            </a:r>
-          </a:p>
-          <a:p>
-            <a:pPr algn="l">
-              <a:spcAft>
-                <a:spcPts val="1000"/>
-              </a:spcAft>
-            </a:pPr>
-            <a:r>
-              <a:rPr sz="1700" b="0">
-                <a:solidFill>
-                  <a:srgbClr val="222222"/>
-                </a:solidFill>
-                <a:latin typeface="맑은 고딕"/>
-              </a:rPr>
-              <a:t>•  크기 : 온라인 리두와 정확히 같아야 (실습 환경 200MB)</a:t>
-            </a:r>
-          </a:p>
-          <a:p>
-            <a:pPr algn="l">
-              <a:spcAft>
-                <a:spcPts val="1000"/>
-              </a:spcAft>
-            </a:pPr>
-            <a:r>
-              <a:rPr sz="1700" b="0">
-                <a:solidFill>
-                  <a:srgbClr val="222222"/>
-                </a:solidFill>
-                <a:latin typeface="맑은 고딕"/>
-              </a:rPr>
-              <a:t>•  Primary에도 만들어 둔다 — 역할 전환 직후에 필요해진다</a:t>
+                <a:spcPts val="800"/>
+              </a:spcAft>
+            </a:pPr>
+            <a:r>
+              <a:rPr sz="1600" b="0">
+                <a:solidFill>
+                  <a:srgbClr val="FFFFFF"/>
+                </a:solidFill>
+                <a:latin typeface="맑은 고딕"/>
+              </a:rPr>
+              <a:t>•  SYNC와 ASYNC</a:t>
+            </a:r>
+          </a:p>
+          <a:p>
+            <a:pPr algn="l">
+              <a:spcAft>
+                <a:spcPts val="800"/>
+              </a:spcAft>
+            </a:pPr>
+            <a:r>
+              <a:rPr sz="1600" b="0">
+                <a:solidFill>
+                  <a:srgbClr val="FFFFFF"/>
+                </a:solidFill>
+                <a:latin typeface="맑은 고딕"/>
+              </a:rPr>
+              <a:t>•  AFFIRM과 NOAFFIRM, FASTSYNC</a:t>
+            </a:r>
+          </a:p>
+          <a:p>
+            <a:pPr algn="l">
+              <a:spcAft>
+                <a:spcPts val="800"/>
+              </a:spcAft>
+            </a:pPr>
+            <a:r>
+              <a:rPr sz="1600" b="0">
+                <a:solidFill>
+                  <a:srgbClr val="FFFFFF"/>
+                </a:solidFill>
+                <a:latin typeface="맑은 고딕"/>
+              </a:rPr>
+              <a:t>•  조합별 비용과 손실 가능성</a:t>
             </a:r>
           </a:p>
         </p:txBody>
@@ -5780,7 +6788,7 @@
                 </a:solidFill>
                 <a:latin typeface="맑은 고딕"/>
               </a:rPr>
-              <a:t>리두 한 건이 Standby에 닿기까지</a:t>
+              <a:t>SYNC</a:t>
             </a:r>
           </a:p>
         </p:txBody>
@@ -5819,7 +6827,7 @@
                 </a:solidFill>
                 <a:latin typeface="맑은 고딕"/>
               </a:rPr>
-              <a:t>여섯 단계</a:t>
+              <a:t>커밋이 Standby 확인을 기다린다</a:t>
             </a:r>
           </a:p>
         </p:txBody>
@@ -5858,7 +6866,7 @@
                 </a:solidFill>
                 <a:latin typeface="맑은 고딕"/>
               </a:rPr>
-              <a:t>•  ① 리두 생성 — 리두 로그 버퍼에 쌓인다</a:t>
+              <a:t>•  목적지 도착 확인 후에 커밋 완료</a:t>
             </a:r>
           </a:p>
           <a:p>
@@ -5874,7 +6882,7 @@
                 </a:solidFill>
                 <a:latin typeface="맑은 고딕"/>
               </a:rPr>
-              <a:t>•  ② 커밋 요청 — LGWR이 온라인 리두 로그에 기록 (Performance는 여기서 완료)</a:t>
+              <a:t>•  활성 SYNC 목적지 모두를 기다림</a:t>
             </a:r>
           </a:p>
           <a:p>
@@ -5890,7 +6898,7 @@
                 </a:solidFill>
                 <a:latin typeface="맑은 고딕"/>
               </a:rPr>
-              <a:t>•  ③ 원격 전송 — 동기는 NSSn, 비동기는 TTnn</a:t>
+              <a:t>•  로컬 쓰기와 원격 전송은 병렬 진행</a:t>
             </a:r>
           </a:p>
           <a:p>
@@ -5906,7 +6914,7 @@
                 </a:solidFill>
                 <a:latin typeface="맑은 고딕"/>
               </a:rPr>
-              <a:t>•  ④ 수신 — Standby의 RFS가 받아 SRL에 기록</a:t>
+              <a:t>•  비용은 log file sync 대기 증가로 드러남</a:t>
             </a:r>
           </a:p>
           <a:p>
@@ -5922,23 +6930,7 @@
                 </a:solidFill>
                 <a:latin typeface="맑은 고딕"/>
               </a:rPr>
-              <a:t>•  ⑤ 확인 응답 — AFFIRM이면 디스크 기록 후, NOAFFIRM이면 메모리 수신 시</a:t>
-            </a:r>
-          </a:p>
-          <a:p>
-            <a:pPr algn="l">
-              <a:spcAft>
-                <a:spcPts val="1000"/>
-              </a:spcAft>
-            </a:pPr>
-            <a:r>
-              <a:rPr sz="1700" b="0">
-                <a:solidFill>
-                  <a:srgbClr val="222222"/>
-                </a:solidFill>
-                <a:latin typeface="맑은 고딕"/>
-              </a:rPr>
-              <a:t>•  ⑥ 적용 — MRP가 SRL을 읽어 데이터 파일에 적용</a:t>
+              <a:t>•  거리와 커밋 빈도가 클수록 영향 큼</a:t>
             </a:r>
           </a:p>
         </p:txBody>
@@ -5970,7 +6962,7 @@
         <p:spPr>
           <a:xfrm>
             <a:off x="0" y="0"/>
-            <a:ext cx="12191695" cy="6858000"/>
+            <a:ext cx="12191695" cy="1005840"/>
           </a:xfrm>
           <a:prstGeom prst="rect">
             <a:avLst/>
@@ -6013,8 +7005,8 @@
         </p:nvSpPr>
         <p:spPr>
           <a:xfrm>
-            <a:off x="822960" y="2011680"/>
-            <a:ext cx="10515600" cy="1097280"/>
+            <a:off x="548640" y="91440"/>
+            <a:ext cx="10972800" cy="777240"/>
           </a:xfrm>
           <a:prstGeom prst="rect">
             <a:avLst/>
@@ -6033,13 +7025,13 @@
               </a:spcAft>
             </a:pPr>
             <a:r>
-              <a:rPr sz="4000" b="1">
+              <a:rPr sz="2600" b="1">
                 <a:solidFill>
                   <a:srgbClr val="FFFFFF"/>
                 </a:solidFill>
                 <a:latin typeface="맑은 고딕"/>
               </a:rPr>
-              <a:t>2.3</a:t>
+              <a:t>ASYNC</a:t>
             </a:r>
           </a:p>
         </p:txBody>
@@ -6052,8 +7044,8 @@
         </p:nvSpPr>
         <p:spPr>
           <a:xfrm>
-            <a:off x="822960" y="3017520"/>
-            <a:ext cx="10515600" cy="914400"/>
+            <a:off x="640080" y="1078992"/>
+            <a:ext cx="10881360" cy="457200"/>
           </a:xfrm>
           <a:prstGeom prst="rect">
             <a:avLst/>
@@ -6072,71 +7064,27 @@
               </a:spcAft>
             </a:pPr>
             <a:r>
-              <a:rPr sz="2800" b="1">
-                <a:solidFill>
-                  <a:srgbClr val="FFFFFF"/>
-                </a:solidFill>
-                <a:latin typeface="맑은 고딕"/>
-              </a:rPr>
-              <a:t>세 가지 데이터 보호 모드</a:t>
-            </a:r>
-          </a:p>
-        </p:txBody>
-      </p:sp>
-      <p:sp>
-        <p:nvSpPr>
-          <p:cNvPr id="5" name="Rectangle 4"/>
-          <p:cNvSpPr/>
-          <p:nvPr/>
-        </p:nvSpPr>
-        <p:spPr>
-          <a:xfrm>
-            <a:off x="822960" y="4114800"/>
-            <a:ext cx="5486400" cy="54864"/>
-          </a:xfrm>
-          <a:prstGeom prst="rect">
-            <a:avLst/>
-          </a:prstGeom>
-          <a:solidFill>
-            <a:srgbClr val="FFFFFF"/>
-          </a:solidFill>
-          <a:ln>
-            <a:noFill/>
-          </a:ln>
-          <a:effectLst/>
-        </p:spPr>
-        <p:style>
-          <a:lnRef idx="1">
-            <a:schemeClr val="accent1"/>
-          </a:lnRef>
-          <a:fillRef idx="3">
-            <a:schemeClr val="accent1"/>
-          </a:fillRef>
-          <a:effectRef idx="2">
-            <a:schemeClr val="accent1"/>
-          </a:effectRef>
-          <a:fontRef idx="minor">
-            <a:schemeClr val="lt1"/>
-          </a:fontRef>
-        </p:style>
-        <p:txBody>
-          <a:bodyPr rtlCol="0" anchor="ctr"/>
-          <a:lstStyle/>
-          <a:p>
-            <a:pPr algn="ctr"/>
-          </a:p>
-        </p:txBody>
-      </p:sp>
-      <p:sp>
-        <p:nvSpPr>
-          <p:cNvPr id="6" name="TextBox 5"/>
+              <a:rPr sz="1500" b="0">
+                <a:solidFill>
+                  <a:srgbClr val="5A6672"/>
+                </a:solidFill>
+                <a:latin typeface="맑은 고딕"/>
+              </a:rPr>
+              <a:t>커밋은 기다리지 않는다</a:t>
+            </a:r>
+          </a:p>
+        </p:txBody>
+      </p:sp>
+      <p:sp>
+        <p:nvSpPr>
+          <p:cNvPr id="5" name="TextBox 4"/>
           <p:cNvSpPr txBox="1"/>
           <p:nvPr/>
         </p:nvSpPr>
         <p:spPr>
           <a:xfrm>
-            <a:off x="822960" y="4297680"/>
-            <a:ext cx="10058400" cy="2011680"/>
+            <a:off x="640080" y="1737360"/>
+            <a:ext cx="10881360" cy="4754880"/>
           </a:xfrm>
           <a:prstGeom prst="rect">
             <a:avLst/>
@@ -6151,49 +7099,81 @@
           <a:p>
             <a:pPr algn="l">
               <a:spcAft>
-                <a:spcPts val="800"/>
-              </a:spcAft>
-            </a:pPr>
-            <a:r>
-              <a:rPr sz="1600" b="0">
-                <a:solidFill>
-                  <a:srgbClr val="FFFFFF"/>
-                </a:solidFill>
-                <a:latin typeface="맑은 고딕"/>
-              </a:rPr>
-              <a:t>•  Protection · Availability · Performance</a:t>
-            </a:r>
-          </a:p>
-          <a:p>
-            <a:pPr algn="l">
-              <a:spcAft>
-                <a:spcPts val="800"/>
-              </a:spcAft>
-            </a:pPr>
-            <a:r>
-              <a:rPr sz="1600" b="0">
-                <a:solidFill>
-                  <a:srgbClr val="FFFFFF"/>
-                </a:solidFill>
-                <a:latin typeface="맑은 고딕"/>
-              </a:rPr>
-              <a:t>•  커밋 조건과 장애 시 행동</a:t>
-            </a:r>
-          </a:p>
-          <a:p>
-            <a:pPr algn="l">
-              <a:spcAft>
-                <a:spcPts val="800"/>
-              </a:spcAft>
-            </a:pPr>
-            <a:r>
-              <a:rPr sz="1600" b="0">
-                <a:solidFill>
-                  <a:srgbClr val="FFFFFF"/>
-                </a:solidFill>
-                <a:latin typeface="맑은 고딕"/>
-              </a:rPr>
-              <a:t>•  MODE 와 LEVEL 은 다른 값이다</a:t>
+                <a:spcPts val="1000"/>
+              </a:spcAft>
+            </a:pPr>
+            <a:r>
+              <a:rPr sz="1700" b="0">
+                <a:solidFill>
+                  <a:srgbClr val="222222"/>
+                </a:solidFill>
+                <a:latin typeface="맑은 고딕"/>
+              </a:rPr>
+              <a:t>•  기본값, 로컬 기록 즉시 커밋</a:t>
+            </a:r>
+          </a:p>
+          <a:p>
+            <a:pPr algn="l">
+              <a:spcAft>
+                <a:spcPts val="1000"/>
+              </a:spcAft>
+            </a:pPr>
+            <a:r>
+              <a:rPr sz="1700" b="0">
+                <a:solidFill>
+                  <a:srgbClr val="222222"/>
+                </a:solidFill>
+                <a:latin typeface="맑은 고딕"/>
+              </a:rPr>
+              <a:t>•  TTnn이 뒤따라 전송</a:t>
+            </a:r>
+          </a:p>
+          <a:p>
+            <a:pPr algn="l">
+              <a:spcAft>
+                <a:spcPts val="1000"/>
+              </a:spcAft>
+            </a:pPr>
+            <a:r>
+              <a:rPr sz="1700" b="0">
+                <a:solidFill>
+                  <a:srgbClr val="222222"/>
+                </a:solidFill>
+                <a:latin typeface="맑은 고딕"/>
+              </a:rPr>
+              <a:t>•  손실 범위 = 그 시점의 transport lag</a:t>
+            </a:r>
+          </a:p>
+          <a:p>
+            <a:pPr algn="l">
+              <a:spcAft>
+                <a:spcPts val="1000"/>
+              </a:spcAft>
+            </a:pPr>
+            <a:r>
+              <a:rPr sz="1700" b="0">
+                <a:solidFill>
+                  <a:srgbClr val="222222"/>
+                </a:solidFill>
+                <a:latin typeface="맑은 고딕"/>
+              </a:rPr>
+              <a:t>•  네트워크 지연이 커밋 시간에 붙지 않음</a:t>
+            </a:r>
+          </a:p>
+          <a:p>
+            <a:pPr algn="l">
+              <a:spcAft>
+                <a:spcPts val="1000"/>
+              </a:spcAft>
+            </a:pPr>
+            <a:r>
+              <a:rPr sz="1700" b="0">
+                <a:solidFill>
+                  <a:srgbClr val="222222"/>
+                </a:solidFill>
+                <a:latin typeface="맑은 고딕"/>
+              </a:rPr>
+              <a:t>•  밀리면 온라인 로그 읽기 부하 발생</a:t>
             </a:r>
           </a:p>
         </p:txBody>
@@ -6294,7 +7274,7 @@
                 </a:solidFill>
                 <a:latin typeface="맑은 고딕"/>
               </a:rPr>
-              <a:t>세 모드의 커밋 조건</a:t>
+              <a:t>AFFIRM과 NOAFFIRM</a:t>
             </a:r>
           </a:p>
         </p:txBody>
@@ -6333,7 +7313,7 @@
                 </a:solidFill>
                 <a:latin typeface="맑은 고딕"/>
               </a:rPr>
-              <a:t>Protection과 Availability는 조건이 같다</a:t>
+              <a:t>확인 응답을 언제 보내는가</a:t>
             </a:r>
           </a:p>
         </p:txBody>
@@ -6372,7 +7352,7 @@
                 </a:solidFill>
                 <a:latin typeface="맑은 고딕"/>
               </a:rPr>
-              <a:t>•  Maximum Protection : 로컬 + 최소 1대 SRL 기록 후 커밋 / 상실 시 인스턴스 종료</a:t>
+              <a:t>•  AFFIRM: SRL 쓰기 완료 후 확인</a:t>
             </a:r>
           </a:p>
           <a:p>
@@ -6388,7 +7368,7 @@
                 </a:solidFill>
                 <a:latin typeface="맑은 고딕"/>
               </a:rPr>
-              <a:t>•  Maximum Availability : 커밋 조건 동일 / 상실 시 비동기화로 계속 운영 후 자동 복귀</a:t>
+              <a:t>•  NOAFFIRM: 수신 즉시, 쓰기 완료 전 확인</a:t>
             </a:r>
           </a:p>
           <a:p>
@@ -6404,7 +7384,7 @@
                 </a:solidFill>
                 <a:latin typeface="맑은 고딕"/>
               </a:rPr>
-              <a:t>•  Maximum Performance : 로컬 기록만으로 커밋 / 상실해도 영향 없음 (기본값)</a:t>
+              <a:t>•  기본값: SYNC는 AFFIRM, ASYNC는 NOAFFIRM</a:t>
             </a:r>
           </a:p>
           <a:p>
@@ -6420,7 +7400,23 @@
                 </a:solidFill>
                 <a:latin typeface="맑은 고딕"/>
               </a:rPr>
-              <a:t>•  앞의 두 모드는 정상 운영 중 보호 수준이 동일하다</a:t>
+              <a:t>•  ASYNC AFFIRM은 디프리케이트</a:t>
+            </a:r>
+          </a:p>
+          <a:p>
+            <a:pPr algn="l">
+              <a:spcAft>
+                <a:spcPts val="1000"/>
+              </a:spcAft>
+            </a:pPr>
+            <a:r>
+              <a:rPr sz="1700" b="0">
+                <a:solidFill>
+                  <a:srgbClr val="222222"/>
+                </a:solidFill>
+                <a:latin typeface="맑은 고딕"/>
+              </a:rPr>
+              <a:t>•  NOAFFIRM 위험: 확인 직후 Standby도 장애</a:t>
             </a:r>
           </a:p>
         </p:txBody>
@@ -6521,7 +7517,7 @@
                 </a:solidFill>
                 <a:latin typeface="맑은 고딕"/>
               </a:rPr>
-              <a:t>PROTECTION_MODE vs PROTECTION_LEVEL</a:t>
+              <a:t>FASTSYNC</a:t>
             </a:r>
           </a:p>
         </p:txBody>
@@ -6560,7 +7556,7 @@
                 </a:solidFill>
                 <a:latin typeface="맑은 고딕"/>
               </a:rPr>
-              <a:t>명령 성공 ≠ 수준 달성</a:t>
+              <a:t>SYNC NOAFFIRM에 붙인 이름</a:t>
             </a:r>
           </a:p>
         </p:txBody>
@@ -6599,7 +7595,7 @@
                 </a:solidFill>
                 <a:latin typeface="맑은 고딕"/>
               </a:rPr>
-              <a:t>•  PROTECTION_MODE : 설정한 모드. "이렇게 운영하겠다"</a:t>
+              <a:t>•  파라미터 키워드는 없고 Broker LogXptMode 값</a:t>
             </a:r>
           </a:p>
           <a:p>
@@ -6615,7 +7611,7 @@
                 </a:solidFill>
                 <a:latin typeface="맑은 고딕"/>
               </a:rPr>
-              <a:t>•  PROTECTION_LEVEL : 달성 중인 수준. "실제로는 이렇다"</a:t>
+              <a:t>•  커밋 경로에서 Standby 디스크 I/O 제외</a:t>
             </a:r>
           </a:p>
           <a:p>
@@ -6631,7 +7627,7 @@
                 </a:solidFill>
                 <a:latin typeface="맑은 고딕"/>
               </a:rPr>
-              <a:t>•  실측: ASYNC 상태에서 MAXIMIZE AVAILABILITY → "Database altered"</a:t>
+              <a:t>•  같은 지연 예산으로 조금 더 먼 거리 가능</a:t>
             </a:r>
           </a:p>
           <a:p>
@@ -6647,23 +7643,7 @@
                 </a:solidFill>
                 <a:latin typeface="맑은 고딕"/>
               </a:rPr>
-              <a:t>•  그런데 LEVEL은 RESYNCHRONIZATION — 요건(동기 전송) 미충족</a:t>
-            </a:r>
-          </a:p>
-          <a:p>
-            <a:pPr algn="l">
-              <a:spcAft>
-                <a:spcPts val="1000"/>
-              </a:spcAft>
-            </a:pPr>
-            <a:r>
-              <a:rPr sz="1700" b="0">
-                <a:solidFill>
-                  <a:srgbClr val="222222"/>
-                </a:solidFill>
-                <a:latin typeface="맑은 고딕"/>
-              </a:rPr>
-              <a:t>•  SYNC AFFIRM으로 바꾸고 다시 설정하니 LEVEL이 따라왔다</a:t>
+              <a:t>•  Maximum Availability 전용</a:t>
             </a:r>
           </a:p>
         </p:txBody>
@@ -6764,7 +7744,7 @@
                 </a:solidFill>
                 <a:latin typeface="맑은 고딕"/>
               </a:rPr>
-              <a:t>RESYNCHRONIZATION</a:t>
+              <a:t>네 가지 조합 비교</a:t>
             </a:r>
           </a:p>
         </p:txBody>
@@ -6803,7 +7783,7 @@
                 </a:solidFill>
                 <a:latin typeface="맑은 고딕"/>
               </a:rPr>
-              <a:t>오류가 아니라 과도 상태</a:t>
+              <a:t>손실 가능성과 비용의 맞바꿈</a:t>
             </a:r>
           </a:p>
         </p:txBody>
@@ -6842,7 +7822,7 @@
                 </a:solidFill>
                 <a:latin typeface="맑은 고딕"/>
               </a:rPr>
-              <a:t>•  "설정한 수준에 도달하려고 따라잡는 중"</a:t>
+              <a:t>•  SYNC AFFIRM: SRL 기록 확인, 단일 장애 무손실</a:t>
             </a:r>
           </a:p>
           <a:p>
@@ -6858,7 +7838,7 @@
                 </a:solidFill>
                 <a:latin typeface="맑은 고딕"/>
               </a:rPr>
-              <a:t>•  로그 스위치마다 잠깐 나타났다 사라지는 것은 정상</a:t>
+              <a:t>•  SYNC NOAFFIRM: 수신 확인, 동시 장애 때만 손실</a:t>
             </a:r>
           </a:p>
           <a:p>
@@ -6874,7 +7854,7 @@
                 </a:solidFill>
                 <a:latin typeface="맑은 고딕"/>
               </a:rPr>
-              <a:t>•  문제는 계속 머물러 있을 때</a:t>
+              <a:t>•  ASYNC NOAFFIRM: 기다림 없음, lag만큼 손실</a:t>
             </a:r>
           </a:p>
           <a:p>
@@ -6890,39 +7870,7 @@
                 </a:solidFill>
                 <a:latin typeface="맑은 고딕"/>
               </a:rPr>
-              <a:t>•  구분 기준 : V$ARCHIVE_DEST_STATUS 를 함께 본다</a:t>
-            </a:r>
-          </a:p>
-          <a:p>
-            <a:pPr algn="l">
-              <a:spcAft>
-                <a:spcPts val="1000"/>
-              </a:spcAft>
-            </a:pPr>
-            <a:r>
-              <a:rPr sz="1700" b="0">
-                <a:solidFill>
-                  <a:srgbClr val="222222"/>
-                </a:solidFill>
-                <a:latin typeface="맑은 고딕"/>
-              </a:rPr>
-              <a:t>•  STATUS=VALID + 오류 없음 → 설정 요건 미충족</a:t>
-            </a:r>
-          </a:p>
-          <a:p>
-            <a:pPr algn="l">
-              <a:spcAft>
-                <a:spcPts val="1000"/>
-              </a:spcAft>
-            </a:pPr>
-            <a:r>
-              <a:rPr sz="1700" b="0">
-                <a:solidFill>
-                  <a:srgbClr val="222222"/>
-                </a:solidFill>
-                <a:latin typeface="맑은 고딕"/>
-              </a:rPr>
-              <a:t>•  STATUS=ERROR + ORA- 번호 → 전송 장애</a:t>
+              <a:t>•  ASYNC AFFIRM: 디프리케이트</a:t>
             </a:r>
           </a:p>
         </p:txBody>
@@ -7023,7 +7971,7 @@
                 </a:solidFill>
                 <a:latin typeface="맑은 고딕"/>
               </a:rPr>
-              <a:t>전환이 거부되는 조건</a:t>
+              <a:t>SYNC 목적지가 여럿일 때</a:t>
             </a:r>
           </a:p>
         </p:txBody>
@@ -7062,7 +8010,7 @@
                 </a:solidFill>
                 <a:latin typeface="맑은 고딕"/>
               </a:rPr>
-              <a:t>ORA-01126의 두 얼굴</a:t>
+              <a:t>가장 느린 목적지가 커밋 시간을 정한다</a:t>
             </a:r>
           </a:p>
         </p:txBody>
@@ -7101,7 +8049,7 @@
                 </a:solidFill>
                 <a:latin typeface="맑은 고딕"/>
               </a:rPr>
-              <a:t>•  Performance → Protection (OPEN) : ORA-01126 거부</a:t>
+              <a:t>•  활성 SYNC 목적지 모두의 확인을 기다림</a:t>
             </a:r>
           </a:p>
           <a:p>
@@ -7117,7 +8065,7 @@
                 </a:solidFill>
                 <a:latin typeface="맑은 고딕"/>
               </a:rPr>
-              <a:t>•  Performance → Availability (OPEN) : 허용, LEVEL=RESYNCHRONIZATION</a:t>
+              <a:t>•  하나가 NET_TIMEOUT을 넘기면 그것만 실패 처리</a:t>
             </a:r>
           </a:p>
           <a:p>
@@ -7133,7 +8081,7 @@
                 </a:solidFill>
                 <a:latin typeface="맑은 고딕"/>
               </a:rPr>
-              <a:t>•  Availability(LEVEL=RESYNC) → Protection (OPEN) : ORA-01126 거부</a:t>
+              <a:t>•  보호 판단은 동기화된 목적지 하나로 충분</a:t>
             </a:r>
           </a:p>
           <a:p>
@@ -7149,23 +8097,7 @@
                 </a:solidFill>
                 <a:latin typeface="맑은 고딕"/>
               </a:rPr>
-              <a:t>•  Availability(LEVEL=MAX AVAIL) → Protection (OPEN) : 허용</a:t>
-            </a:r>
-          </a:p>
-          <a:p>
-            <a:pPr algn="l">
-              <a:spcAft>
-                <a:spcPts val="1000"/>
-              </a:spcAft>
-            </a:pPr>
-            <a:r>
-              <a:rPr sz="1700" b="0">
-                <a:solidFill>
-                  <a:srgbClr val="222222"/>
-                </a:solidFill>
-                <a:latin typeface="맑은 고딕"/>
-              </a:rPr>
-              <a:t>•  낮추는 방향은 제약 없음</a:t>
+              <a:t>•  먼 목적지는 ASYNC로 두는 편이 낫다</a:t>
             </a:r>
           </a:p>
         </p:txBody>
@@ -7266,7 +8198,7 @@
                 </a:solidFill>
                 <a:latin typeface="맑은 고딕"/>
               </a:rPr>
-              <a:t>올바른 전환 순서</a:t>
+              <a:t>전환 전에 잴 것</a:t>
             </a:r>
           </a:p>
         </p:txBody>
@@ -7305,7 +8237,7 @@
                 </a:solidFill>
                 <a:latin typeface="맑은 고딕"/>
               </a:rPr>
-              <a:t>이 순서를 지키면 ORA-01126을 만나지 않는다</a:t>
+              <a:t>숫자로 비용을 예상한다</a:t>
             </a:r>
           </a:p>
         </p:txBody>
@@ -7344,7 +8276,7 @@
                 </a:solidFill>
                 <a:latin typeface="맑은 고딕"/>
               </a:rPr>
-              <a:t>•  ① Standby SRL 확인 (V$STANDBY_LOG)</a:t>
+              <a:t>•  Primary와 Standby 사이 왕복 지연</a:t>
             </a:r>
           </a:p>
           <a:p>
@@ -7360,7 +8292,7 @@
                 </a:solidFill>
                 <a:latin typeface="맑은 고딕"/>
               </a:rPr>
-              <a:t>•  ② 목적지를 SYNC AFFIRM 으로 변경</a:t>
+              <a:t>•  업무 피크 시간의 초당 커밋 수</a:t>
             </a:r>
           </a:p>
           <a:p>
@@ -7376,7 +8308,7 @@
                 </a:solidFill>
                 <a:latin typeface="맑은 고딕"/>
               </a:rPr>
-              <a:t>•  ③ ALTER SYSTEM ARCHIVE LOG CURRENT</a:t>
+              <a:t>•  전환 전후 log file sync 평균 대기</a:t>
             </a:r>
           </a:p>
           <a:p>
@@ -7392,55 +8324,7 @@
                 </a:solidFill>
                 <a:latin typeface="맑은 고딕"/>
               </a:rPr>
-              <a:t>•  ④ MAXIMIZE AVAILABILITY</a:t>
-            </a:r>
-          </a:p>
-          <a:p>
-            <a:pPr algn="l">
-              <a:spcAft>
-                <a:spcPts val="1000"/>
-              </a:spcAft>
-            </a:pPr>
-            <a:r>
-              <a:rPr sz="1700" b="0">
-                <a:solidFill>
-                  <a:srgbClr val="222222"/>
-                </a:solidFill>
-                <a:latin typeface="맑은 고딕"/>
-              </a:rPr>
-              <a:t>•  ⑤ PROTECTION_LEVEL 이 MAXIMUM AVAILABILITY 가 될 때까지 대기</a:t>
-            </a:r>
-          </a:p>
-          <a:p>
-            <a:pPr algn="l">
-              <a:spcAft>
-                <a:spcPts val="1000"/>
-              </a:spcAft>
-            </a:pPr>
-            <a:r>
-              <a:rPr sz="1700" b="0">
-                <a:solidFill>
-                  <a:srgbClr val="222222"/>
-                </a:solidFill>
-                <a:latin typeface="맑은 고딕"/>
-              </a:rPr>
-              <a:t>•  ⑥ MAXIMIZE PROTECTION</a:t>
-            </a:r>
-          </a:p>
-          <a:p>
-            <a:pPr algn="l">
-              <a:spcAft>
-                <a:spcPts val="1000"/>
-              </a:spcAft>
-            </a:pPr>
-            <a:r>
-              <a:rPr sz="1700" b="0">
-                <a:solidFill>
-                  <a:srgbClr val="222222"/>
-                </a:solidFill>
-                <a:latin typeface="맑은 고딕"/>
-              </a:rPr>
-              <a:t>•  ⑦ PROTECTION_LEVEL 재확인 — 명령 성공은 절반의 확인</a:t>
+              <a:t>•  허용 범위 초과 시 FASTSYNC나 Far Sync 검토</a:t>
             </a:r>
           </a:p>
         </p:txBody>
@@ -7580,7 +8464,7 @@
                 </a:solidFill>
                 <a:latin typeface="맑은 고딕"/>
               </a:rPr>
-              <a:t>Standby를 잃었을 때</a:t>
+              <a:t>LOG_ARCHIVE_DEST_n 주요 속성</a:t>
             </a:r>
           </a:p>
         </p:txBody>
@@ -7663,7 +8547,7 @@
                 </a:solidFill>
                 <a:latin typeface="맑은 고딕"/>
               </a:rPr>
-              <a:t>•  Maximum Availability — 계속 돈다</a:t>
+              <a:t>•  목적지 정의와 식별</a:t>
             </a:r>
           </a:p>
           <a:p>
@@ -7679,7 +8563,7 @@
                 </a:solidFill>
                 <a:latin typeface="맑은 고딕"/>
               </a:rPr>
-              <a:t>•  Maximum Protection — Primary가 스스로 멈춘다</a:t>
+              <a:t>•  VALID_FOR와 역할 전환</a:t>
             </a:r>
           </a:p>
           <a:p>
@@ -7695,7 +8579,7 @@
                 </a:solidFill>
                 <a:latin typeface="맑은 고딕"/>
               </a:rPr>
-              <a:t>•  실측으로 확인한다</a:t>
+              <a:t>•  실패 처리와 확인 뷰</a:t>
             </a:r>
           </a:p>
         </p:txBody>
@@ -7796,7 +8680,7 @@
                 </a:solidFill>
                 <a:latin typeface="맑은 고딕"/>
               </a:rPr>
-              <a:t>Maximum Availability에서 Standby 상실</a:t>
+              <a:t>목적지 정의의 기본 형태</a:t>
             </a:r>
           </a:p>
         </p:txBody>
@@ -7835,7 +8719,7 @@
                 </a:solidFill>
                 <a:latin typeface="맑은 고딕"/>
               </a:rPr>
-              <a:t>실측</a:t>
+              <a:t>LOCATION 또는 SERVICE는 필수</a:t>
             </a:r>
           </a:p>
         </p:txBody>
@@ -7874,7 +8758,7 @@
                 </a:solidFill>
                 <a:latin typeface="맑은 고딕"/>
               </a:rPr>
-              <a:t>•  Standby를 SHUTDOWN IMMEDIATE — 정상 종료된다</a:t>
+              <a:t>•  SERVICE=Net 서비스 이름, LOCATION=로컬 경로</a:t>
             </a:r>
           </a:p>
           <a:p>
@@ -7890,7 +8774,7 @@
                 </a:solidFill>
                 <a:latin typeface="맑은 고딕"/>
               </a:rPr>
-              <a:t>•  Primary는 OPEN 유지, PROTECTION_LEVEL만 RESYNCHRONIZATION으로 하락</a:t>
+              <a:t>•  목적지마다 LOG_ARCHIVE_DEST_STATE_n (기본 ENABLE)</a:t>
             </a:r>
           </a:p>
           <a:p>
@@ -7906,7 +8790,7 @@
                 </a:solidFill>
                 <a:latin typeface="맑은 고딕"/>
               </a:rPr>
-              <a:t>•  CREATE TABLE / INSERT / COMMIT 모두 정상</a:t>
+              <a:t>•  DEFER: 정의는 두고 전송만 멈춤</a:t>
             </a:r>
           </a:p>
           <a:p>
@@ -7922,7 +8806,7 @@
                 </a:solidFill>
                 <a:latin typeface="맑은 고딕"/>
               </a:rPr>
-              <a:t>•  V$ARCHIVE_DEST_STATUS : STATUS=ERROR, ORA-03113</a:t>
+              <a:t>•  속성 하나만 바꾸는 문법 없음, 문자열 전체 재지정</a:t>
             </a:r>
           </a:p>
           <a:p>
@@ -7938,7 +8822,7 @@
                 </a:solidFill>
                 <a:latin typeface="맑은 고딕"/>
               </a:rPr>
-              <a:t>•  Standby를 켜고 로그 스위치 → LEVEL과 STATUS 모두 자동 회복</a:t>
+              <a:t>•  철자 오류는 ORA-16024로 거부</a:t>
             </a:r>
           </a:p>
         </p:txBody>
@@ -8039,7 +8923,7 @@
                 </a:solidFill>
                 <a:latin typeface="맑은 고딕"/>
               </a:rPr>
-              <a:t>학습 목표 (Objectives)</a:t>
+              <a:t>학습 목표</a:t>
             </a:r>
           </a:p>
         </p:txBody>
@@ -8078,7 +8962,7 @@
                 </a:solidFill>
                 <a:latin typeface="맑은 고딕"/>
               </a:rPr>
-              <a:t>•  세 가지 보호 모드의 커밋 조건과 장애 시 동작을 구분하고, 전환에 필요한 요건을 말한다.</a:t>
+              <a:t>•  전송 모드와 보호 모드의 관계를 설명한다</a:t>
             </a:r>
           </a:p>
           <a:p>
@@ -8094,7 +8978,7 @@
                 </a:solidFill>
                 <a:latin typeface="맑은 고딕"/>
               </a:rPr>
-              <a:t>•  LOG_ARCHIVE_DEST_n의 주요 속성을 해석하고 V$ARCHIVE_DEST의 어느 열로 나타나는지 대응시킨다.</a:t>
+              <a:t>•  NSS, TTnn, ARCn, RFS의 리두 경로를 그린다</a:t>
             </a:r>
           </a:p>
           <a:p>
@@ -8110,7 +8994,7 @@
                 </a:solidFill>
                 <a:latin typeface="맑은 고딕"/>
               </a:rPr>
-              <a:t>•  PROTECTION_MODE와 PROTECTION_LEVEL의 차이를 설명하고 어긋난 상태를 재현·해소한다.</a:t>
+              <a:t>•  SYNC/ASYNC, AFFIRM/NOAFFIRM 조합을 비교한다</a:t>
             </a:r>
           </a:p>
           <a:p>
@@ -8126,7 +9010,7 @@
                 </a:solidFill>
                 <a:latin typeface="맑은 고딕"/>
               </a:rPr>
-              <a:t>•  보호 모드 전환이 거부되는 조건을 알고 오류 메시지에서 실제 원인을 읽어 낸다.</a:t>
+              <a:t>•  LOG_ARCHIVE_DEST_n 주요 속성을 읽고 작성한다</a:t>
             </a:r>
           </a:p>
           <a:p>
@@ -8142,7 +9026,7 @@
                 </a:solidFill>
                 <a:latin typeface="맑은 고딕"/>
               </a:rPr>
-              <a:t>•  동기 전송의 NSSn과 비동기 전송의 TTnn을 구분해 확인한다.</a:t>
+              <a:t>•  세 보호 모드의 손실 보장과 Primary 동작을 구분한다</a:t>
             </a:r>
           </a:p>
           <a:p>
@@ -8158,7 +9042,7 @@
                 </a:solidFill>
                 <a:latin typeface="맑은 고딕"/>
               </a:rPr>
-              <a:t>•  Maximum Protection의 위험을 실증으로 이해하고 도입 판단 근거를 댄다.</a:t>
+              <a:t>•  모드 전환 절차와 선택 기준을 적용한다</a:t>
             </a:r>
           </a:p>
         </p:txBody>
@@ -8259,7 +9143,7 @@
                 </a:solidFill>
                 <a:latin typeface="맑은 고딕"/>
               </a:rPr>
-              <a:t>Maximum Protection에서는 종료조차 막힌다</a:t>
+              <a:t>DB_UNIQUE_NAME과 LOG_ARCHIVE_CONFIG</a:t>
             </a:r>
           </a:p>
         </p:txBody>
@@ -8298,7 +9182,7 @@
                 </a:solidFill>
                 <a:latin typeface="맑은 고딕"/>
               </a:rPr>
-              <a:t>ORA-01154</a:t>
+              <a:t>목적지가 누구인지 밝힌다</a:t>
             </a:r>
           </a:p>
         </p:txBody>
@@ -8337,7 +9221,7 @@
                 </a:solidFill>
                 <a:latin typeface="맑은 고딕"/>
               </a:rPr>
-              <a:t>•  SYS@boston&gt; SHUTDOWN IMMEDIATE</a:t>
+              <a:t>•  받는 쪽 DB_UNIQUE_NAME 값과 일치해야 함</a:t>
             </a:r>
           </a:p>
           <a:p>
@@ -8353,7 +9237,7 @@
                 </a:solidFill>
                 <a:latin typeface="맑은 고딕"/>
               </a:rPr>
-              <a:t>•  ORA-01154: database busy. Open, close, mount, and dismount not allowed now</a:t>
+              <a:t>•  DB_NAME이 같은 Primary·Standby를 구분</a:t>
             </a:r>
           </a:p>
           <a:p>
@@ -8369,7 +9253,7 @@
                 </a:solidFill>
                 <a:latin typeface="맑은 고딕"/>
               </a:rPr>
-              <a:t>•  Primary가 이 Standby 없이는 커밋할 수 없어 오라클이 막은 것</a:t>
+              <a:t>•  DG_CONFIG 목록에 없으면 ORA-16053</a:t>
             </a:r>
           </a:p>
           <a:p>
@@ -8385,23 +9269,7 @@
                 </a:solidFill>
                 <a:latin typeface="맑은 고딕"/>
               </a:rPr>
-              <a:t>•  Standby가 "있으면 좋은 것"에서 "없으면 안 되는 것"이 됐다</a:t>
-            </a:r>
-          </a:p>
-          <a:p>
-            <a:pPr algn="l">
-              <a:spcAft>
-                <a:spcPts val="1000"/>
-              </a:spcAft>
-            </a:pPr>
-            <a:r>
-              <a:rPr sz="1700" b="0">
-                <a:solidFill>
-                  <a:srgbClr val="222222"/>
-                </a:solidFill>
-                <a:latin typeface="맑은 고딕"/>
-              </a:rPr>
-              <a:t>•  유지보수하려면 먼저 보호 모드를 낮춰야 한다</a:t>
+              <a:t>•  등록 목록은 V$DATAGUARD_CONFIG로 확인</a:t>
             </a:r>
           </a:p>
         </p:txBody>
@@ -8502,7 +9370,7 @@
                 </a:solidFill>
                 <a:latin typeface="맑은 고딕"/>
               </a:rPr>
-              <a:t>Standby 강제 종료 — Primary가 사라졌다</a:t>
+              <a:t>VALID_FOR</a:t>
             </a:r>
           </a:p>
         </p:txBody>
@@ -8541,7 +9409,7 @@
                 </a:solidFill>
                 <a:latin typeface="맑은 고딕"/>
               </a:rPr>
-              <a:t>실측 알림 로그</a:t>
+              <a:t>역할에 따라 목적지를 켜고 끈다</a:t>
             </a:r>
           </a:p>
         </p:txBody>
@@ -8580,7 +9448,7 @@
                 </a:solidFill>
                 <a:latin typeface="맑은 고딕"/>
               </a:rPr>
-              <a:t>•  SYS@boston&gt; SHUTDOWN ABORT</a:t>
+              <a:t>•  (로그 유형, 역할) 한 쌍으로 지정</a:t>
             </a:r>
           </a:p>
           <a:p>
@@ -8596,7 +9464,7 @@
                 </a:solidFill>
                 <a:latin typeface="맑은 고딕"/>
               </a:rPr>
-              <a:t>•  30초 뒤 Primary 접속 → ORA-01034: ORACLE not available</a:t>
+              <a:t>•  로그: ONLINE / STANDBY / ALL_LOGFILES</a:t>
             </a:r>
           </a:p>
           <a:p>
@@ -8612,7 +9480,7 @@
                 </a:solidFill>
                 <a:latin typeface="맑은 고딕"/>
               </a:rPr>
-              <a:t>•  ps -ef | grep ora_pmon_chicago → 0</a:t>
+              <a:t>•  역할: PRIMARY / STANDBY / ALL_ROLES</a:t>
             </a:r>
           </a:p>
           <a:p>
@@ -8628,7 +9496,7 @@
                 </a:solidFill>
                 <a:latin typeface="맑은 고딕"/>
               </a:rPr>
-              <a:t>•  LGWR: All standby database destinations have failed</a:t>
+              <a:t>•  맞지 않는 목적지는 오류 없이 무시</a:t>
             </a:r>
           </a:p>
           <a:p>
@@ -8644,23 +9512,7 @@
                 </a:solidFill>
                 <a:latin typeface="맑은 고딕"/>
               </a:rPr>
-              <a:t>•  LGWR: WARN: Instance shutdown required to protect primary</a:t>
-            </a:r>
-          </a:p>
-          <a:p>
-            <a:pPr algn="l">
-              <a:spcAft>
-                <a:spcPts val="1000"/>
-              </a:spcAft>
-            </a:pPr>
-            <a:r>
-              <a:rPr sz="1700" b="0">
-                <a:solidFill>
-                  <a:srgbClr val="222222"/>
-                </a:solidFill>
-                <a:latin typeface="맑은 고딕"/>
-              </a:rPr>
-              <a:t>•  Instance terminated by LGWR, pid = 7843</a:t>
+              <a:t>•  역할 전환 뒤 자동으로 쓰이기 시작</a:t>
             </a:r>
           </a:p>
         </p:txBody>
@@ -8761,7 +9613,7 @@
                 </a:solidFill>
                 <a:latin typeface="맑은 고딕"/>
               </a:rPr>
-              <a:t>종료된 Primary를 되살리는 두 길</a:t>
+              <a:t>VALID_FOR 조합</a:t>
             </a:r>
           </a:p>
         </p:txBody>
@@ -8774,8 +9626,8 @@
         </p:nvSpPr>
         <p:spPr>
           <a:xfrm>
-            <a:off x="640080" y="1371600"/>
-            <a:ext cx="10881360" cy="5120640"/>
+            <a:off x="640080" y="1078992"/>
+            <a:ext cx="10881360" cy="457200"/>
           </a:xfrm>
           <a:prstGeom prst="rect">
             <a:avLst/>
@@ -8790,81 +9642,120 @@
           <a:p>
             <a:pPr algn="l">
               <a:spcAft>
-                <a:spcPts val="1000"/>
-              </a:spcAft>
-            </a:pPr>
-            <a:r>
-              <a:rPr sz="1600" b="0">
-                <a:solidFill>
-                  <a:srgbClr val="222222"/>
-                </a:solidFill>
-                <a:latin typeface="맑은 고딕"/>
-              </a:rPr>
-              <a:t>•  선택 A — Standby를 먼저 살린다 : 무손실 보장을 유지한 채 재개</a:t>
-            </a:r>
-          </a:p>
-          <a:p>
-            <a:pPr algn="l">
-              <a:spcAft>
-                <a:spcPts val="1000"/>
-              </a:spcAft>
-            </a:pPr>
-            <a:r>
-              <a:rPr sz="1600" b="0">
-                <a:solidFill>
-                  <a:srgbClr val="222222"/>
-                </a:solidFill>
-                <a:latin typeface="맑은 고딕"/>
-              </a:rPr>
-              <a:t>•  선택 B — 보호 모드를 낮춘다 : 서비스를 먼저 살리고 무손실은 포기</a:t>
-            </a:r>
-          </a:p>
-          <a:p>
-            <a:pPr algn="l">
-              <a:spcAft>
-                <a:spcPts val="1000"/>
-              </a:spcAft>
-            </a:pPr>
-            <a:r>
-              <a:rPr sz="1600" b="0">
-                <a:solidFill>
-                  <a:srgbClr val="222222"/>
-                </a:solidFill>
-                <a:latin typeface="맑은 고딕"/>
-              </a:rPr>
-              <a:t>•  B의 순서 : STARTUP MOUNT → MAXIMIZE PERFORMANCE → ALTER DATABASE OPEN</a:t>
-            </a:r>
-          </a:p>
-          <a:p>
-            <a:pPr algn="l">
-              <a:spcAft>
-                <a:spcPts val="1000"/>
-              </a:spcAft>
-            </a:pPr>
-            <a:r>
-              <a:rPr sz="1600" b="0">
-                <a:solidFill>
-                  <a:srgbClr val="222222"/>
-                </a:solidFill>
-                <a:latin typeface="맑은 고딕"/>
-              </a:rPr>
-              <a:t>•  순서를 어기면 OPEN이 다시 막힌다</a:t>
-            </a:r>
-          </a:p>
-          <a:p>
-            <a:pPr algn="l">
-              <a:spcAft>
-                <a:spcPts val="1000"/>
-              </a:spcAft>
-            </a:pPr>
-            <a:r>
-              <a:rPr sz="1600" b="0">
-                <a:solidFill>
-                  <a:srgbClr val="222222"/>
-                </a:solidFill>
-                <a:latin typeface="맑은 고딕"/>
-              </a:rPr>
-              <a:t>•  어느 쪽이든 그동안 서비스는 멈춰 있다</a:t>
+                <a:spcPts val="600"/>
+              </a:spcAft>
+            </a:pPr>
+            <a:r>
+              <a:rPr sz="1500" b="0">
+                <a:solidFill>
+                  <a:srgbClr val="5A6672"/>
+                </a:solidFill>
+                <a:latin typeface="맑은 고딕"/>
+              </a:rPr>
+              <a:t>유일하게 잘못된 조합은 하나</a:t>
+            </a:r>
+          </a:p>
+        </p:txBody>
+      </p:sp>
+      <p:sp>
+        <p:nvSpPr>
+          <p:cNvPr id="5" name="TextBox 4"/>
+          <p:cNvSpPr txBox="1"/>
+          <p:nvPr/>
+        </p:nvSpPr>
+        <p:spPr>
+          <a:xfrm>
+            <a:off x="640080" y="1737360"/>
+            <a:ext cx="10881360" cy="4754880"/>
+          </a:xfrm>
+          <a:prstGeom prst="rect">
+            <a:avLst/>
+          </a:prstGeom>
+          <a:noFill/>
+        </p:spPr>
+        <p:txBody>
+          <a:bodyPr wrap="square">
+            <a:spAutoFit/>
+          </a:bodyPr>
+          <a:lstStyle/>
+          <a:p>
+            <a:pPr algn="l">
+              <a:spcAft>
+                <a:spcPts val="1000"/>
+              </a:spcAft>
+            </a:pPr>
+            <a:r>
+              <a:rPr sz="1700" b="0">
+                <a:solidFill>
+                  <a:srgbClr val="222222"/>
+                </a:solidFill>
+                <a:latin typeface="맑은 고딕"/>
+              </a:rPr>
+              <a:t>•  원격 목적지 일반형: ONLINE_LOGFILES, PRIMARY_ROLE</a:t>
+            </a:r>
+          </a:p>
+          <a:p>
+            <a:pPr algn="l">
+              <a:spcAft>
+                <a:spcPts val="1000"/>
+              </a:spcAft>
+            </a:pPr>
+            <a:r>
+              <a:rPr sz="1700" b="0">
+                <a:solidFill>
+                  <a:srgbClr val="222222"/>
+                </a:solidFill>
+                <a:latin typeface="맑은 고딕"/>
+              </a:rPr>
+              <a:t>•  로컬 아카이브: ALL_LOGFILES, ALL_ROLES</a:t>
+            </a:r>
+          </a:p>
+          <a:p>
+            <a:pPr algn="l">
+              <a:spcAft>
+                <a:spcPts val="1000"/>
+              </a:spcAft>
+            </a:pPr>
+            <a:r>
+              <a:rPr sz="1700" b="0">
+                <a:solidFill>
+                  <a:srgbClr val="222222"/>
+                </a:solidFill>
+                <a:latin typeface="맑은 고딕"/>
+              </a:rPr>
+              <a:t>•  STANDBY_LOGFILE, PRIMARY_ROLE은 ORA-16026</a:t>
+            </a:r>
+          </a:p>
+          <a:p>
+            <a:pPr algn="l">
+              <a:spcAft>
+                <a:spcPts val="1000"/>
+              </a:spcAft>
+            </a:pPr>
+            <a:r>
+              <a:rPr sz="1700" b="0">
+                <a:solidFill>
+                  <a:srgbClr val="222222"/>
+                </a:solidFill>
+                <a:latin typeface="맑은 고딕"/>
+              </a:rPr>
+              <a:t>•  ONLINE_LOGFILE, STANDBY_ROLE은 논리 Standby 전용</a:t>
+            </a:r>
+          </a:p>
+          <a:p>
+            <a:pPr algn="l">
+              <a:spcAft>
+                <a:spcPts val="1000"/>
+              </a:spcAft>
+            </a:pPr>
+            <a:r>
+              <a:rPr sz="1700" b="0">
+                <a:solidFill>
+                  <a:srgbClr val="222222"/>
+                </a:solidFill>
+                <a:latin typeface="맑은 고딕"/>
+              </a:rPr>
+              <a:t>•  생략 시 ALL_LOGFILES, ALL_ROLES</a:t>
             </a:r>
           </a:p>
         </p:txBody>
@@ -8896,7 +9787,7 @@
         <p:spPr>
           <a:xfrm>
             <a:off x="0" y="0"/>
-            <a:ext cx="12191695" cy="6858000"/>
+            <a:ext cx="12191695" cy="1005840"/>
           </a:xfrm>
           <a:prstGeom prst="rect">
             <a:avLst/>
@@ -8939,8 +9830,8 @@
         </p:nvSpPr>
         <p:spPr>
           <a:xfrm>
-            <a:off x="822960" y="2011680"/>
-            <a:ext cx="10515600" cy="1097280"/>
+            <a:off x="548640" y="91440"/>
+            <a:ext cx="10972800" cy="777240"/>
           </a:xfrm>
           <a:prstGeom prst="rect">
             <a:avLst/>
@@ -8959,13 +9850,13 @@
               </a:spcAft>
             </a:pPr>
             <a:r>
-              <a:rPr sz="4000" b="1">
+              <a:rPr sz="2600" b="1">
                 <a:solidFill>
                   <a:srgbClr val="FFFFFF"/>
                 </a:solidFill>
                 <a:latin typeface="맑은 고딕"/>
               </a:rPr>
-              <a:t>2.5</a:t>
+              <a:t>NET_TIMEOUT과 REOPEN</a:t>
             </a:r>
           </a:p>
         </p:txBody>
@@ -8978,8 +9869,8 @@
         </p:nvSpPr>
         <p:spPr>
           <a:xfrm>
-            <a:off x="822960" y="3017520"/>
-            <a:ext cx="10515600" cy="914400"/>
+            <a:off x="640080" y="1078992"/>
+            <a:ext cx="10881360" cy="457200"/>
           </a:xfrm>
           <a:prstGeom prst="rect">
             <a:avLst/>
@@ -8998,71 +9889,27 @@
               </a:spcAft>
             </a:pPr>
             <a:r>
-              <a:rPr sz="2800" b="1">
-                <a:solidFill>
-                  <a:srgbClr val="FFFFFF"/>
-                </a:solidFill>
-                <a:latin typeface="맑은 고딕"/>
-              </a:rPr>
-              <a:t>전송 방식과 성능의 맞바꿈</a:t>
-            </a:r>
-          </a:p>
-        </p:txBody>
-      </p:sp>
-      <p:sp>
-        <p:nvSpPr>
-          <p:cNvPr id="5" name="Rectangle 4"/>
-          <p:cNvSpPr/>
-          <p:nvPr/>
-        </p:nvSpPr>
-        <p:spPr>
-          <a:xfrm>
-            <a:off x="822960" y="4114800"/>
-            <a:ext cx="5486400" cy="54864"/>
-          </a:xfrm>
-          <a:prstGeom prst="rect">
-            <a:avLst/>
-          </a:prstGeom>
-          <a:solidFill>
-            <a:srgbClr val="FFFFFF"/>
-          </a:solidFill>
-          <a:ln>
-            <a:noFill/>
-          </a:ln>
-          <a:effectLst/>
-        </p:spPr>
-        <p:style>
-          <a:lnRef idx="1">
-            <a:schemeClr val="accent1"/>
-          </a:lnRef>
-          <a:fillRef idx="3">
-            <a:schemeClr val="accent1"/>
-          </a:fillRef>
-          <a:effectRef idx="2">
-            <a:schemeClr val="accent1"/>
-          </a:effectRef>
-          <a:fontRef idx="minor">
-            <a:schemeClr val="lt1"/>
-          </a:fontRef>
-        </p:style>
-        <p:txBody>
-          <a:bodyPr rtlCol="0" anchor="ctr"/>
-          <a:lstStyle/>
-          <a:p>
-            <a:pPr algn="ctr"/>
-          </a:p>
-        </p:txBody>
-      </p:sp>
-      <p:sp>
-        <p:nvSpPr>
-          <p:cNvPr id="6" name="TextBox 5"/>
+              <a:rPr sz="1500" b="0">
+                <a:solidFill>
+                  <a:srgbClr val="5A6672"/>
+                </a:solidFill>
+                <a:latin typeface="맑은 고딕"/>
+              </a:rPr>
+              <a:t>얼마나 기다리고 언제 다시 시도하나</a:t>
+            </a:r>
+          </a:p>
+        </p:txBody>
+      </p:sp>
+      <p:sp>
+        <p:nvSpPr>
+          <p:cNvPr id="5" name="TextBox 4"/>
           <p:cNvSpPr txBox="1"/>
           <p:nvPr/>
         </p:nvSpPr>
         <p:spPr>
           <a:xfrm>
-            <a:off x="822960" y="4297680"/>
-            <a:ext cx="10058400" cy="2011680"/>
+            <a:off x="640080" y="1737360"/>
+            <a:ext cx="10881360" cy="4754880"/>
           </a:xfrm>
           <a:prstGeom prst="rect">
             <a:avLst/>
@@ -9077,49 +9924,81 @@
           <a:p>
             <a:pPr algn="l">
               <a:spcAft>
-                <a:spcPts val="800"/>
-              </a:spcAft>
-            </a:pPr>
-            <a:r>
-              <a:rPr sz="1600" b="0">
-                <a:solidFill>
-                  <a:srgbClr val="FFFFFF"/>
-                </a:solidFill>
-                <a:latin typeface="맑은 고딕"/>
-              </a:rPr>
-              <a:t>•  SYNC의 비용은 커밋 응답시간</a:t>
-            </a:r>
-          </a:p>
-          <a:p>
-            <a:pPr algn="l">
-              <a:spcAft>
-                <a:spcPts val="800"/>
-              </a:spcAft>
-            </a:pPr>
-            <a:r>
-              <a:rPr sz="1600" b="0">
-                <a:solidFill>
-                  <a:srgbClr val="FFFFFF"/>
-                </a:solidFill>
-                <a:latin typeface="맑은 고딕"/>
-              </a:rPr>
-              <a:t>•  ASYNC의 비용은 잠재 손실</a:t>
-            </a:r>
-          </a:p>
-          <a:p>
-            <a:pPr algn="l">
-              <a:spcAft>
-                <a:spcPts val="800"/>
-              </a:spcAft>
-            </a:pPr>
-            <a:r>
-              <a:rPr sz="1600" b="0">
-                <a:solidFill>
-                  <a:srgbClr val="FFFFFF"/>
-                </a:solidFill>
-                <a:latin typeface="맑은 고딕"/>
-              </a:rPr>
-              <a:t>•  진단은 세 개의 뷰로</a:t>
+                <a:spcPts val="1000"/>
+              </a:spcAft>
+            </a:pPr>
+            <a:r>
+              <a:rPr sz="1700" b="0">
+                <a:solidFill>
+                  <a:srgbClr val="222222"/>
+                </a:solidFill>
+                <a:latin typeface="맑은 고딕"/>
+              </a:rPr>
+              <a:t>•  NET_TIMEOUT: SYNC 응답 대기 상한, 기본 30초</a:t>
+            </a:r>
+          </a:p>
+          <a:p>
+            <a:pPr algn="l">
+              <a:spcAft>
+                <a:spcPts val="1000"/>
+              </a:spcAft>
+            </a:pPr>
+            <a:r>
+              <a:rPr sz="1700" b="0">
+                <a:solidFill>
+                  <a:srgbClr val="222222"/>
+                </a:solidFill>
+                <a:latin typeface="맑은 고딕"/>
+              </a:rPr>
+              <a:t>•  범위 1~1200초, TCP의 긴 타임아웃 회피</a:t>
+            </a:r>
+          </a:p>
+          <a:p>
+            <a:pPr algn="l">
+              <a:spcAft>
+                <a:spcPts val="1000"/>
+              </a:spcAft>
+            </a:pPr>
+            <a:r>
+              <a:rPr sz="1700" b="0">
+                <a:solidFill>
+                  <a:srgbClr val="222222"/>
+                </a:solidFill>
+                <a:latin typeface="맑은 고딕"/>
+              </a:rPr>
+              <a:t>•  Maximum Availability의 커밋 정지 시간 상한</a:t>
+            </a:r>
+          </a:p>
+          <a:p>
+            <a:pPr algn="l">
+              <a:spcAft>
+                <a:spcPts val="1000"/>
+              </a:spcAft>
+            </a:pPr>
+            <a:r>
+              <a:rPr sz="1700" b="0">
+                <a:solidFill>
+                  <a:srgbClr val="222222"/>
+                </a:solidFill>
+                <a:latin typeface="맑은 고딕"/>
+              </a:rPr>
+              <a:t>•  REOPEN: 재연결 최소 간격, 기본 300초</a:t>
+            </a:r>
+          </a:p>
+          <a:p>
+            <a:pPr algn="l">
+              <a:spcAft>
+                <a:spcPts val="1000"/>
+              </a:spcAft>
+            </a:pPr>
+            <a:r>
+              <a:rPr sz="1700" b="0">
+                <a:solidFill>
+                  <a:srgbClr val="222222"/>
+                </a:solidFill>
+                <a:latin typeface="맑은 고딕"/>
+              </a:rPr>
+              <a:t>•  재연결 후 밀린 로그는 갭 해소로 전송</a:t>
             </a:r>
           </a:p>
         </p:txBody>
@@ -9220,7 +10099,7 @@
                 </a:solidFill>
                 <a:latin typeface="맑은 고딕"/>
               </a:rPr>
-              <a:t>SYNC와 ASYNC의 비용 비교</a:t>
+              <a:t>MAX_FAILURE, ALTERNATE, MANDATORY</a:t>
             </a:r>
           </a:p>
         </p:txBody>
@@ -9233,8 +10112,8 @@
         </p:nvSpPr>
         <p:spPr>
           <a:xfrm>
-            <a:off x="640080" y="1371600"/>
-            <a:ext cx="10881360" cy="5120640"/>
+            <a:off x="640080" y="1078992"/>
+            <a:ext cx="10881360" cy="457200"/>
           </a:xfrm>
           <a:prstGeom prst="rect">
             <a:avLst/>
@@ -9249,81 +10128,104 @@
           <a:p>
             <a:pPr algn="l">
               <a:spcAft>
-                <a:spcPts val="1000"/>
-              </a:spcAft>
-            </a:pPr>
-            <a:r>
-              <a:rPr sz="1600" b="0">
-                <a:solidFill>
-                  <a:srgbClr val="222222"/>
-                </a:solidFill>
-                <a:latin typeface="맑은 고딕"/>
-              </a:rPr>
-              <a:t>•  커밋 응답시간 : SYNC는 네트워크 왕복만큼 증가 / ASYNC는 영향 없음</a:t>
-            </a:r>
-          </a:p>
-          <a:p>
-            <a:pPr algn="l">
-              <a:spcAft>
-                <a:spcPts val="1000"/>
-              </a:spcAft>
-            </a:pPr>
-            <a:r>
-              <a:rPr sz="1600" b="0">
-                <a:solidFill>
-                  <a:srgbClr val="222222"/>
-                </a:solidFill>
-                <a:latin typeface="맑은 고딕"/>
-              </a:rPr>
-              <a:t>•  데이터 손실 : SYNC는 없음 / ASYNC는 transport lag만큼 가능</a:t>
-            </a:r>
-          </a:p>
-          <a:p>
-            <a:pPr algn="l">
-              <a:spcAft>
-                <a:spcPts val="1000"/>
-              </a:spcAft>
-            </a:pPr>
-            <a:r>
-              <a:rPr sz="1600" b="0">
-                <a:solidFill>
-                  <a:srgbClr val="222222"/>
-                </a:solidFill>
-                <a:latin typeface="맑은 고딕"/>
-              </a:rPr>
-              <a:t>•  Standby 장애 영향 : SYNC는 모드에 따라 Primary 정지 가능 / ASYNC는 없음</a:t>
-            </a:r>
-          </a:p>
-          <a:p>
-            <a:pPr algn="l">
-              <a:spcAft>
-                <a:spcPts val="1000"/>
-              </a:spcAft>
-            </a:pPr>
-            <a:r>
-              <a:rPr sz="1600" b="0">
-                <a:solidFill>
-                  <a:srgbClr val="222222"/>
-                </a:solidFill>
-                <a:latin typeface="맑은 고딕"/>
-              </a:rPr>
-              <a:t>•  프로세스 : NSSn / TTnn</a:t>
-            </a:r>
-          </a:p>
-          <a:p>
-            <a:pPr algn="l">
-              <a:spcAft>
-                <a:spcPts val="1000"/>
-              </a:spcAft>
-            </a:pPr>
-            <a:r>
-              <a:rPr sz="1600" b="0">
-                <a:solidFill>
-                  <a:srgbClr val="222222"/>
-                </a:solidFill>
-                <a:latin typeface="맑은 고딕"/>
-              </a:rPr>
-              <a:t>•  적합한 거리 : 근거리 / 원거리 포함</a:t>
+                <a:spcPts val="600"/>
+              </a:spcAft>
+            </a:pPr>
+            <a:r>
+              <a:rPr sz="1500" b="0">
+                <a:solidFill>
+                  <a:srgbClr val="5A6672"/>
+                </a:solidFill>
+                <a:latin typeface="맑은 고딕"/>
+              </a:rPr>
+              <a:t>포기와 대체, 강제</a:t>
+            </a:r>
+          </a:p>
+        </p:txBody>
+      </p:sp>
+      <p:sp>
+        <p:nvSpPr>
+          <p:cNvPr id="5" name="TextBox 4"/>
+          <p:cNvSpPr txBox="1"/>
+          <p:nvPr/>
+        </p:nvSpPr>
+        <p:spPr>
+          <a:xfrm>
+            <a:off x="640080" y="1737360"/>
+            <a:ext cx="10881360" cy="4754880"/>
+          </a:xfrm>
+          <a:prstGeom prst="rect">
+            <a:avLst/>
+          </a:prstGeom>
+          <a:noFill/>
+        </p:spPr>
+        <p:txBody>
+          <a:bodyPr wrap="square">
+            <a:spAutoFit/>
+          </a:bodyPr>
+          <a:lstStyle/>
+          <a:p>
+            <a:pPr algn="l">
+              <a:spcAft>
+                <a:spcPts val="1000"/>
+              </a:spcAft>
+            </a:pPr>
+            <a:r>
+              <a:rPr sz="1700" b="0">
+                <a:solidFill>
+                  <a:srgbClr val="222222"/>
+                </a:solidFill>
+                <a:latin typeface="맑은 고딕"/>
+              </a:rPr>
+              <a:t>•  MAX_FAILURE: 연속 실패 허용 횟수, 기본 0(무제한)</a:t>
+            </a:r>
+          </a:p>
+          <a:p>
+            <a:pPr algn="l">
+              <a:spcAft>
+                <a:spcPts val="1000"/>
+              </a:spcAft>
+            </a:pPr>
+            <a:r>
+              <a:rPr sz="1700" b="0">
+                <a:solidFill>
+                  <a:srgbClr val="222222"/>
+                </a:solidFill>
+                <a:latin typeface="맑은 고딕"/>
+              </a:rPr>
+              <a:t>•  한도 도달 시 재시도 중단, ALTERNATE로 전환</a:t>
+            </a:r>
+          </a:p>
+          <a:p>
+            <a:pPr algn="l">
+              <a:spcAft>
+                <a:spcPts val="1000"/>
+              </a:spcAft>
+            </a:pPr>
+            <a:r>
+              <a:rPr sz="1700" b="0">
+                <a:solidFill>
+                  <a:srgbClr val="222222"/>
+                </a:solidFill>
+                <a:latin typeface="맑은 고딕"/>
+              </a:rPr>
+              <a:t>•  ALTERNATE: Far Sync 장애 대비 경로에 주로 사용</a:t>
+            </a:r>
+          </a:p>
+          <a:p>
+            <a:pPr algn="l">
+              <a:spcAft>
+                <a:spcPts val="1000"/>
+              </a:spcAft>
+            </a:pPr>
+            <a:r>
+              <a:rPr sz="1700" b="0">
+                <a:solidFill>
+                  <a:srgbClr val="222222"/>
+                </a:solidFill>
+                <a:latin typeface="맑은 고딕"/>
+              </a:rPr>
+              <a:t>•  MANDATORY 원격 목적지는 Primary 정지 위험</a:t>
             </a:r>
           </a:p>
         </p:txBody>
@@ -9424,7 +10326,7 @@
                 </a:solidFill>
                 <a:latin typeface="맑은 고딕"/>
               </a:rPr>
-              <a:t>전송 상태를 진단하는 세 뷰</a:t>
+              <a:t>그 밖의 속성</a:t>
             </a:r>
           </a:p>
         </p:txBody>
@@ -9463,7 +10365,7 @@
                 </a:solidFill>
                 <a:latin typeface="맑은 고딕"/>
               </a:rPr>
-              <a:t>순서가 중요하다</a:t>
+              <a:t>라이선스와 다른 장 몫을 구분</a:t>
             </a:r>
           </a:p>
         </p:txBody>
@@ -9502,7 +10404,7 @@
                 </a:solidFill>
                 <a:latin typeface="맑은 고딕"/>
               </a:rPr>
-              <a:t>•  ① V$ARCHIVE_DEST — VALID_NOW 가 YES 인가 (아니면 설정 문제)</a:t>
+              <a:t>•  COMPRESSION=ENABLE: Advanced Compression 옵션 필요</a:t>
             </a:r>
           </a:p>
           <a:p>
@@ -9518,7 +10420,7 @@
                 </a:solidFill>
                 <a:latin typeface="맑은 고딕"/>
               </a:rPr>
-              <a:t>•  ② V$ARCHIVE_DEST_STATUS — STATUS 와 ERROR (ORA- 번호가 실제 원인)</a:t>
+              <a:t>•  DELAY: 적용만 늦춤, 7장</a:t>
             </a:r>
           </a:p>
           <a:p>
@@ -9534,7 +10436,7 @@
                 </a:solidFill>
                 <a:latin typeface="맑은 고딕"/>
               </a:rPr>
-              <a:t>•  ③ V$DATAGUARD_PROCESS — ACTION 이 IDLE 인가 WRITING 인가</a:t>
+              <a:t>•  NOREGISTER: 일반 물리 Standby에서는 쓰지 않음</a:t>
             </a:r>
           </a:p>
           <a:p>
@@ -9550,7 +10452,7 @@
                 </a:solidFill>
                 <a:latin typeface="맑은 고딕"/>
               </a:rPr>
-              <a:t>•  STATUS 값 : VALID / ERROR / DEFERRED(사람이 끔) / DISABLED(오라클이 끔) / INACTIVE</a:t>
+              <a:t>•  Broker 속성: NetTimeout, ReopenSecs, RedoCompression</a:t>
             </a:r>
           </a:p>
         </p:txBody>
@@ -9582,7 +10484,7 @@
         <p:spPr>
           <a:xfrm>
             <a:off x="0" y="0"/>
-            <a:ext cx="12191695" cy="6858000"/>
+            <a:ext cx="12191695" cy="1005840"/>
           </a:xfrm>
           <a:prstGeom prst="rect">
             <a:avLst/>
@@ -9625,8 +10527,8 @@
         </p:nvSpPr>
         <p:spPr>
           <a:xfrm>
-            <a:off x="822960" y="2011680"/>
-            <a:ext cx="10515600" cy="1097280"/>
+            <a:off x="548640" y="91440"/>
+            <a:ext cx="10972800" cy="777240"/>
           </a:xfrm>
           <a:prstGeom prst="rect">
             <a:avLst/>
@@ -9645,13 +10547,13 @@
               </a:spcAft>
             </a:pPr>
             <a:r>
-              <a:rPr sz="4000" b="1">
+              <a:rPr sz="2600" b="1">
                 <a:solidFill>
                   <a:srgbClr val="FFFFFF"/>
                 </a:solidFill>
                 <a:latin typeface="맑은 고딕"/>
               </a:rPr>
-              <a:t>2.6</a:t>
+              <a:t>설정 결과 확인</a:t>
             </a:r>
           </a:p>
         </p:txBody>
@@ -9664,8 +10566,8 @@
         </p:nvSpPr>
         <p:spPr>
           <a:xfrm>
-            <a:off x="822960" y="3017520"/>
-            <a:ext cx="10515600" cy="914400"/>
+            <a:off x="640080" y="1078992"/>
+            <a:ext cx="10881360" cy="457200"/>
           </a:xfrm>
           <a:prstGeom prst="rect">
             <a:avLst/>
@@ -9684,71 +10586,27 @@
               </a:spcAft>
             </a:pPr>
             <a:r>
-              <a:rPr sz="2800" b="1">
-                <a:solidFill>
-                  <a:srgbClr val="FFFFFF"/>
-                </a:solidFill>
-                <a:latin typeface="맑은 고딕"/>
-              </a:rPr>
-              <a:t>어떤 모드를 고를 것인가</a:t>
-            </a:r>
-          </a:p>
-        </p:txBody>
-      </p:sp>
-      <p:sp>
-        <p:nvSpPr>
-          <p:cNvPr id="5" name="Rectangle 4"/>
-          <p:cNvSpPr/>
-          <p:nvPr/>
-        </p:nvSpPr>
-        <p:spPr>
-          <a:xfrm>
-            <a:off x="822960" y="4114800"/>
-            <a:ext cx="5486400" cy="54864"/>
-          </a:xfrm>
-          <a:prstGeom prst="rect">
-            <a:avLst/>
-          </a:prstGeom>
-          <a:solidFill>
-            <a:srgbClr val="FFFFFF"/>
-          </a:solidFill>
-          <a:ln>
-            <a:noFill/>
-          </a:ln>
-          <a:effectLst/>
-        </p:spPr>
-        <p:style>
-          <a:lnRef idx="1">
-            <a:schemeClr val="accent1"/>
-          </a:lnRef>
-          <a:fillRef idx="3">
-            <a:schemeClr val="accent1"/>
-          </a:fillRef>
-          <a:effectRef idx="2">
-            <a:schemeClr val="accent1"/>
-          </a:effectRef>
-          <a:fontRef idx="minor">
-            <a:schemeClr val="lt1"/>
-          </a:fontRef>
-        </p:style>
-        <p:txBody>
-          <a:bodyPr rtlCol="0" anchor="ctr"/>
-          <a:lstStyle/>
-          <a:p>
-            <a:pPr algn="ctr"/>
-          </a:p>
-        </p:txBody>
-      </p:sp>
-      <p:sp>
-        <p:nvSpPr>
-          <p:cNvPr id="6" name="TextBox 5"/>
+              <a:rPr sz="1500" b="0">
+                <a:solidFill>
+                  <a:srgbClr val="5A6672"/>
+                </a:solidFill>
+                <a:latin typeface="맑은 고딕"/>
+              </a:rPr>
+              <a:t>V$ARCHIVE_DEST로 해석 결과를 본다</a:t>
+            </a:r>
+          </a:p>
+        </p:txBody>
+      </p:sp>
+      <p:sp>
+        <p:nvSpPr>
+          <p:cNvPr id="5" name="TextBox 4"/>
           <p:cNvSpPr txBox="1"/>
           <p:nvPr/>
         </p:nvSpPr>
         <p:spPr>
           <a:xfrm>
-            <a:off x="822960" y="4297680"/>
-            <a:ext cx="10058400" cy="2011680"/>
+            <a:off x="640080" y="1737360"/>
+            <a:ext cx="10881360" cy="4754880"/>
           </a:xfrm>
           <a:prstGeom prst="rect">
             <a:avLst/>
@@ -9763,49 +10621,65 @@
           <a:p>
             <a:pPr algn="l">
               <a:spcAft>
-                <a:spcPts val="800"/>
-              </a:spcAft>
-            </a:pPr>
-            <a:r>
-              <a:rPr sz="1600" b="0">
-                <a:solidFill>
-                  <a:srgbClr val="FFFFFF"/>
-                </a:solidFill>
-                <a:latin typeface="맑은 고딕"/>
-              </a:rPr>
-              <a:t>•  기술적 판단이 아니라 사업적 판단</a:t>
-            </a:r>
-          </a:p>
-          <a:p>
-            <a:pPr algn="l">
-              <a:spcAft>
-                <a:spcPts val="800"/>
-              </a:spcAft>
-            </a:pPr>
-            <a:r>
-              <a:rPr sz="1600" b="0">
-                <a:solidFill>
-                  <a:srgbClr val="FFFFFF"/>
-                </a:solidFill>
-                <a:latin typeface="맑은 고딕"/>
-              </a:rPr>
-              <a:t>•  대부분의 현장은 Maximum Availability</a:t>
-            </a:r>
-          </a:p>
-          <a:p>
-            <a:pPr algn="l">
-              <a:spcAft>
-                <a:spcPts val="800"/>
-              </a:spcAft>
-            </a:pPr>
-            <a:r>
-              <a:rPr sz="1600" b="0">
-                <a:solidFill>
-                  <a:srgbClr val="FFFFFF"/>
-                </a:solidFill>
-                <a:latin typeface="맑은 고딕"/>
-              </a:rPr>
-              <a:t>•  Protection은 Standby 2대 이상이 전제</a:t>
+                <a:spcPts val="1000"/>
+              </a:spcAft>
+            </a:pPr>
+            <a:r>
+              <a:rPr sz="1700" b="0">
+                <a:solidFill>
+                  <a:srgbClr val="222222"/>
+                </a:solidFill>
+                <a:latin typeface="맑은 고딕"/>
+              </a:rPr>
+              <a:t>•  TRANSMIT_MODE, AFFIRM, NET_TIMEOUT, REOPEN_SECS</a:t>
+            </a:r>
+          </a:p>
+          <a:p>
+            <a:pPr algn="l">
+              <a:spcAft>
+                <a:spcPts val="1000"/>
+              </a:spcAft>
+            </a:pPr>
+            <a:r>
+              <a:rPr sz="1700" b="0">
+                <a:solidFill>
+                  <a:srgbClr val="222222"/>
+                </a:solidFill>
+                <a:latin typeface="맑은 고딕"/>
+              </a:rPr>
+              <a:t>•  VALID_NOW: YES 또는 WRONG VALID_ROLE 등</a:t>
+            </a:r>
+          </a:p>
+          <a:p>
+            <a:pPr algn="l">
+              <a:spcAft>
+                <a:spcPts val="1000"/>
+              </a:spcAft>
+            </a:pPr>
+            <a:r>
+              <a:rPr sz="1700" b="0">
+                <a:solidFill>
+                  <a:srgbClr val="222222"/>
+                </a:solidFill>
+                <a:latin typeface="맑은 고딕"/>
+              </a:rPr>
+              <a:t>•  STATUS와 ERROR로 연결 실패 확인</a:t>
+            </a:r>
+          </a:p>
+          <a:p>
+            <a:pPr algn="l">
+              <a:spcAft>
+                <a:spcPts val="1000"/>
+              </a:spcAft>
+            </a:pPr>
+            <a:r>
+              <a:rPr sz="1700" b="0">
+                <a:solidFill>
+                  <a:srgbClr val="222222"/>
+                </a:solidFill>
+                <a:latin typeface="맑은 고딕"/>
+              </a:rPr>
+              <a:t>•  동기화 여부는 V$ARCHIVE_DEST_STATUS</a:t>
             </a:r>
           </a:p>
         </p:txBody>
@@ -9906,7 +10780,7 @@
                 </a:solidFill>
                 <a:latin typeface="맑은 고딕"/>
               </a:rPr>
-              <a:t>상황별 권장 모드</a:t>
+              <a:t>역할 전환을 대비한 대칭 구성</a:t>
             </a:r>
           </a:p>
         </p:txBody>
@@ -9919,8 +10793,8 @@
         </p:nvSpPr>
         <p:spPr>
           <a:xfrm>
-            <a:off x="640080" y="1371600"/>
-            <a:ext cx="10881360" cy="5120640"/>
+            <a:off x="640080" y="1078992"/>
+            <a:ext cx="10881360" cy="457200"/>
           </a:xfrm>
           <a:prstGeom prst="rect">
             <a:avLst/>
@@ -9935,65 +10809,104 @@
           <a:p>
             <a:pPr algn="l">
               <a:spcAft>
-                <a:spcPts val="1000"/>
-              </a:spcAft>
-            </a:pPr>
-            <a:r>
-              <a:rPr sz="1600" b="0">
-                <a:solidFill>
-                  <a:srgbClr val="222222"/>
-                </a:solidFill>
-                <a:latin typeface="맑은 고딕"/>
-              </a:rPr>
-              <a:t>•  일반 업무 시스템, 원거리 DR → Maximum Performance</a:t>
-            </a:r>
-          </a:p>
-          <a:p>
-            <a:pPr algn="l">
-              <a:spcAft>
-                <a:spcPts val="1000"/>
-              </a:spcAft>
-            </a:pPr>
-            <a:r>
-              <a:rPr sz="1600" b="0">
-                <a:solidFill>
-                  <a:srgbClr val="222222"/>
-                </a:solidFill>
-                <a:latin typeface="맑은 고딕"/>
-              </a:rPr>
-              <a:t>•  무손실이 필요하나 정지는 곤란 → Maximum Availability</a:t>
-            </a:r>
-          </a:p>
-          <a:p>
-            <a:pPr algn="l">
-              <a:spcAft>
-                <a:spcPts val="1000"/>
-              </a:spcAft>
-            </a:pPr>
-            <a:r>
-              <a:rPr sz="1600" b="0">
-                <a:solidFill>
-                  <a:srgbClr val="222222"/>
-                </a:solidFill>
-                <a:latin typeface="맑은 고딕"/>
-              </a:rPr>
-              <a:t>•  계약상 무손실 보장 필수 → Maximum Protection (Standby 2대 이상 필수)</a:t>
-            </a:r>
-          </a:p>
-          <a:p>
-            <a:pPr algn="l">
-              <a:spcAft>
-                <a:spcPts val="1000"/>
-              </a:spcAft>
-            </a:pPr>
-            <a:r>
-              <a:rPr sz="1600" b="0">
-                <a:solidFill>
-                  <a:srgbClr val="222222"/>
-                </a:solidFill>
-                <a:latin typeface="맑은 고딕"/>
-              </a:rPr>
-              <a:t>•  원거리인데 무손실 필요 → Far Sync + Maximum Availability (10장)</a:t>
+                <a:spcPts val="600"/>
+              </a:spcAft>
+            </a:pPr>
+            <a:r>
+              <a:rPr sz="1500" b="0">
+                <a:solidFill>
+                  <a:srgbClr val="5A6672"/>
+                </a:solidFill>
+                <a:latin typeface="맑은 고딕"/>
+              </a:rPr>
+              <a:t>거울처럼 같은 모양의 목적지</a:t>
+            </a:r>
+          </a:p>
+        </p:txBody>
+      </p:sp>
+      <p:sp>
+        <p:nvSpPr>
+          <p:cNvPr id="5" name="TextBox 4"/>
+          <p:cNvSpPr txBox="1"/>
+          <p:nvPr/>
+        </p:nvSpPr>
+        <p:spPr>
+          <a:xfrm>
+            <a:off x="640080" y="1737360"/>
+            <a:ext cx="10881360" cy="4754880"/>
+          </a:xfrm>
+          <a:prstGeom prst="rect">
+            <a:avLst/>
+          </a:prstGeom>
+          <a:noFill/>
+        </p:spPr>
+        <p:txBody>
+          <a:bodyPr wrap="square">
+            <a:spAutoFit/>
+          </a:bodyPr>
+          <a:lstStyle/>
+          <a:p>
+            <a:pPr algn="l">
+              <a:spcAft>
+                <a:spcPts val="1000"/>
+              </a:spcAft>
+            </a:pPr>
+            <a:r>
+              <a:rPr sz="1700" b="0">
+                <a:solidFill>
+                  <a:srgbClr val="222222"/>
+                </a:solidFill>
+                <a:latin typeface="맑은 고딕"/>
+              </a:rPr>
+              <a:t>•  양쪽 dest_1: 로컬, ALL_LOGFILES, ALL_ROLES</a:t>
+            </a:r>
+          </a:p>
+          <a:p>
+            <a:pPr algn="l">
+              <a:spcAft>
+                <a:spcPts val="1000"/>
+              </a:spcAft>
+            </a:pPr>
+            <a:r>
+              <a:rPr sz="1700" b="0">
+                <a:solidFill>
+                  <a:srgbClr val="222222"/>
+                </a:solidFill>
+                <a:latin typeface="맑은 고딕"/>
+              </a:rPr>
+              <a:t>•  양쪽 dest_2: 상대 방향, ONLINE_LOGFILES, PRIMARY_ROLE</a:t>
+            </a:r>
+          </a:p>
+          <a:p>
+            <a:pPr algn="l">
+              <a:spcAft>
+                <a:spcPts val="1000"/>
+              </a:spcAft>
+            </a:pPr>
+            <a:r>
+              <a:rPr sz="1700" b="0">
+                <a:solidFill>
+                  <a:srgbClr val="222222"/>
+                </a:solidFill>
+                <a:latin typeface="맑은 고딕"/>
+              </a:rPr>
+              <a:t>•  전송 방식까지 대칭으로 맞춤</a:t>
+            </a:r>
+          </a:p>
+          <a:p>
+            <a:pPr algn="l">
+              <a:spcAft>
+                <a:spcPts val="1000"/>
+              </a:spcAft>
+            </a:pPr>
+            <a:r>
+              <a:rPr sz="1700" b="0">
+                <a:solidFill>
+                  <a:srgbClr val="222222"/>
+                </a:solidFill>
+                <a:latin typeface="맑은 고딕"/>
+              </a:rPr>
+              <a:t>•  비대칭이면 Switchover 후 보호 요건이 깨짐</a:t>
             </a:r>
           </a:p>
         </p:txBody>
@@ -10025,7 +10938,7 @@
         <p:spPr>
           <a:xfrm>
             <a:off x="0" y="0"/>
-            <a:ext cx="12191695" cy="1005840"/>
+            <a:ext cx="12191695" cy="6858000"/>
           </a:xfrm>
           <a:prstGeom prst="rect">
             <a:avLst/>
@@ -10068,8 +10981,8 @@
         </p:nvSpPr>
         <p:spPr>
           <a:xfrm>
-            <a:off x="548640" y="91440"/>
-            <a:ext cx="10972800" cy="777240"/>
+            <a:off x="822960" y="2011680"/>
+            <a:ext cx="10515600" cy="1097280"/>
           </a:xfrm>
           <a:prstGeom prst="rect">
             <a:avLst/>
@@ -10088,13 +11001,13 @@
               </a:spcAft>
             </a:pPr>
             <a:r>
-              <a:rPr sz="2600" b="1">
+              <a:rPr sz="4000" b="1">
                 <a:solidFill>
                   <a:srgbClr val="FFFFFF"/>
                 </a:solidFill>
                 <a:latin typeface="맑은 고딕"/>
               </a:rPr>
-              <a:t>Maximum Protection 도입 전 점검표</a:t>
+              <a:t>2.5</a:t>
             </a:r>
           </a:p>
         </p:txBody>
@@ -10107,8 +11020,8 @@
         </p:nvSpPr>
         <p:spPr>
           <a:xfrm>
-            <a:off x="640080" y="1371600"/>
-            <a:ext cx="10881360" cy="5120640"/>
+            <a:off x="822960" y="3017520"/>
+            <a:ext cx="10515600" cy="914400"/>
           </a:xfrm>
           <a:prstGeom prst="rect">
             <a:avLst/>
@@ -10123,97 +11036,132 @@
           <a:p>
             <a:pPr algn="l">
               <a:spcAft>
-                <a:spcPts val="1000"/>
+                <a:spcPts val="600"/>
+              </a:spcAft>
+            </a:pPr>
+            <a:r>
+              <a:rPr sz="2800" b="1">
+                <a:solidFill>
+                  <a:srgbClr val="FFFFFF"/>
+                </a:solidFill>
+                <a:latin typeface="맑은 고딕"/>
+              </a:rPr>
+              <a:t>세 가지 데이터 보호 모드</a:t>
+            </a:r>
+          </a:p>
+        </p:txBody>
+      </p:sp>
+      <p:sp>
+        <p:nvSpPr>
+          <p:cNvPr id="5" name="Rectangle 4"/>
+          <p:cNvSpPr/>
+          <p:nvPr/>
+        </p:nvSpPr>
+        <p:spPr>
+          <a:xfrm>
+            <a:off x="822960" y="4114800"/>
+            <a:ext cx="5486400" cy="54864"/>
+          </a:xfrm>
+          <a:prstGeom prst="rect">
+            <a:avLst/>
+          </a:prstGeom>
+          <a:solidFill>
+            <a:srgbClr val="FFFFFF"/>
+          </a:solidFill>
+          <a:ln>
+            <a:noFill/>
+          </a:ln>
+          <a:effectLst/>
+        </p:spPr>
+        <p:style>
+          <a:lnRef idx="1">
+            <a:schemeClr val="accent1"/>
+          </a:lnRef>
+          <a:fillRef idx="3">
+            <a:schemeClr val="accent1"/>
+          </a:fillRef>
+          <a:effectRef idx="2">
+            <a:schemeClr val="accent1"/>
+          </a:effectRef>
+          <a:fontRef idx="minor">
+            <a:schemeClr val="lt1"/>
+          </a:fontRef>
+        </p:style>
+        <p:txBody>
+          <a:bodyPr rtlCol="0" anchor="ctr"/>
+          <a:lstStyle/>
+          <a:p>
+            <a:pPr algn="ctr"/>
+          </a:p>
+        </p:txBody>
+      </p:sp>
+      <p:sp>
+        <p:nvSpPr>
+          <p:cNvPr id="6" name="TextBox 5"/>
+          <p:cNvSpPr txBox="1"/>
+          <p:nvPr/>
+        </p:nvSpPr>
+        <p:spPr>
+          <a:xfrm>
+            <a:off x="822960" y="4297680"/>
+            <a:ext cx="10058400" cy="2011680"/>
+          </a:xfrm>
+          <a:prstGeom prst="rect">
+            <a:avLst/>
+          </a:prstGeom>
+          <a:noFill/>
+        </p:spPr>
+        <p:txBody>
+          <a:bodyPr wrap="square">
+            <a:spAutoFit/>
+          </a:bodyPr>
+          <a:lstStyle/>
+          <a:p>
+            <a:pPr algn="l">
+              <a:spcAft>
+                <a:spcPts val="800"/>
               </a:spcAft>
             </a:pPr>
             <a:r>
               <a:rPr sz="1600" b="0">
                 <a:solidFill>
-                  <a:srgbClr val="222222"/>
-                </a:solidFill>
-                <a:latin typeface="맑은 고딕"/>
-              </a:rPr>
-              <a:t>•  Standby가 둘 이상인가 — 하나뿐이면 도입하지 않는다</a:t>
-            </a:r>
-          </a:p>
-          <a:p>
-            <a:pPr algn="l">
-              <a:spcAft>
-                <a:spcPts val="1000"/>
+                  <a:srgbClr val="FFFFFF"/>
+                </a:solidFill>
+                <a:latin typeface="맑은 고딕"/>
+              </a:rPr>
+              <a:t>•  Performance, Availability, Protection</a:t>
+            </a:r>
+          </a:p>
+          <a:p>
+            <a:pPr algn="l">
+              <a:spcAft>
+                <a:spcPts val="800"/>
               </a:spcAft>
             </a:pPr>
             <a:r>
               <a:rPr sz="1600" b="0">
                 <a:solidFill>
-                  <a:srgbClr val="222222"/>
-                </a:solidFill>
-                <a:latin typeface="맑은 고딕"/>
-              </a:rPr>
-              <a:t>•  각 Standby에 SRL이 있고 크기가 온라인 리두와 같은가</a:t>
-            </a:r>
-          </a:p>
-          <a:p>
-            <a:pPr algn="l">
-              <a:spcAft>
-                <a:spcPts val="1000"/>
+                  <a:srgbClr val="FFFFFF"/>
+                </a:solidFill>
+                <a:latin typeface="맑은 고딕"/>
+              </a:rPr>
+              <a:t>•  장애 유형별 결과</a:t>
+            </a:r>
+          </a:p>
+          <a:p>
+            <a:pPr algn="l">
+              <a:spcAft>
+                <a:spcPts val="800"/>
               </a:spcAft>
             </a:pPr>
             <a:r>
               <a:rPr sz="1600" b="0">
                 <a:solidFill>
-                  <a:srgbClr val="222222"/>
-                </a:solidFill>
-                <a:latin typeface="맑은 고딕"/>
-              </a:rPr>
-              <a:t>•  목적지가 SYNC AFFIRM 이고 NET_TIMEOUT 을 회선에 맞게 정했는가</a:t>
-            </a:r>
-          </a:p>
-          <a:p>
-            <a:pPr algn="l">
-              <a:spcAft>
-                <a:spcPts val="1000"/>
-              </a:spcAft>
-            </a:pPr>
-            <a:r>
-              <a:rPr sz="1600" b="0">
-                <a:solidFill>
-                  <a:srgbClr val="222222"/>
-                </a:solidFill>
-                <a:latin typeface="맑은 고딕"/>
-              </a:rPr>
-              <a:t>•  Primary 종료 시 복구 절차가 문서화되어 있고 담당자가 아는가</a:t>
-            </a:r>
-          </a:p>
-          <a:p>
-            <a:pPr algn="l">
-              <a:spcAft>
-                <a:spcPts val="1000"/>
-              </a:spcAft>
-            </a:pPr>
-            <a:r>
-              <a:rPr sz="1600" b="0">
-                <a:solidFill>
-                  <a:srgbClr val="222222"/>
-                </a:solidFill>
-                <a:latin typeface="맑은 고딕"/>
-              </a:rPr>
-              <a:t>•  보호 수준을 낮추는 결정을 누가 내릴지 정해져 있는가</a:t>
-            </a:r>
-          </a:p>
-          <a:p>
-            <a:pPr algn="l">
-              <a:spcAft>
-                <a:spcPts val="1000"/>
-              </a:spcAft>
-            </a:pPr>
-            <a:r>
-              <a:rPr sz="1600" b="0">
-                <a:solidFill>
-                  <a:srgbClr val="222222"/>
-                </a:solidFill>
-                <a:latin typeface="맑은 고딕"/>
-              </a:rPr>
-              <a:t>•  PROTECTION_LEVEL 모니터링이 걸려 있는가</a:t>
+                  <a:srgbClr val="FFFFFF"/>
+                </a:solidFill>
+                <a:latin typeface="맑은 고딕"/>
+              </a:rPr>
+              <a:t>•  PROTECTION_MODE와 PROTECTION_LEVEL</a:t>
             </a:r>
           </a:p>
         </p:txBody>
@@ -10245,7 +11193,7 @@
         <p:spPr>
           <a:xfrm>
             <a:off x="0" y="0"/>
-            <a:ext cx="12191695" cy="6858000"/>
+            <a:ext cx="12191695" cy="1005840"/>
           </a:xfrm>
           <a:prstGeom prst="rect">
             <a:avLst/>
@@ -10288,8 +11236,8 @@
         </p:nvSpPr>
         <p:spPr>
           <a:xfrm>
-            <a:off x="822960" y="2011680"/>
-            <a:ext cx="10515600" cy="1097280"/>
+            <a:off x="548640" y="91440"/>
+            <a:ext cx="10972800" cy="777240"/>
           </a:xfrm>
           <a:prstGeom prst="rect">
             <a:avLst/>
@@ -10308,13 +11256,13 @@
               </a:spcAft>
             </a:pPr>
             <a:r>
-              <a:rPr sz="4000" b="1">
+              <a:rPr sz="2600" b="1">
                 <a:solidFill>
                   <a:srgbClr val="FFFFFF"/>
                 </a:solidFill>
                 <a:latin typeface="맑은 고딕"/>
               </a:rPr>
-              <a:t>2.7</a:t>
+              <a:t>Maximum Performance</a:t>
             </a:r>
           </a:p>
         </p:txBody>
@@ -10327,8 +11275,8 @@
         </p:nvSpPr>
         <p:spPr>
           <a:xfrm>
-            <a:off x="822960" y="3017520"/>
-            <a:ext cx="10515600" cy="914400"/>
+            <a:off x="640080" y="1078992"/>
+            <a:ext cx="10881360" cy="457200"/>
           </a:xfrm>
           <a:prstGeom prst="rect">
             <a:avLst/>
@@ -10347,71 +11295,27 @@
               </a:spcAft>
             </a:pPr>
             <a:r>
-              <a:rPr sz="2800" b="1">
-                <a:solidFill>
-                  <a:srgbClr val="FFFFFF"/>
-                </a:solidFill>
-                <a:latin typeface="맑은 고딕"/>
-              </a:rPr>
-              <a:t>Broker를 쓸 때의 차이</a:t>
-            </a:r>
-          </a:p>
-        </p:txBody>
-      </p:sp>
-      <p:sp>
-        <p:nvSpPr>
-          <p:cNvPr id="5" name="Rectangle 4"/>
-          <p:cNvSpPr/>
-          <p:nvPr/>
-        </p:nvSpPr>
-        <p:spPr>
-          <a:xfrm>
-            <a:off x="822960" y="4114800"/>
-            <a:ext cx="5486400" cy="54864"/>
-          </a:xfrm>
-          <a:prstGeom prst="rect">
-            <a:avLst/>
-          </a:prstGeom>
-          <a:solidFill>
-            <a:srgbClr val="FFFFFF"/>
-          </a:solidFill>
-          <a:ln>
-            <a:noFill/>
-          </a:ln>
-          <a:effectLst/>
-        </p:spPr>
-        <p:style>
-          <a:lnRef idx="1">
-            <a:schemeClr val="accent1"/>
-          </a:lnRef>
-          <a:fillRef idx="3">
-            <a:schemeClr val="accent1"/>
-          </a:fillRef>
-          <a:effectRef idx="2">
-            <a:schemeClr val="accent1"/>
-          </a:effectRef>
-          <a:fontRef idx="minor">
-            <a:schemeClr val="lt1"/>
-          </a:fontRef>
-        </p:style>
-        <p:txBody>
-          <a:bodyPr rtlCol="0" anchor="ctr"/>
-          <a:lstStyle/>
-          <a:p>
-            <a:pPr algn="ctr"/>
-          </a:p>
-        </p:txBody>
-      </p:sp>
-      <p:sp>
-        <p:nvSpPr>
-          <p:cNvPr id="6" name="TextBox 5"/>
+              <a:rPr sz="1500" b="0">
+                <a:solidFill>
+                  <a:srgbClr val="5A6672"/>
+                </a:solidFill>
+                <a:latin typeface="맑은 고딕"/>
+              </a:rPr>
+              <a:t>기본 모드, Primary 성능 우선</a:t>
+            </a:r>
+          </a:p>
+        </p:txBody>
+      </p:sp>
+      <p:sp>
+        <p:nvSpPr>
+          <p:cNvPr id="5" name="TextBox 4"/>
           <p:cNvSpPr txBox="1"/>
           <p:nvPr/>
         </p:nvSpPr>
         <p:spPr>
           <a:xfrm>
-            <a:off x="822960" y="4297680"/>
-            <a:ext cx="10058400" cy="2011680"/>
+            <a:off x="640080" y="1737360"/>
+            <a:ext cx="10881360" cy="4754880"/>
           </a:xfrm>
           <a:prstGeom prst="rect">
             <a:avLst/>
@@ -10426,49 +11330,65 @@
           <a:p>
             <a:pPr algn="l">
               <a:spcAft>
-                <a:spcPts val="800"/>
-              </a:spcAft>
-            </a:pPr>
-            <a:r>
-              <a:rPr sz="1600" b="0">
-                <a:solidFill>
-                  <a:srgbClr val="FFFFFF"/>
-                </a:solidFill>
-                <a:latin typeface="맑은 고딕"/>
-              </a:rPr>
-              <a:t>•  명령이 바뀐다</a:t>
-            </a:r>
-          </a:p>
-          <a:p>
-            <a:pPr algn="l">
-              <a:spcAft>
-                <a:spcPts val="800"/>
-              </a:spcAft>
-            </a:pPr>
-            <a:r>
-              <a:rPr sz="1600" b="0">
-                <a:solidFill>
-                  <a:srgbClr val="FFFFFF"/>
-                </a:solidFill>
-                <a:latin typeface="맑은 고딕"/>
-              </a:rPr>
-              <a:t>•  파라미터를 손으로 고치면 안 된다</a:t>
-            </a:r>
-          </a:p>
-          <a:p>
-            <a:pPr algn="l">
-              <a:spcAft>
-                <a:spcPts val="800"/>
-              </a:spcAft>
-            </a:pPr>
-            <a:r>
-              <a:rPr sz="1600" b="0">
-                <a:solidFill>
-                  <a:srgbClr val="FFFFFF"/>
-                </a:solidFill>
-                <a:latin typeface="맑은 고딕"/>
-              </a:rPr>
-              <a:t>•  그래도 SQL로 먼저 배우는 이유</a:t>
+                <a:spcPts val="1000"/>
+              </a:spcAft>
+            </a:pPr>
+            <a:r>
+              <a:rPr sz="1700" b="0">
+                <a:solidFill>
+                  <a:srgbClr val="222222"/>
+                </a:solidFill>
+                <a:latin typeface="맑은 고딕"/>
+              </a:rPr>
+              <a:t>•  로컬 기록 즉시 커밋</a:t>
+            </a:r>
+          </a:p>
+          <a:p>
+            <a:pPr algn="l">
+              <a:spcAft>
+                <a:spcPts val="1000"/>
+              </a:spcAft>
+            </a:pPr>
+            <a:r>
+              <a:rPr sz="1700" b="0">
+                <a:solidFill>
+                  <a:srgbClr val="222222"/>
+                </a:solidFill>
+                <a:latin typeface="맑은 고딕"/>
+              </a:rPr>
+              <a:t>•  Standby로는 비동기 전송</a:t>
+            </a:r>
+          </a:p>
+          <a:p>
+            <a:pPr algn="l">
+              <a:spcAft>
+                <a:spcPts val="1000"/>
+              </a:spcAft>
+            </a:pPr>
+            <a:r>
+              <a:rPr sz="1700" b="0">
+                <a:solidFill>
+                  <a:srgbClr val="222222"/>
+                </a:solidFill>
+                <a:latin typeface="맑은 고딕"/>
+              </a:rPr>
+              <a:t>•  손실 가능 범위 = transport lag</a:t>
+            </a:r>
+          </a:p>
+          <a:p>
+            <a:pPr algn="l">
+              <a:spcAft>
+                <a:spcPts val="1000"/>
+              </a:spcAft>
+            </a:pPr>
+            <a:r>
+              <a:rPr sz="1700" b="0">
+                <a:solidFill>
+                  <a:srgbClr val="222222"/>
+                </a:solidFill>
+                <a:latin typeface="맑은 고딕"/>
+              </a:rPr>
+              <a:t>•  요건: SRL, ASYNC 목적지 하나 이상</a:t>
             </a:r>
           </a:p>
         </p:txBody>
@@ -10569,7 +11489,7 @@
                 </a:solidFill>
                 <a:latin typeface="맑은 고딕"/>
               </a:rPr>
-              <a:t>이 장의 구성 (Agenda)</a:t>
+              <a:t>Agenda</a:t>
             </a:r>
           </a:p>
         </p:txBody>
@@ -10624,7 +11544,7 @@
                 </a:solidFill>
                 <a:latin typeface="맑은 고딕"/>
               </a:rPr>
-              <a:t>•  2.3  세 가지 데이터 보호 모드</a:t>
+              <a:t>•  2.3  전송 방식과 확인 응답</a:t>
             </a:r>
           </a:p>
           <a:p>
@@ -10640,7 +11560,7 @@
                 </a:solidFill>
                 <a:latin typeface="맑은 고딕"/>
               </a:rPr>
-              <a:t>•  2.4  Standby를 잃었을 때 각 모드는 어떻게 다른가</a:t>
+              <a:t>•  2.4  LOG_ARCHIVE_DEST_n 주요 속성</a:t>
             </a:r>
           </a:p>
           <a:p>
@@ -10656,7 +11576,7 @@
                 </a:solidFill>
                 <a:latin typeface="맑은 고딕"/>
               </a:rPr>
-              <a:t>•  2.5  전송 방식과 성능의 맞바꿈</a:t>
+              <a:t>•  2.5  세 가지 데이터 보호 모드</a:t>
             </a:r>
           </a:p>
           <a:p>
@@ -10672,7 +11592,7 @@
                 </a:solidFill>
                 <a:latin typeface="맑은 고딕"/>
               </a:rPr>
-              <a:t>•  2.6  어떤 모드를 고를 것인가</a:t>
+              <a:t>•  2.6  보호 모드 설정과 전환</a:t>
             </a:r>
           </a:p>
           <a:p>
@@ -10688,7 +11608,7 @@
                 </a:solidFill>
                 <a:latin typeface="맑은 고딕"/>
               </a:rPr>
-              <a:t>•  2.7  Broker를 쓸 때의 차이 (예고)</a:t>
+              <a:t>•  2.7  보호 모드 선택 기준  /  2.8  운영 시 주의점</a:t>
             </a:r>
           </a:p>
         </p:txBody>
@@ -10789,7 +11709,7 @@
                 </a:solidFill>
                 <a:latin typeface="맑은 고딕"/>
               </a:rPr>
-              <a:t>Broker 환경에서는 무엇이 달라지나 (13장 예고)</a:t>
+              <a:t>Maximum Availability</a:t>
             </a:r>
           </a:p>
         </p:txBody>
@@ -10802,8 +11722,8 @@
         </p:nvSpPr>
         <p:spPr>
           <a:xfrm>
-            <a:off x="640080" y="1371600"/>
-            <a:ext cx="10881360" cy="5120640"/>
+            <a:off x="640080" y="1078992"/>
+            <a:ext cx="10881360" cy="457200"/>
           </a:xfrm>
           <a:prstGeom prst="rect">
             <a:avLst/>
@@ -10818,81 +11738,120 @@
           <a:p>
             <a:pPr algn="l">
               <a:spcAft>
-                <a:spcPts val="1000"/>
-              </a:spcAft>
-            </a:pPr>
-            <a:r>
-              <a:rPr sz="1600" b="0">
-                <a:solidFill>
-                  <a:srgbClr val="222222"/>
-                </a:solidFill>
-                <a:latin typeface="맑은 고딕"/>
-              </a:rPr>
-              <a:t>•  모드 전환 : EDIT CONFIGURATION SET PROTECTION MODE AS MAXAVAILABILITY</a:t>
-            </a:r>
-          </a:p>
-          <a:p>
-            <a:pPr algn="l">
-              <a:spcAft>
-                <a:spcPts val="1000"/>
-              </a:spcAft>
-            </a:pPr>
-            <a:r>
-              <a:rPr sz="1600" b="0">
-                <a:solidFill>
-                  <a:srgbClr val="222222"/>
-                </a:solidFill>
-                <a:latin typeface="맑은 고딕"/>
-              </a:rPr>
-              <a:t>•  전송 방식 : EDIT DATABASE boston SET PROPERTY LogXptMode='SYNC'</a:t>
-            </a:r>
-          </a:p>
-          <a:p>
-            <a:pPr algn="l">
-              <a:spcAft>
-                <a:spcPts val="1000"/>
-              </a:spcAft>
-            </a:pPr>
-            <a:r>
-              <a:rPr sz="1600" b="0">
-                <a:solidFill>
-                  <a:srgbClr val="222222"/>
-                </a:solidFill>
-                <a:latin typeface="맑은 고딕"/>
-              </a:rPr>
-              <a:t>•  LOG_ARCHIVE_DEST_n 을 손으로 고치면 Broker가 되돌리거나 경고한다</a:t>
-            </a:r>
-          </a:p>
-          <a:p>
-            <a:pPr algn="l">
-              <a:spcAft>
-                <a:spcPts val="1000"/>
-              </a:spcAft>
-            </a:pPr>
-            <a:r>
-              <a:rPr sz="1600" b="0">
-                <a:solidFill>
-                  <a:srgbClr val="222222"/>
-                </a:solidFill>
-                <a:latin typeface="맑은 고딕"/>
-              </a:rPr>
-              <a:t>•  SHOW CONFIGURATION 이 구성 전체 상태를, VALIDATE DATABASE 가 요건을 알려 준다</a:t>
-            </a:r>
-          </a:p>
-          <a:p>
-            <a:pPr algn="l">
-              <a:spcAft>
-                <a:spcPts val="1000"/>
-              </a:spcAft>
-            </a:pPr>
-            <a:r>
-              <a:rPr sz="1600" b="0">
-                <a:solidFill>
-                  <a:srgbClr val="222222"/>
-                </a:solidFill>
-                <a:latin typeface="맑은 고딕"/>
-              </a:rPr>
-              <a:t>•  그래도 SQL로 먼저 배우는 이유 : Broker가 감춘 것을 알아야 진단이 된다</a:t>
+                <a:spcPts val="600"/>
+              </a:spcAft>
+            </a:pPr>
+            <a:r>
+              <a:rPr sz="1500" b="0">
+                <a:solidFill>
+                  <a:srgbClr val="5A6672"/>
+                </a:solidFill>
+                <a:latin typeface="맑은 고딕"/>
+              </a:rPr>
+              <a:t>가용성을 해치지 않는 최고 보호</a:t>
+            </a:r>
+          </a:p>
+        </p:txBody>
+      </p:sp>
+      <p:sp>
+        <p:nvSpPr>
+          <p:cNvPr id="5" name="TextBox 4"/>
+          <p:cNvSpPr txBox="1"/>
+          <p:nvPr/>
+        </p:nvSpPr>
+        <p:spPr>
+          <a:xfrm>
+            <a:off x="640080" y="1737360"/>
+            <a:ext cx="10881360" cy="4754880"/>
+          </a:xfrm>
+          <a:prstGeom prst="rect">
+            <a:avLst/>
+          </a:prstGeom>
+          <a:noFill/>
+        </p:spPr>
+        <p:txBody>
+          <a:bodyPr wrap="square">
+            <a:spAutoFit/>
+          </a:bodyPr>
+          <a:lstStyle/>
+          <a:p>
+            <a:pPr algn="l">
+              <a:spcAft>
+                <a:spcPts val="1000"/>
+              </a:spcAft>
+            </a:pPr>
+            <a:r>
+              <a:rPr sz="1700" b="0">
+                <a:solidFill>
+                  <a:srgbClr val="222222"/>
+                </a:solidFill>
+                <a:latin typeface="맑은 고딕"/>
+              </a:rPr>
+              <a:t>•  로컬 기록 + Standby 확인 후 커밋</a:t>
+            </a:r>
+          </a:p>
+          <a:p>
+            <a:pPr algn="l">
+              <a:spcAft>
+                <a:spcPts val="1000"/>
+              </a:spcAft>
+            </a:pPr>
+            <a:r>
+              <a:rPr sz="1700" b="0">
+                <a:solidFill>
+                  <a:srgbClr val="222222"/>
+                </a:solidFill>
+                <a:latin typeface="맑은 고딕"/>
+              </a:rPr>
+              <a:t>•  응답 없으면 NET_TIMEOUT 후 계속 진행</a:t>
+            </a:r>
+          </a:p>
+          <a:p>
+            <a:pPr algn="l">
+              <a:spcAft>
+                <a:spcPts val="1000"/>
+              </a:spcAft>
+            </a:pPr>
+            <a:r>
+              <a:rPr sz="1700" b="0">
+                <a:solidFill>
+                  <a:srgbClr val="222222"/>
+                </a:solidFill>
+                <a:latin typeface="맑은 고딕"/>
+              </a:rPr>
+              <a:t>•  동기화 Standby가 없으면 비동기화 상태로 운영</a:t>
+            </a:r>
+          </a:p>
+          <a:p>
+            <a:pPr algn="l">
+              <a:spcAft>
+                <a:spcPts val="1000"/>
+              </a:spcAft>
+            </a:pPr>
+            <a:r>
+              <a:rPr sz="1700" b="0">
+                <a:solidFill>
+                  <a:srgbClr val="222222"/>
+                </a:solidFill>
+                <a:latin typeface="맑은 고딕"/>
+              </a:rPr>
+              <a:t>•  갭 해소 후 자동으로 원래 수준 복귀</a:t>
+            </a:r>
+          </a:p>
+          <a:p>
+            <a:pPr algn="l">
+              <a:spcAft>
+                <a:spcPts val="1000"/>
+              </a:spcAft>
+            </a:pPr>
+            <a:r>
+              <a:rPr sz="1700" b="0">
+                <a:solidFill>
+                  <a:srgbClr val="222222"/>
+                </a:solidFill>
+                <a:latin typeface="맑은 고딕"/>
+              </a:rPr>
+              <a:t>•  요건: SRL, SYNC(또는 FASTSYNC) 목적지</a:t>
             </a:r>
           </a:p>
         </p:txBody>
@@ -10993,7 +11952,7 @@
                 </a:solidFill>
                 <a:latin typeface="맑은 고딕"/>
               </a:rPr>
-              <a:t>LOG_ARCHIVE_DEST_STATE_n</a:t>
+              <a:t>Maximum Protection</a:t>
             </a:r>
           </a:p>
         </p:txBody>
@@ -11032,7 +11991,7 @@
                 </a:solidFill>
                 <a:latin typeface="맑은 고딕"/>
               </a:rPr>
-              <a:t>목적지를 켜고 끄는 스위치</a:t>
+              <a:t>무손실을 위해 서비스를 포기한다</a:t>
             </a:r>
           </a:p>
         </p:txBody>
@@ -11071,7 +12030,7 @@
                 </a:solidFill>
                 <a:latin typeface="맑은 고딕"/>
               </a:rPr>
-              <a:t>•  ENABLE — 목적지를 사용한다 (기본값)</a:t>
+              <a:t>•  로컬 기록 + Standby SRL 기록 후 커밋</a:t>
             </a:r>
           </a:p>
           <a:p>
@@ -11087,7 +12046,7 @@
                 </a:solidFill>
                 <a:latin typeface="맑은 고딕"/>
               </a:rPr>
-              <a:t>•  DEFER — 사람이 명시적으로 끈다. V$ARCHIVE_DEST_STATUS 의 STATUS 가 DEFERRED</a:t>
+              <a:t>•  동기화 Standby가 없으면 Primary 인스턴스 종료</a:t>
             </a:r>
           </a:p>
           <a:p>
@@ -11103,7 +12062,7 @@
                 </a:solidFill>
                 <a:latin typeface="맑은 고딕"/>
               </a:rPr>
-              <a:t>•  ALTERNATE — 다른 목적지가 실패했을 때만 쓴다</a:t>
+              <a:t>•  마지막 동기 Standby의 정상 종료는 거부(ORA-01154)</a:t>
             </a:r>
           </a:p>
           <a:p>
@@ -11119,7 +12078,7 @@
                 </a:solidFill>
                 <a:latin typeface="맑은 고딕"/>
               </a:rPr>
-              <a:t>•  RESET — 설정을 초기화한다</a:t>
+              <a:t>•  Standby 2개 이상 권장, Far Sync 미지원</a:t>
             </a:r>
           </a:p>
           <a:p>
@@ -11135,7 +12094,7 @@
                 </a:solidFill>
                 <a:latin typeface="맑은 고딕"/>
               </a:rPr>
-              <a:t>•  실습 환경: LOG_ARCHIVE_DEST_STATE_2 = ENABLE</a:t>
+              <a:t>•  요건: SRL, SYNC AFFIRM 목적지</a:t>
             </a:r>
           </a:p>
         </p:txBody>
@@ -11236,7 +12195,7 @@
                 </a:solidFill>
                 <a:latin typeface="맑은 고딕"/>
               </a:rPr>
-              <a:t>압축과 대역폭</a:t>
+              <a:t>세 모드 비교</a:t>
             </a:r>
           </a:p>
         </p:txBody>
@@ -11275,7 +12234,7 @@
                 </a:solidFill>
                 <a:latin typeface="맑은 고딕"/>
               </a:rPr>
-              <a:t>원거리 구성에서 고려할 것</a:t>
+              <a:t>위로 갈수록 Primary가 Standby에 묶인다</a:t>
             </a:r>
           </a:p>
         </p:txBody>
@@ -11314,7 +12273,7 @@
                 </a:solidFill>
                 <a:latin typeface="맑은 고딕"/>
               </a:rPr>
-              <a:t>•  COMPRESSION=ENABLE 로 리두를 압축해 전송한다</a:t>
+              <a:t>•  손실: 없음(이중 장애) / 없음(단일 장애) / lag만큼</a:t>
             </a:r>
           </a:p>
           <a:p>
@@ -11330,7 +12289,7 @@
                 </a:solidFill>
                 <a:latin typeface="맑은 고딕"/>
               </a:rPr>
-              <a:t>•  Advanced Compression 옵션 라이선스가 필요하다</a:t>
+              <a:t>•  전송: SYNC AFFIRM / SYNC / ASYNC</a:t>
             </a:r>
           </a:p>
           <a:p>
@@ -11346,7 +12305,7 @@
                 </a:solidFill>
                 <a:latin typeface="맑은 고딕"/>
               </a:rPr>
-              <a:t>•  효과는 리두의 성질에 달려 있다 — 반복이 많은 워크로드일수록 유리</a:t>
+              <a:t>•  확인 없을 때: 종료 / NET_TIMEOUT 후 진행 / 무관</a:t>
             </a:r>
           </a:p>
           <a:p>
@@ -11362,23 +12321,7 @@
                 </a:solidFill>
                 <a:latin typeface="맑은 고딕"/>
               </a:rPr>
-              <a:t>•  CPU를 쓰는 대신 대역폭을 아끼는 맞바꿈</a:t>
-            </a:r>
-          </a:p>
-          <a:p>
-            <a:pPr algn="l">
-              <a:spcAft>
-                <a:spcPts val="1000"/>
-              </a:spcAft>
-            </a:pPr>
-            <a:r>
-              <a:rPr sz="1700" b="0">
-                <a:solidFill>
-                  <a:srgbClr val="222222"/>
-                </a:solidFill>
-                <a:latin typeface="맑은 고딕"/>
-              </a:rPr>
-              <a:t>•  갭 해소 시 대량 전송에서 특히 효과가 크다</a:t>
+              <a:t>•  성능 영향: 가장 큼 / 중간 / 거의 없음</a:t>
             </a:r>
           </a:p>
         </p:txBody>
@@ -11479,7 +12422,7 @@
                 </a:solidFill>
                 <a:latin typeface="맑은 고딕"/>
               </a:rPr>
-              <a:t>이 장에서 얻어 갈 세 가지 습관</a:t>
+              <a:t>장애 유형별 결과</a:t>
             </a:r>
           </a:p>
         </p:txBody>
@@ -11492,8 +12435,8 @@
         </p:nvSpPr>
         <p:spPr>
           <a:xfrm>
-            <a:off x="640080" y="1371600"/>
-            <a:ext cx="10881360" cy="5120640"/>
+            <a:off x="640080" y="1078992"/>
+            <a:ext cx="10881360" cy="457200"/>
           </a:xfrm>
           <a:prstGeom prst="rect">
             <a:avLst/>
@@ -11508,65 +12451,104 @@
           <a:p>
             <a:pPr algn="l">
               <a:spcAft>
-                <a:spcPts val="1000"/>
-              </a:spcAft>
-            </a:pPr>
-            <a:r>
-              <a:rPr sz="1600" b="0">
-                <a:solidFill>
-                  <a:srgbClr val="222222"/>
-                </a:solidFill>
-                <a:latin typeface="맑은 고딕"/>
-              </a:rPr>
-              <a:t>•  ① 파라미터 문자열이 아니라 V$ARCHIVE_DEST 의 열로 확인한다</a:t>
-            </a:r>
-          </a:p>
-          <a:p>
-            <a:pPr algn="l">
-              <a:spcAft>
-                <a:spcPts val="1000"/>
-              </a:spcAft>
-            </a:pPr>
-            <a:r>
-              <a:rPr sz="1600" b="0">
-                <a:solidFill>
-                  <a:srgbClr val="222222"/>
-                </a:solidFill>
-                <a:latin typeface="맑은 고딕"/>
-              </a:rPr>
-              <a:t>•  ② 명령 성공으로 끝내지 않고 PROTECTION_LEVEL 을 확인한다</a:t>
-            </a:r>
-          </a:p>
-          <a:p>
-            <a:pPr algn="l">
-              <a:spcAft>
-                <a:spcPts val="1000"/>
-              </a:spcAft>
-            </a:pPr>
-            <a:r>
-              <a:rPr sz="1600" b="0">
-                <a:solidFill>
-                  <a:srgbClr val="222222"/>
-                </a:solidFill>
-                <a:latin typeface="맑은 고딕"/>
-              </a:rPr>
-              <a:t>•  ③ 오류 번호의 문면을 그대로 믿지 않고 요건부터 확인한다</a:t>
-            </a:r>
-          </a:p>
-          <a:p>
-            <a:pPr algn="l">
-              <a:spcAft>
-                <a:spcPts val="1000"/>
-              </a:spcAft>
-            </a:pPr>
-            <a:r>
-              <a:rPr sz="1600" b="0">
-                <a:solidFill>
-                  <a:srgbClr val="222222"/>
-                </a:solidFill>
-                <a:latin typeface="맑은 고딕"/>
-              </a:rPr>
-              <a:t>•  세 습관 모두 "보이는 것"과 "실제"가 다를 수 있다는 같은 원칙에서 나온다</a:t>
+                <a:spcPts val="600"/>
+              </a:spcAft>
+            </a:pPr>
+            <a:r>
+              <a:rPr sz="1500" b="0">
+                <a:solidFill>
+                  <a:srgbClr val="5A6672"/>
+                </a:solidFill>
+                <a:latin typeface="맑은 고딕"/>
+              </a:rPr>
+              <a:t>Standby 하나인 구성 기준</a:t>
+            </a:r>
+          </a:p>
+        </p:txBody>
+      </p:sp>
+      <p:sp>
+        <p:nvSpPr>
+          <p:cNvPr id="5" name="TextBox 4"/>
+          <p:cNvSpPr txBox="1"/>
+          <p:nvPr/>
+        </p:nvSpPr>
+        <p:spPr>
+          <a:xfrm>
+            <a:off x="640080" y="1737360"/>
+            <a:ext cx="10881360" cy="4754880"/>
+          </a:xfrm>
+          <a:prstGeom prst="rect">
+            <a:avLst/>
+          </a:prstGeom>
+          <a:noFill/>
+        </p:spPr>
+        <p:txBody>
+          <a:bodyPr wrap="square">
+            <a:spAutoFit/>
+          </a:bodyPr>
+          <a:lstStyle/>
+          <a:p>
+            <a:pPr algn="l">
+              <a:spcAft>
+                <a:spcPts val="1000"/>
+              </a:spcAft>
+            </a:pPr>
+            <a:r>
+              <a:rPr sz="1700" b="0">
+                <a:solidFill>
+                  <a:srgbClr val="222222"/>
+                </a:solidFill>
+                <a:latin typeface="맑은 고딕"/>
+              </a:rPr>
+              <a:t>•  Primary만 장애: Protection·Availability 무손실</a:t>
+            </a:r>
+          </a:p>
+          <a:p>
+            <a:pPr algn="l">
+              <a:spcAft>
+                <a:spcPts val="1000"/>
+              </a:spcAft>
+            </a:pPr>
+            <a:r>
+              <a:rPr sz="1700" b="0">
+                <a:solidFill>
+                  <a:srgbClr val="222222"/>
+                </a:solidFill>
+                <a:latin typeface="맑은 고딕"/>
+              </a:rPr>
+              <a:t>•  Standby만 장애: Protection은 Primary 종료</a:t>
+            </a:r>
+          </a:p>
+          <a:p>
+            <a:pPr algn="l">
+              <a:spcAft>
+                <a:spcPts val="1000"/>
+              </a:spcAft>
+            </a:pPr>
+            <a:r>
+              <a:rPr sz="1700" b="0">
+                <a:solidFill>
+                  <a:srgbClr val="222222"/>
+                </a:solidFill>
+                <a:latin typeface="맑은 고딕"/>
+              </a:rPr>
+              <a:t>•  네트워크 단절: Availability는 보호 수준 하락</a:t>
+            </a:r>
+          </a:p>
+          <a:p>
+            <a:pPr algn="l">
+              <a:spcAft>
+                <a:spcPts val="1000"/>
+              </a:spcAft>
+            </a:pPr>
+            <a:r>
+              <a:rPr sz="1700" b="0">
+                <a:solidFill>
+                  <a:srgbClr val="222222"/>
+                </a:solidFill>
+                <a:latin typeface="맑은 고딕"/>
+              </a:rPr>
+              <a:t>•  단절 후 Primary 장애: 단절 이후 리두 손실</a:t>
             </a:r>
           </a:p>
         </p:txBody>
@@ -11667,7 +12649,7 @@
                 </a:solidFill>
                 <a:latin typeface="맑은 고딕"/>
               </a:rPr>
-              <a:t>퀴즈 (Quiz)</a:t>
+              <a:t>PROTECTION_MODE와 PROTECTION_LEVEL</a:t>
             </a:r>
           </a:p>
         </p:txBody>
@@ -11680,8 +12662,8 @@
         </p:nvSpPr>
         <p:spPr>
           <a:xfrm>
-            <a:off x="640080" y="1371600"/>
-            <a:ext cx="10881360" cy="5120640"/>
+            <a:off x="640080" y="1078992"/>
+            <a:ext cx="10881360" cy="457200"/>
           </a:xfrm>
           <a:prstGeom prst="rect">
             <a:avLst/>
@@ -11696,97 +12678,104 @@
           <a:p>
             <a:pPr algn="l">
               <a:spcAft>
-                <a:spcPts val="1000"/>
-              </a:spcAft>
-            </a:pPr>
-            <a:r>
-              <a:rPr sz="1600" b="0">
-                <a:solidFill>
-                  <a:srgbClr val="222222"/>
-                </a:solidFill>
-                <a:latin typeface="맑은 고딕"/>
-              </a:rPr>
-              <a:t>•  Q1. PROTECTION_MODE가 MAXIMUM AVAILABILITY인데 LEVEL이 RESYNCHRONIZATION이다. 무엇을 확인해야 하는가?</a:t>
-            </a:r>
-          </a:p>
-          <a:p>
-            <a:pPr algn="l">
-              <a:spcAft>
-                <a:spcPts val="1000"/>
-              </a:spcAft>
-            </a:pPr>
-            <a:r>
-              <a:rPr sz="1600" b="0">
-                <a:solidFill>
-                  <a:srgbClr val="222222"/>
-                </a:solidFill>
-                <a:latin typeface="맑은 고딕"/>
-              </a:rPr>
-              <a:t>•  Q2. VALID_NOW가 WRONG VALID_ROLE이다. 어떤 설정이 잘못됐고 증상은 어떻게 나타나는가?</a:t>
-            </a:r>
-          </a:p>
-          <a:p>
-            <a:pPr algn="l">
-              <a:spcAft>
-                <a:spcPts val="1000"/>
-              </a:spcAft>
-            </a:pPr>
-            <a:r>
-              <a:rPr sz="1600" b="0">
-                <a:solidFill>
-                  <a:srgbClr val="222222"/>
-                </a:solidFill>
-                <a:latin typeface="맑은 고딕"/>
-              </a:rPr>
-              <a:t>•  Q3. TRANSMIT_MODE가 PARALLELSYNC이고 AFFIRM이 YES라면 어떤 설정인가? 새로 뜨는 프로세스는?</a:t>
-            </a:r>
-          </a:p>
-          <a:p>
-            <a:pPr algn="l">
-              <a:spcAft>
-                <a:spcPts val="1000"/>
-              </a:spcAft>
-            </a:pPr>
-            <a:r>
-              <a:rPr sz="1600" b="0">
-                <a:solidFill>
-                  <a:srgbClr val="222222"/>
-                </a:solidFill>
-                <a:latin typeface="맑은 고딕"/>
-              </a:rPr>
-              <a:t>•  Q4. Performance에서 Protection으로 곧바로 전환하면 어떤 오류가 나며, 문면을 그대로 믿으면 안 되는 이유는?</a:t>
-            </a:r>
-          </a:p>
-          <a:p>
-            <a:pPr algn="l">
-              <a:spcAft>
-                <a:spcPts val="1000"/>
-              </a:spcAft>
-            </a:pPr>
-            <a:r>
-              <a:rPr sz="1600" b="0">
-                <a:solidFill>
-                  <a:srgbClr val="222222"/>
-                </a:solidFill>
-                <a:latin typeface="맑은 고딕"/>
-              </a:rPr>
-              <a:t>•  Q5. Maximum Protection에서 Standby에 SHUTDOWN IMMEDIATE를 실행하면 어떤 오류가 나는가? 왜 그런가?</a:t>
-            </a:r>
-          </a:p>
-          <a:p>
-            <a:pPr algn="l">
-              <a:spcAft>
-                <a:spcPts val="1000"/>
-              </a:spcAft>
-            </a:pPr>
-            <a:r>
-              <a:rPr sz="1600" b="0">
-                <a:solidFill>
-                  <a:srgbClr val="222222"/>
-                </a:solidFill>
-                <a:latin typeface="맑은 고딕"/>
-              </a:rPr>
-              <a:t>•  Q6. Maximum Protection에서 Standby를 강제 종료했을 때 Primary 알림 로그의 핵심 두 줄과 이후 복구 순서는?</a:t>
+                <a:spcPts val="600"/>
+              </a:spcAft>
+            </a:pPr>
+            <a:r>
+              <a:rPr sz="1500" b="0">
+                <a:solidFill>
+                  <a:srgbClr val="5A6672"/>
+                </a:solidFill>
+                <a:latin typeface="맑은 고딕"/>
+              </a:rPr>
+              <a:t>설정값과 실제 달성 수준</a:t>
+            </a:r>
+          </a:p>
+        </p:txBody>
+      </p:sp>
+      <p:sp>
+        <p:nvSpPr>
+          <p:cNvPr id="5" name="TextBox 4"/>
+          <p:cNvSpPr txBox="1"/>
+          <p:nvPr/>
+        </p:nvSpPr>
+        <p:spPr>
+          <a:xfrm>
+            <a:off x="640080" y="1737360"/>
+            <a:ext cx="10881360" cy="4754880"/>
+          </a:xfrm>
+          <a:prstGeom prst="rect">
+            <a:avLst/>
+          </a:prstGeom>
+          <a:noFill/>
+        </p:spPr>
+        <p:txBody>
+          <a:bodyPr wrap="square">
+            <a:spAutoFit/>
+          </a:bodyPr>
+          <a:lstStyle/>
+          <a:p>
+            <a:pPr algn="l">
+              <a:spcAft>
+                <a:spcPts val="1000"/>
+              </a:spcAft>
+            </a:pPr>
+            <a:r>
+              <a:rPr sz="1700" b="0">
+                <a:solidFill>
+                  <a:srgbClr val="222222"/>
+                </a:solidFill>
+                <a:latin typeface="맑은 고딕"/>
+              </a:rPr>
+              <a:t>•  MODE: 설정한 모드, LEVEL: 지금 달성한 수준</a:t>
+            </a:r>
+          </a:p>
+          <a:p>
+            <a:pPr algn="l">
+              <a:spcAft>
+                <a:spcPts val="1000"/>
+              </a:spcAft>
+            </a:pPr>
+            <a:r>
+              <a:rPr sz="1700" b="0">
+                <a:solidFill>
+                  <a:srgbClr val="222222"/>
+                </a:solidFill>
+                <a:latin typeface="맑은 고딕"/>
+              </a:rPr>
+              <a:t>•  평소에는 두 값이 같다</a:t>
+            </a:r>
+          </a:p>
+          <a:p>
+            <a:pPr algn="l">
+              <a:spcAft>
+                <a:spcPts val="1000"/>
+              </a:spcAft>
+            </a:pPr>
+            <a:r>
+              <a:rPr sz="1700" b="0">
+                <a:solidFill>
+                  <a:srgbClr val="222222"/>
+                </a:solidFill>
+                <a:latin typeface="맑은 고딕"/>
+              </a:rPr>
+              <a:t>•  동기화 Standby가 없으면 LEVEL이 RESYNCHRONIZATION</a:t>
+            </a:r>
+          </a:p>
+          <a:p>
+            <a:pPr algn="l">
+              <a:spcAft>
+                <a:spcPts val="1000"/>
+              </a:spcAft>
+            </a:pPr>
+            <a:r>
+              <a:rPr sz="1700" b="0">
+                <a:solidFill>
+                  <a:srgbClr val="222222"/>
+                </a:solidFill>
+                <a:latin typeface="맑은 고딕"/>
+              </a:rPr>
+              <a:t>•  MODE만 감시하면 보호 붕괴를 놓친다</a:t>
             </a:r>
           </a:p>
         </p:txBody>
@@ -11887,7 +12876,7 @@
                 </a:solidFill>
                 <a:latin typeface="맑은 고딕"/>
               </a:rPr>
-              <a:t>요약 (Summary)</a:t>
+              <a:t>RESYNCHRONIZATION 원인 구분</a:t>
             </a:r>
           </a:p>
         </p:txBody>
@@ -11900,8 +12889,8 @@
         </p:nvSpPr>
         <p:spPr>
           <a:xfrm>
-            <a:off x="640080" y="1371600"/>
-            <a:ext cx="10881360" cy="5120640"/>
+            <a:off x="640080" y="1078992"/>
+            <a:ext cx="10881360" cy="457200"/>
           </a:xfrm>
           <a:prstGeom prst="rect">
             <a:avLst/>
@@ -11916,145 +12905,104 @@
           <a:p>
             <a:pPr algn="l">
               <a:spcAft>
-                <a:spcPts val="1000"/>
-              </a:spcAft>
-            </a:pPr>
-            <a:r>
-              <a:rPr sz="1600" b="0">
-                <a:solidFill>
-                  <a:srgbClr val="222222"/>
-                </a:solidFill>
-                <a:latin typeface="맑은 고딕"/>
-              </a:rPr>
-              <a:t>•  전송 방식은 LOG_ARCHIVE_DEST_n에 속성으로 기술한다. 파라미터가 아니라 V$ARCHIVE_DEST의 열로 확인한다.</a:t>
-            </a:r>
-          </a:p>
-          <a:p>
-            <a:pPr algn="l">
-              <a:spcAft>
-                <a:spcPts val="1000"/>
-              </a:spcAft>
-            </a:pPr>
-            <a:r>
-              <a:rPr sz="1600" b="0">
-                <a:solidFill>
-                  <a:srgbClr val="222222"/>
-                </a:solidFill>
-                <a:latin typeface="맑은 고딕"/>
-              </a:rPr>
-              <a:t>•  VALID_FOR를 잘못 주면 오류 없이 조용히 전송이 멈춘다. 유일한 단서는 VALID_NOW = WRONG VALID_ROLE.</a:t>
-            </a:r>
-          </a:p>
-          <a:p>
-            <a:pPr algn="l">
-              <a:spcAft>
-                <a:spcPts val="1000"/>
-              </a:spcAft>
-            </a:pPr>
-            <a:r>
-              <a:rPr sz="1600" b="0">
-                <a:solidFill>
-                  <a:srgbClr val="222222"/>
-                </a:solidFill>
-                <a:latin typeface="맑은 고딕"/>
-              </a:rPr>
-              <a:t>•  동기는 NSSn, 비동기는 TTnn이 리두를 나른다. SYNC로 바꾸면 TRANSMIT_MODE가 PARALLELSYNC가 된다.</a:t>
-            </a:r>
-          </a:p>
-          <a:p>
-            <a:pPr algn="l">
-              <a:spcAft>
-                <a:spcPts val="1000"/>
-              </a:spcAft>
-            </a:pPr>
-            <a:r>
-              <a:rPr sz="1600" b="0">
-                <a:solidFill>
-                  <a:srgbClr val="222222"/>
-                </a:solidFill>
-                <a:latin typeface="맑은 고딕"/>
-              </a:rPr>
-              <a:t>•  SRL은 동기 전송과 실시간 적용의 전제다. 개수는 온라인 그룹 + 1 이상, 크기는 정확히 동일.</a:t>
-            </a:r>
-          </a:p>
-          <a:p>
-            <a:pPr algn="l">
-              <a:spcAft>
-                <a:spcPts val="1000"/>
-              </a:spcAft>
-            </a:pPr>
-            <a:r>
-              <a:rPr sz="1600" b="0">
-                <a:solidFill>
-                  <a:srgbClr val="222222"/>
-                </a:solidFill>
-                <a:latin typeface="맑은 고딕"/>
-              </a:rPr>
-              <a:t>•  보호 모드 세 가지, 기본값은 Maximum Performance. Protection과 Availability는 커밋 조건이 같다.</a:t>
-            </a:r>
-          </a:p>
-          <a:p>
-            <a:pPr algn="l">
-              <a:spcAft>
-                <a:spcPts val="1000"/>
-              </a:spcAft>
-            </a:pPr>
-            <a:r>
-              <a:rPr sz="1600" b="0">
-                <a:solidFill>
-                  <a:srgbClr val="222222"/>
-                </a:solidFill>
-                <a:latin typeface="맑은 고딕"/>
-              </a:rPr>
-              <a:t>•  PROTECTION_MODE는 설정값, PROTECTION_LEVEL은 달성 수준. 명령 성공만 보지 말고 LEVEL을 확인한다.</a:t>
-            </a:r>
-          </a:p>
-          <a:p>
-            <a:pPr algn="l">
-              <a:spcAft>
-                <a:spcPts val="1000"/>
-              </a:spcAft>
-            </a:pPr>
-            <a:r>
-              <a:rPr sz="1600" b="0">
-                <a:solidFill>
-                  <a:srgbClr val="222222"/>
-                </a:solidFill>
-                <a:latin typeface="맑은 고딕"/>
-              </a:rPr>
-              <a:t>•  실측: Performance→Protection 직접 전환은 ORA-01126. Availability를 거치되 LEVEL이 동기화된 뒤에야 성공했다.</a:t>
-            </a:r>
-          </a:p>
-          <a:p>
-            <a:pPr algn="l">
-              <a:spcAft>
-                <a:spcPts val="1000"/>
-              </a:spcAft>
-            </a:pPr>
-            <a:r>
-              <a:rPr sz="1600" b="0">
-                <a:solidFill>
-                  <a:srgbClr val="222222"/>
-                </a:solidFill>
-                <a:latin typeface="맑은 고딕"/>
-              </a:rPr>
-              <a:t>•  실측: Maximum Protection에서 Standby를 잃자 LGWR이 "Instance shutdown required to protect primary"를 남기고 Primary를 종료했다.</a:t>
-            </a:r>
-          </a:p>
-          <a:p>
-            <a:pPr algn="l">
-              <a:spcAft>
-                <a:spcPts val="1000"/>
-              </a:spcAft>
-            </a:pPr>
-            <a:r>
-              <a:rPr sz="1600" b="0">
-                <a:solidFill>
-                  <a:srgbClr val="222222"/>
-                </a:solidFill>
-                <a:latin typeface="맑은 고딕"/>
-              </a:rPr>
-              <a:t>•  Standby가 한 대뿐이라면 Maximum Protection을 도입하지 않는다.</a:t>
+                <a:spcPts val="600"/>
+              </a:spcAft>
+            </a:pPr>
+            <a:r>
+              <a:rPr sz="1500" b="0">
+                <a:solidFill>
+                  <a:srgbClr val="5A6672"/>
+                </a:solidFill>
+                <a:latin typeface="맑은 고딕"/>
+              </a:rPr>
+              <a:t>같은 값, 세 가지 원인</a:t>
+            </a:r>
+          </a:p>
+        </p:txBody>
+      </p:sp>
+      <p:sp>
+        <p:nvSpPr>
+          <p:cNvPr id="5" name="TextBox 4"/>
+          <p:cNvSpPr txBox="1"/>
+          <p:nvPr/>
+        </p:nvSpPr>
+        <p:spPr>
+          <a:xfrm>
+            <a:off x="640080" y="1737360"/>
+            <a:ext cx="10881360" cy="4754880"/>
+          </a:xfrm>
+          <a:prstGeom prst="rect">
+            <a:avLst/>
+          </a:prstGeom>
+          <a:noFill/>
+        </p:spPr>
+        <p:txBody>
+          <a:bodyPr wrap="square">
+            <a:spAutoFit/>
+          </a:bodyPr>
+          <a:lstStyle/>
+          <a:p>
+            <a:pPr algn="l">
+              <a:spcAft>
+                <a:spcPts val="1000"/>
+              </a:spcAft>
+            </a:pPr>
+            <a:r>
+              <a:rPr sz="1700" b="0">
+                <a:solidFill>
+                  <a:srgbClr val="222222"/>
+                </a:solidFill>
+                <a:latin typeface="맑은 고딕"/>
+              </a:rPr>
+              <a:t>•  목적지 STATUS=ERROR와 ORA 번호: 전송 장애</a:t>
+            </a:r>
+          </a:p>
+          <a:p>
+            <a:pPr algn="l">
+              <a:spcAft>
+                <a:spcPts val="1000"/>
+              </a:spcAft>
+            </a:pPr>
+            <a:r>
+              <a:rPr sz="1700" b="0">
+                <a:solidFill>
+                  <a:srgbClr val="222222"/>
+                </a:solidFill>
+                <a:latin typeface="맑은 고딕"/>
+              </a:rPr>
+              <a:t>•  STATUS=VALID인데 SYNC 목적지 없음: 설정 요건 미충족</a:t>
+            </a:r>
+          </a:p>
+          <a:p>
+            <a:pPr algn="l">
+              <a:spcAft>
+                <a:spcPts val="1000"/>
+              </a:spcAft>
+            </a:pPr>
+            <a:r>
+              <a:rPr sz="1700" b="0">
+                <a:solidFill>
+                  <a:srgbClr val="222222"/>
+                </a:solidFill>
+                <a:latin typeface="맑은 고딕"/>
+              </a:rPr>
+              <a:t>•  잠깐 나타났다 사라짐: 정상적인 따라잡기</a:t>
+            </a:r>
+          </a:p>
+          <a:p>
+            <a:pPr algn="l">
+              <a:spcAft>
+                <a:spcPts val="1000"/>
+              </a:spcAft>
+            </a:pPr>
+            <a:r>
+              <a:rPr sz="1700" b="0">
+                <a:solidFill>
+                  <a:srgbClr val="222222"/>
+                </a:solidFill>
+                <a:latin typeface="맑은 고딕"/>
+              </a:rPr>
+              <a:t>•  모드 변경 직후 로그 스위치로 빨리 해소</a:t>
             </a:r>
           </a:p>
         </p:txBody>
@@ -12086,7 +13034,7 @@
         <p:spPr>
           <a:xfrm>
             <a:off x="0" y="0"/>
-            <a:ext cx="12191695" cy="1005840"/>
+            <a:ext cx="12191695" cy="6858000"/>
           </a:xfrm>
           <a:prstGeom prst="rect">
             <a:avLst/>
@@ -12129,8 +13077,8 @@
         </p:nvSpPr>
         <p:spPr>
           <a:xfrm>
-            <a:off x="548640" y="91440"/>
-            <a:ext cx="10972800" cy="777240"/>
+            <a:off x="822960" y="2011680"/>
+            <a:ext cx="10515600" cy="1097280"/>
           </a:xfrm>
           <a:prstGeom prst="rect">
             <a:avLst/>
@@ -12149,13 +13097,13 @@
               </a:spcAft>
             </a:pPr>
             <a:r>
-              <a:rPr sz="2600" b="1">
+              <a:rPr sz="4000" b="1">
                 <a:solidFill>
                   <a:srgbClr val="FFFFFF"/>
                 </a:solidFill>
                 <a:latin typeface="맑은 고딕"/>
               </a:rPr>
-              <a:t>실습 개요 (Practice Overview)</a:t>
+              <a:t>2.6</a:t>
             </a:r>
           </a:p>
         </p:txBody>
@@ -12168,8 +13116,8 @@
         </p:nvSpPr>
         <p:spPr>
           <a:xfrm>
-            <a:off x="640080" y="1371600"/>
-            <a:ext cx="10881360" cy="5120640"/>
+            <a:off x="822960" y="3017520"/>
+            <a:ext cx="10515600" cy="914400"/>
           </a:xfrm>
           <a:prstGeom prst="rect">
             <a:avLst/>
@@ -12184,97 +13132,861 @@
           <a:p>
             <a:pPr algn="l">
               <a:spcAft>
-                <a:spcPts val="1000"/>
+                <a:spcPts val="600"/>
+              </a:spcAft>
+            </a:pPr>
+            <a:r>
+              <a:rPr sz="2800" b="1">
+                <a:solidFill>
+                  <a:srgbClr val="FFFFFF"/>
+                </a:solidFill>
+                <a:latin typeface="맑은 고딕"/>
+              </a:rPr>
+              <a:t>보호 모드 설정과 전환</a:t>
+            </a:r>
+          </a:p>
+        </p:txBody>
+      </p:sp>
+      <p:sp>
+        <p:nvSpPr>
+          <p:cNvPr id="5" name="Rectangle 4"/>
+          <p:cNvSpPr/>
+          <p:nvPr/>
+        </p:nvSpPr>
+        <p:spPr>
+          <a:xfrm>
+            <a:off x="822960" y="4114800"/>
+            <a:ext cx="5486400" cy="54864"/>
+          </a:xfrm>
+          <a:prstGeom prst="rect">
+            <a:avLst/>
+          </a:prstGeom>
+          <a:solidFill>
+            <a:srgbClr val="FFFFFF"/>
+          </a:solidFill>
+          <a:ln>
+            <a:noFill/>
+          </a:ln>
+          <a:effectLst/>
+        </p:spPr>
+        <p:style>
+          <a:lnRef idx="1">
+            <a:schemeClr val="accent1"/>
+          </a:lnRef>
+          <a:fillRef idx="3">
+            <a:schemeClr val="accent1"/>
+          </a:fillRef>
+          <a:effectRef idx="2">
+            <a:schemeClr val="accent1"/>
+          </a:effectRef>
+          <a:fontRef idx="minor">
+            <a:schemeClr val="lt1"/>
+          </a:fontRef>
+        </p:style>
+        <p:txBody>
+          <a:bodyPr rtlCol="0" anchor="ctr"/>
+          <a:lstStyle/>
+          <a:p>
+            <a:pPr algn="ctr"/>
+          </a:p>
+        </p:txBody>
+      </p:sp>
+      <p:sp>
+        <p:nvSpPr>
+          <p:cNvPr id="6" name="TextBox 5"/>
+          <p:cNvSpPr txBox="1"/>
+          <p:nvPr/>
+        </p:nvSpPr>
+        <p:spPr>
+          <a:xfrm>
+            <a:off x="822960" y="4297680"/>
+            <a:ext cx="10058400" cy="2011680"/>
+          </a:xfrm>
+          <a:prstGeom prst="rect">
+            <a:avLst/>
+          </a:prstGeom>
+          <a:noFill/>
+        </p:spPr>
+        <p:txBody>
+          <a:bodyPr wrap="square">
+            <a:spAutoFit/>
+          </a:bodyPr>
+          <a:lstStyle/>
+          <a:p>
+            <a:pPr algn="l">
+              <a:spcAft>
+                <a:spcPts val="800"/>
               </a:spcAft>
             </a:pPr>
             <a:r>
               <a:rPr sz="1600" b="0">
                 <a:solidFill>
-                  <a:srgbClr val="222222"/>
-                </a:solidFill>
-                <a:latin typeface="맑은 고딕"/>
-              </a:rPr>
-              <a:t>•  실습 01 — 현재 보호 모드 확인: 두 열의 차이와 SRL 요건을 점검한다. 요건 없이 모드를 올려 ORA-01126을 재현한다.</a:t>
-            </a:r>
-          </a:p>
-          <a:p>
-            <a:pPr algn="l">
-              <a:spcAft>
-                <a:spcPts val="1000"/>
+                  <a:srgbClr val="FFFFFF"/>
+                </a:solidFill>
+                <a:latin typeface="맑은 고딕"/>
+              </a:rPr>
+              <a:t>•  설정 전 요건</a:t>
+            </a:r>
+          </a:p>
+          <a:p>
+            <a:pPr algn="l">
+              <a:spcAft>
+                <a:spcPts val="800"/>
               </a:spcAft>
             </a:pPr>
             <a:r>
               <a:rPr sz="1600" b="0">
                 <a:solidFill>
-                  <a:srgbClr val="222222"/>
-                </a:solidFill>
-                <a:latin typeface="맑은 고딕"/>
-              </a:rPr>
-              <a:t>•  실습 02 — LOG_ARCHIVE_DEST_2 속성 해부: SYNC/ASYNC·AFFIRM·VALID_FOR를 바꿔 가며 V$ARCHIVE_DEST의 변화를 관찰하고 WRONG VALID_ROLE을 재현한다.</a:t>
-            </a:r>
-          </a:p>
-          <a:p>
-            <a:pPr algn="l">
-              <a:spcAft>
-                <a:spcPts val="1000"/>
+                  <a:srgbClr val="FFFFFF"/>
+                </a:solidFill>
+                <a:latin typeface="맑은 고딕"/>
+              </a:rPr>
+              <a:t>•  SQL과 Broker로 설정</a:t>
+            </a:r>
+          </a:p>
+          <a:p>
+            <a:pPr algn="l">
+              <a:spcAft>
+                <a:spcPts val="800"/>
               </a:spcAft>
             </a:pPr>
             <a:r>
               <a:rPr sz="1600" b="0">
                 <a:solidFill>
-                  <a:srgbClr val="222222"/>
-                </a:solidFill>
-                <a:latin typeface="맑은 고딕"/>
-              </a:rPr>
-              <a:t>•  실습 03 — 보호 모드 전환: ORA-01126을 두 가지 경로로 재현하고 요건을 갖춰 Maximum Protection까지 올린다.</a:t>
-            </a:r>
-          </a:p>
-          <a:p>
-            <a:pPr algn="l">
-              <a:spcAft>
-                <a:spcPts val="1000"/>
-              </a:spcAft>
-            </a:pPr>
-            <a:r>
-              <a:rPr sz="1600" b="0">
-                <a:solidFill>
-                  <a:srgbClr val="222222"/>
-                </a:solidFill>
-                <a:latin typeface="맑은 고딕"/>
-              </a:rPr>
-              <a:t>•  실습 04 — 모드별 Primary 동작: Availability와 Protection 각각에서 Standby를 내려 차이를 실증한다. ORA-01154와 인스턴스 자동 종료를 확인한다.</a:t>
-            </a:r>
-          </a:p>
-          <a:p>
-            <a:pPr algn="l">
-              <a:spcAft>
-                <a:spcPts val="1000"/>
-              </a:spcAft>
-            </a:pPr>
-            <a:r>
-              <a:rPr sz="1600" b="0">
-                <a:solidFill>
-                  <a:srgbClr val="222222"/>
-                </a:solidFill>
-                <a:latin typeface="맑은 고딕"/>
-              </a:rPr>
-              <a:t>•  실습 05 — MODE와 LEVEL 어긋남: RESYNCHRONIZATION을 두 경로로 재현하고 설정 문제와 장애를 구분하는 기준을 세운다.</a:t>
-            </a:r>
-          </a:p>
-          <a:p>
-            <a:pPr algn="l">
-              <a:spcAft>
-                <a:spcPts val="1000"/>
-              </a:spcAft>
-            </a:pPr>
-            <a:r>
-              <a:rPr sz="1600" b="0">
-                <a:solidFill>
-                  <a:srgbClr val="222222"/>
-                </a:solidFill>
-                <a:latin typeface="맑은 고딕"/>
-              </a:rPr>
-              <a:t>•  실습 04는 Primary를 실제로 종료시킨다. 개인 실습 환경에서만, 다른 실습과 겹치지 않게 진행한다.</a:t>
+                  <a:srgbClr val="FFFFFF"/>
+                </a:solidFill>
+                <a:latin typeface="맑은 고딕"/>
+              </a:rPr>
+              <a:t>•  Maximum Protection으로 가는 경로</a:t>
+            </a:r>
+          </a:p>
+        </p:txBody>
+      </p:sp>
+    </p:spTree>
+  </p:cSld>
+  <p:clrMapOvr>
+    <a:masterClrMapping/>
+  </p:clrMapOvr>
+</p:sld>
+</file>
+
+<file path=ppt/slides/slide37.xml><?xml version="1.0" encoding="utf-8"?>
+<p:sld xmlns:a="http://schemas.openxmlformats.org/drawingml/2006/main" xmlns:p="http://schemas.openxmlformats.org/presentationml/2006/main" xmlns:r="http://schemas.openxmlformats.org/officeDocument/2006/relationships">
+  <p:cSld>
+    <p:spTree>
+      <p:nvGrpSpPr>
+        <p:cNvPr id="1" name=""/>
+        <p:cNvGrpSpPr/>
+        <p:nvPr/>
+      </p:nvGrpSpPr>
+      <p:grpSpPr/>
+      <p:sp>
+        <p:nvSpPr>
+          <p:cNvPr id="2" name="Rectangle 1"/>
+          <p:cNvSpPr/>
+          <p:nvPr/>
+        </p:nvSpPr>
+        <p:spPr>
+          <a:xfrm>
+            <a:off x="0" y="0"/>
+            <a:ext cx="12191695" cy="1005840"/>
+          </a:xfrm>
+          <a:prstGeom prst="rect">
+            <a:avLst/>
+          </a:prstGeom>
+          <a:solidFill>
+            <a:srgbClr val="C0392B"/>
+          </a:solidFill>
+          <a:ln>
+            <a:noFill/>
+          </a:ln>
+          <a:effectLst/>
+        </p:spPr>
+        <p:style>
+          <a:lnRef idx="1">
+            <a:schemeClr val="accent1"/>
+          </a:lnRef>
+          <a:fillRef idx="3">
+            <a:schemeClr val="accent1"/>
+          </a:fillRef>
+          <a:effectRef idx="2">
+            <a:schemeClr val="accent1"/>
+          </a:effectRef>
+          <a:fontRef idx="minor">
+            <a:schemeClr val="lt1"/>
+          </a:fontRef>
+        </p:style>
+        <p:txBody>
+          <a:bodyPr rtlCol="0" anchor="ctr"/>
+          <a:lstStyle/>
+          <a:p>
+            <a:pPr algn="ctr"/>
+          </a:p>
+        </p:txBody>
+      </p:sp>
+      <p:sp>
+        <p:nvSpPr>
+          <p:cNvPr id="3" name="TextBox 2"/>
+          <p:cNvSpPr txBox="1"/>
+          <p:nvPr/>
+        </p:nvSpPr>
+        <p:spPr>
+          <a:xfrm>
+            <a:off x="548640" y="91440"/>
+            <a:ext cx="10972800" cy="777240"/>
+          </a:xfrm>
+          <a:prstGeom prst="rect">
+            <a:avLst/>
+          </a:prstGeom>
+          <a:noFill/>
+        </p:spPr>
+        <p:txBody>
+          <a:bodyPr wrap="square">
+            <a:spAutoFit/>
+          </a:bodyPr>
+          <a:lstStyle/>
+          <a:p>
+            <a:pPr algn="l">
+              <a:spcAft>
+                <a:spcPts val="600"/>
+              </a:spcAft>
+            </a:pPr>
+            <a:r>
+              <a:rPr sz="2600" b="1">
+                <a:solidFill>
+                  <a:srgbClr val="FFFFFF"/>
+                </a:solidFill>
+                <a:latin typeface="맑은 고딕"/>
+              </a:rPr>
+              <a:t>설정 전 갖출 요건</a:t>
+            </a:r>
+          </a:p>
+        </p:txBody>
+      </p:sp>
+      <p:sp>
+        <p:nvSpPr>
+          <p:cNvPr id="4" name="TextBox 3"/>
+          <p:cNvSpPr txBox="1"/>
+          <p:nvPr/>
+        </p:nvSpPr>
+        <p:spPr>
+          <a:xfrm>
+            <a:off x="640080" y="1078992"/>
+            <a:ext cx="10881360" cy="457200"/>
+          </a:xfrm>
+          <a:prstGeom prst="rect">
+            <a:avLst/>
+          </a:prstGeom>
+          <a:noFill/>
+        </p:spPr>
+        <p:txBody>
+          <a:bodyPr wrap="square">
+            <a:spAutoFit/>
+          </a:bodyPr>
+          <a:lstStyle/>
+          <a:p>
+            <a:pPr algn="l">
+              <a:spcAft>
+                <a:spcPts val="600"/>
+              </a:spcAft>
+            </a:pPr>
+            <a:r>
+              <a:rPr sz="1500" b="0">
+                <a:solidFill>
+                  <a:srgbClr val="5A6672"/>
+                </a:solidFill>
+                <a:latin typeface="맑은 고딕"/>
+              </a:rPr>
+              <a:t>요건 없이 올리면 거부되거나 이름만 바뀐다</a:t>
+            </a:r>
+          </a:p>
+        </p:txBody>
+      </p:sp>
+      <p:sp>
+        <p:nvSpPr>
+          <p:cNvPr id="5" name="TextBox 4"/>
+          <p:cNvSpPr txBox="1"/>
+          <p:nvPr/>
+        </p:nvSpPr>
+        <p:spPr>
+          <a:xfrm>
+            <a:off x="640080" y="1737360"/>
+            <a:ext cx="10881360" cy="4754880"/>
+          </a:xfrm>
+          <a:prstGeom prst="rect">
+            <a:avLst/>
+          </a:prstGeom>
+          <a:noFill/>
+        </p:spPr>
+        <p:txBody>
+          <a:bodyPr wrap="square">
+            <a:spAutoFit/>
+          </a:bodyPr>
+          <a:lstStyle/>
+          <a:p>
+            <a:pPr algn="l">
+              <a:spcAft>
+                <a:spcPts val="1000"/>
+              </a:spcAft>
+            </a:pPr>
+            <a:r>
+              <a:rPr sz="1700" b="0">
+                <a:solidFill>
+                  <a:srgbClr val="222222"/>
+                </a:solidFill>
+                <a:latin typeface="맑은 고딕"/>
+              </a:rPr>
+              <a:t>•  대상 Standby의 SRL (V$STANDBY_LOG)</a:t>
+            </a:r>
+          </a:p>
+          <a:p>
+            <a:pPr algn="l">
+              <a:spcAft>
+                <a:spcPts val="1000"/>
+              </a:spcAft>
+            </a:pPr>
+            <a:r>
+              <a:rPr sz="1700" b="0">
+                <a:solidFill>
+                  <a:srgbClr val="222222"/>
+                </a:solidFill>
+                <a:latin typeface="맑은 고딕"/>
+              </a:rPr>
+              <a:t>•  Primary에도 SRL</a:t>
+            </a:r>
+          </a:p>
+          <a:p>
+            <a:pPr algn="l">
+              <a:spcAft>
+                <a:spcPts val="1000"/>
+              </a:spcAft>
+            </a:pPr>
+            <a:r>
+              <a:rPr sz="1700" b="0">
+                <a:solidFill>
+                  <a:srgbClr val="222222"/>
+                </a:solidFill>
+                <a:latin typeface="맑은 고딕"/>
+              </a:rPr>
+              <a:t>•  목적지 전송 속성을 모드에 맞게 변경</a:t>
+            </a:r>
+          </a:p>
+          <a:p>
+            <a:pPr algn="l">
+              <a:spcAft>
+                <a:spcPts val="1000"/>
+              </a:spcAft>
+            </a:pPr>
+            <a:r>
+              <a:rPr sz="1700" b="0">
+                <a:solidFill>
+                  <a:srgbClr val="222222"/>
+                </a:solidFill>
+                <a:latin typeface="맑은 고딕"/>
+              </a:rPr>
+              <a:t>•  Standby 쪽에도 상대 방향 목적지</a:t>
+            </a:r>
+          </a:p>
+          <a:p>
+            <a:pPr algn="l">
+              <a:spcAft>
+                <a:spcPts val="1000"/>
+              </a:spcAft>
+            </a:pPr>
+            <a:r>
+              <a:rPr sz="1700" b="0">
+                <a:solidFill>
+                  <a:srgbClr val="222222"/>
+                </a:solidFill>
+                <a:latin typeface="맑은 고딕"/>
+              </a:rPr>
+              <a:t>•  Redo Apply 동작, 갭 없음</a:t>
+            </a:r>
+          </a:p>
+        </p:txBody>
+      </p:sp>
+    </p:spTree>
+  </p:cSld>
+  <p:clrMapOvr>
+    <a:masterClrMapping/>
+  </p:clrMapOvr>
+</p:sld>
+</file>
+
+<file path=ppt/slides/slide38.xml><?xml version="1.0" encoding="utf-8"?>
+<p:sld xmlns:a="http://schemas.openxmlformats.org/drawingml/2006/main" xmlns:p="http://schemas.openxmlformats.org/presentationml/2006/main" xmlns:r="http://schemas.openxmlformats.org/officeDocument/2006/relationships">
+  <p:cSld>
+    <p:spTree>
+      <p:nvGrpSpPr>
+        <p:cNvPr id="1" name=""/>
+        <p:cNvGrpSpPr/>
+        <p:nvPr/>
+      </p:nvGrpSpPr>
+      <p:grpSpPr/>
+      <p:sp>
+        <p:nvSpPr>
+          <p:cNvPr id="2" name="Rectangle 1"/>
+          <p:cNvSpPr/>
+          <p:nvPr/>
+        </p:nvSpPr>
+        <p:spPr>
+          <a:xfrm>
+            <a:off x="0" y="0"/>
+            <a:ext cx="12191695" cy="1005840"/>
+          </a:xfrm>
+          <a:prstGeom prst="rect">
+            <a:avLst/>
+          </a:prstGeom>
+          <a:solidFill>
+            <a:srgbClr val="C0392B"/>
+          </a:solidFill>
+          <a:ln>
+            <a:noFill/>
+          </a:ln>
+          <a:effectLst/>
+        </p:spPr>
+        <p:style>
+          <a:lnRef idx="1">
+            <a:schemeClr val="accent1"/>
+          </a:lnRef>
+          <a:fillRef idx="3">
+            <a:schemeClr val="accent1"/>
+          </a:fillRef>
+          <a:effectRef idx="2">
+            <a:schemeClr val="accent1"/>
+          </a:effectRef>
+          <a:fontRef idx="minor">
+            <a:schemeClr val="lt1"/>
+          </a:fontRef>
+        </p:style>
+        <p:txBody>
+          <a:bodyPr rtlCol="0" anchor="ctr"/>
+          <a:lstStyle/>
+          <a:p>
+            <a:pPr algn="ctr"/>
+          </a:p>
+        </p:txBody>
+      </p:sp>
+      <p:sp>
+        <p:nvSpPr>
+          <p:cNvPr id="3" name="TextBox 2"/>
+          <p:cNvSpPr txBox="1"/>
+          <p:nvPr/>
+        </p:nvSpPr>
+        <p:spPr>
+          <a:xfrm>
+            <a:off x="548640" y="91440"/>
+            <a:ext cx="10972800" cy="777240"/>
+          </a:xfrm>
+          <a:prstGeom prst="rect">
+            <a:avLst/>
+          </a:prstGeom>
+          <a:noFill/>
+        </p:spPr>
+        <p:txBody>
+          <a:bodyPr wrap="square">
+            <a:spAutoFit/>
+          </a:bodyPr>
+          <a:lstStyle/>
+          <a:p>
+            <a:pPr algn="l">
+              <a:spcAft>
+                <a:spcPts val="600"/>
+              </a:spcAft>
+            </a:pPr>
+            <a:r>
+              <a:rPr sz="2600" b="1">
+                <a:solidFill>
+                  <a:srgbClr val="FFFFFF"/>
+                </a:solidFill>
+                <a:latin typeface="맑은 고딕"/>
+              </a:rPr>
+              <a:t>SQL로 모드 변경</a:t>
+            </a:r>
+          </a:p>
+        </p:txBody>
+      </p:sp>
+      <p:sp>
+        <p:nvSpPr>
+          <p:cNvPr id="4" name="TextBox 3"/>
+          <p:cNvSpPr txBox="1"/>
+          <p:nvPr/>
+        </p:nvSpPr>
+        <p:spPr>
+          <a:xfrm>
+            <a:off x="640080" y="1078992"/>
+            <a:ext cx="10881360" cy="457200"/>
+          </a:xfrm>
+          <a:prstGeom prst="rect">
+            <a:avLst/>
+          </a:prstGeom>
+          <a:noFill/>
+        </p:spPr>
+        <p:txBody>
+          <a:bodyPr wrap="square">
+            <a:spAutoFit/>
+          </a:bodyPr>
+          <a:lstStyle/>
+          <a:p>
+            <a:pPr algn="l">
+              <a:spcAft>
+                <a:spcPts val="600"/>
+              </a:spcAft>
+            </a:pPr>
+            <a:r>
+              <a:rPr sz="1500" b="0">
+                <a:solidFill>
+                  <a:srgbClr val="5A6672"/>
+                </a:solidFill>
+                <a:latin typeface="맑은 고딕"/>
+              </a:rPr>
+              <a:t>Primary에서 한 문장</a:t>
+            </a:r>
+          </a:p>
+        </p:txBody>
+      </p:sp>
+      <p:sp>
+        <p:nvSpPr>
+          <p:cNvPr id="5" name="TextBox 4"/>
+          <p:cNvSpPr txBox="1"/>
+          <p:nvPr/>
+        </p:nvSpPr>
+        <p:spPr>
+          <a:xfrm>
+            <a:off x="640080" y="1737360"/>
+            <a:ext cx="10881360" cy="4754880"/>
+          </a:xfrm>
+          <a:prstGeom prst="rect">
+            <a:avLst/>
+          </a:prstGeom>
+          <a:noFill/>
+        </p:spPr>
+        <p:txBody>
+          <a:bodyPr wrap="square">
+            <a:spAutoFit/>
+          </a:bodyPr>
+          <a:lstStyle/>
+          <a:p>
+            <a:pPr algn="l">
+              <a:spcAft>
+                <a:spcPts val="1000"/>
+              </a:spcAft>
+            </a:pPr>
+            <a:r>
+              <a:rPr sz="1700" b="0">
+                <a:solidFill>
+                  <a:srgbClr val="222222"/>
+                </a:solidFill>
+                <a:latin typeface="맑은 고딕"/>
+              </a:rPr>
+              <a:t>•  전송 속성 먼저: SYNC AFFIRM 등</a:t>
+            </a:r>
+          </a:p>
+          <a:p>
+            <a:pPr algn="l">
+              <a:spcAft>
+                <a:spcPts val="1000"/>
+              </a:spcAft>
+            </a:pPr>
+            <a:r>
+              <a:rPr sz="1700" b="0">
+                <a:solidFill>
+                  <a:srgbClr val="222222"/>
+                </a:solidFill>
+                <a:latin typeface="맑은 고딕"/>
+              </a:rPr>
+              <a:t>•  ALTER DATABASE SET STANDBY DATABASE TO MAXIMIZE ...</a:t>
+            </a:r>
+          </a:p>
+          <a:p>
+            <a:pPr algn="l">
+              <a:spcAft>
+                <a:spcPts val="1000"/>
+              </a:spcAft>
+            </a:pPr>
+            <a:r>
+              <a:rPr sz="1700" b="0">
+                <a:solidFill>
+                  <a:srgbClr val="222222"/>
+                </a:solidFill>
+                <a:latin typeface="맑은 고딕"/>
+              </a:rPr>
+              <a:t>•  키워드: PROTECTION, AVAILABILITY, PERFORMANCE</a:t>
+            </a:r>
+          </a:p>
+          <a:p>
+            <a:pPr algn="l">
+              <a:spcAft>
+                <a:spcPts val="1000"/>
+              </a:spcAft>
+            </a:pPr>
+            <a:r>
+              <a:rPr sz="1700" b="0">
+                <a:solidFill>
+                  <a:srgbClr val="222222"/>
+                </a:solidFill>
+                <a:latin typeface="맑은 고딕"/>
+              </a:rPr>
+              <a:t>•  제어 파일에 기록, 재기동 후에도 유지</a:t>
+            </a:r>
+          </a:p>
+          <a:p>
+            <a:pPr algn="l">
+              <a:spcAft>
+                <a:spcPts val="1000"/>
+              </a:spcAft>
+            </a:pPr>
+            <a:r>
+              <a:rPr sz="1700" b="0">
+                <a:solidFill>
+                  <a:srgbClr val="222222"/>
+                </a:solidFill>
+                <a:latin typeface="맑은 고딕"/>
+              </a:rPr>
+              <a:t>•  로그 스위치 후 PROTECTION_LEVEL 확인</a:t>
+            </a:r>
+          </a:p>
+        </p:txBody>
+      </p:sp>
+    </p:spTree>
+  </p:cSld>
+  <p:clrMapOvr>
+    <a:masterClrMapping/>
+  </p:clrMapOvr>
+</p:sld>
+</file>
+
+<file path=ppt/slides/slide39.xml><?xml version="1.0" encoding="utf-8"?>
+<p:sld xmlns:a="http://schemas.openxmlformats.org/drawingml/2006/main" xmlns:p="http://schemas.openxmlformats.org/presentationml/2006/main" xmlns:r="http://schemas.openxmlformats.org/officeDocument/2006/relationships">
+  <p:cSld>
+    <p:spTree>
+      <p:nvGrpSpPr>
+        <p:cNvPr id="1" name=""/>
+        <p:cNvGrpSpPr/>
+        <p:nvPr/>
+      </p:nvGrpSpPr>
+      <p:grpSpPr/>
+      <p:sp>
+        <p:nvSpPr>
+          <p:cNvPr id="2" name="Rectangle 1"/>
+          <p:cNvSpPr/>
+          <p:nvPr/>
+        </p:nvSpPr>
+        <p:spPr>
+          <a:xfrm>
+            <a:off x="0" y="0"/>
+            <a:ext cx="12191695" cy="1005840"/>
+          </a:xfrm>
+          <a:prstGeom prst="rect">
+            <a:avLst/>
+          </a:prstGeom>
+          <a:solidFill>
+            <a:srgbClr val="C0392B"/>
+          </a:solidFill>
+          <a:ln>
+            <a:noFill/>
+          </a:ln>
+          <a:effectLst/>
+        </p:spPr>
+        <p:style>
+          <a:lnRef idx="1">
+            <a:schemeClr val="accent1"/>
+          </a:lnRef>
+          <a:fillRef idx="3">
+            <a:schemeClr val="accent1"/>
+          </a:fillRef>
+          <a:effectRef idx="2">
+            <a:schemeClr val="accent1"/>
+          </a:effectRef>
+          <a:fontRef idx="minor">
+            <a:schemeClr val="lt1"/>
+          </a:fontRef>
+        </p:style>
+        <p:txBody>
+          <a:bodyPr rtlCol="0" anchor="ctr"/>
+          <a:lstStyle/>
+          <a:p>
+            <a:pPr algn="ctr"/>
+          </a:p>
+        </p:txBody>
+      </p:sp>
+      <p:sp>
+        <p:nvSpPr>
+          <p:cNvPr id="3" name="TextBox 2"/>
+          <p:cNvSpPr txBox="1"/>
+          <p:nvPr/>
+        </p:nvSpPr>
+        <p:spPr>
+          <a:xfrm>
+            <a:off x="548640" y="91440"/>
+            <a:ext cx="10972800" cy="777240"/>
+          </a:xfrm>
+          <a:prstGeom prst="rect">
+            <a:avLst/>
+          </a:prstGeom>
+          <a:noFill/>
+        </p:spPr>
+        <p:txBody>
+          <a:bodyPr wrap="square">
+            <a:spAutoFit/>
+          </a:bodyPr>
+          <a:lstStyle/>
+          <a:p>
+            <a:pPr algn="l">
+              <a:spcAft>
+                <a:spcPts val="600"/>
+              </a:spcAft>
+            </a:pPr>
+            <a:r>
+              <a:rPr sz="2600" b="1">
+                <a:solidFill>
+                  <a:srgbClr val="FFFFFF"/>
+                </a:solidFill>
+                <a:latin typeface="맑은 고딕"/>
+              </a:rPr>
+              <a:t>Maximum Protection으로 가는 경로</a:t>
+            </a:r>
+          </a:p>
+        </p:txBody>
+      </p:sp>
+      <p:sp>
+        <p:nvSpPr>
+          <p:cNvPr id="4" name="TextBox 3"/>
+          <p:cNvSpPr txBox="1"/>
+          <p:nvPr/>
+        </p:nvSpPr>
+        <p:spPr>
+          <a:xfrm>
+            <a:off x="640080" y="1078992"/>
+            <a:ext cx="10881360" cy="457200"/>
+          </a:xfrm>
+          <a:prstGeom prst="rect">
+            <a:avLst/>
+          </a:prstGeom>
+          <a:noFill/>
+        </p:spPr>
+        <p:txBody>
+          <a:bodyPr wrap="square">
+            <a:spAutoFit/>
+          </a:bodyPr>
+          <a:lstStyle/>
+          <a:p>
+            <a:pPr algn="l">
+              <a:spcAft>
+                <a:spcPts val="600"/>
+              </a:spcAft>
+            </a:pPr>
+            <a:r>
+              <a:rPr sz="1500" b="0">
+                <a:solidFill>
+                  <a:srgbClr val="5A6672"/>
+                </a:solidFill>
+                <a:latin typeface="맑은 고딕"/>
+              </a:rPr>
+              <a:t>출발점은 동기화된 Maximum Availability</a:t>
+            </a:r>
+          </a:p>
+        </p:txBody>
+      </p:sp>
+      <p:sp>
+        <p:nvSpPr>
+          <p:cNvPr id="5" name="TextBox 4"/>
+          <p:cNvSpPr txBox="1"/>
+          <p:nvPr/>
+        </p:nvSpPr>
+        <p:spPr>
+          <a:xfrm>
+            <a:off x="640080" y="1737360"/>
+            <a:ext cx="10881360" cy="4754880"/>
+          </a:xfrm>
+          <a:prstGeom prst="rect">
+            <a:avLst/>
+          </a:prstGeom>
+          <a:noFill/>
+        </p:spPr>
+        <p:txBody>
+          <a:bodyPr wrap="square">
+            <a:spAutoFit/>
+          </a:bodyPr>
+          <a:lstStyle/>
+          <a:p>
+            <a:pPr algn="l">
+              <a:spcAft>
+                <a:spcPts val="1000"/>
+              </a:spcAft>
+            </a:pPr>
+            <a:r>
+              <a:rPr sz="1700" b="0">
+                <a:solidFill>
+                  <a:srgbClr val="222222"/>
+                </a:solidFill>
+                <a:latin typeface="맑은 고딕"/>
+              </a:rPr>
+              <a:t>•  Performance에서 직접: ORA-01126</a:t>
+            </a:r>
+          </a:p>
+          <a:p>
+            <a:pPr algn="l">
+              <a:spcAft>
+                <a:spcPts val="1000"/>
+              </a:spcAft>
+            </a:pPr>
+            <a:r>
+              <a:rPr sz="1700" b="0">
+                <a:solidFill>
+                  <a:srgbClr val="222222"/>
+                </a:solidFill>
+                <a:latin typeface="맑은 고딕"/>
+              </a:rPr>
+              <a:t>•  Availability라도 LEVEL이 RESYNC면: ORA-01126</a:t>
+            </a:r>
+          </a:p>
+          <a:p>
+            <a:pPr algn="l">
+              <a:spcAft>
+                <a:spcPts val="1000"/>
+              </a:spcAft>
+            </a:pPr>
+            <a:r>
+              <a:rPr sz="1700" b="0">
+                <a:solidFill>
+                  <a:srgbClr val="222222"/>
+                </a:solidFill>
+                <a:latin typeface="맑은 고딕"/>
+              </a:rPr>
+              <a:t>•  순서: SYNC AFFIRM → Availability → 동기화 확인 → Protection</a:t>
+            </a:r>
+          </a:p>
+          <a:p>
+            <a:pPr algn="l">
+              <a:spcAft>
+                <a:spcPts val="1000"/>
+              </a:spcAft>
+            </a:pPr>
+            <a:r>
+              <a:rPr sz="1700" b="0">
+                <a:solidFill>
+                  <a:srgbClr val="222222"/>
+                </a:solidFill>
+                <a:latin typeface="맑은 고딕"/>
+              </a:rPr>
+              <a:t>•  마운트 상태 우회는 권하지 않음</a:t>
+            </a:r>
+          </a:p>
+          <a:p>
+            <a:pPr algn="l">
+              <a:spcAft>
+                <a:spcPts val="1000"/>
+              </a:spcAft>
+            </a:pPr>
+            <a:r>
+              <a:rPr sz="1700" b="0">
+                <a:solidFill>
+                  <a:srgbClr val="222222"/>
+                </a:solidFill>
+                <a:latin typeface="맑은 고딕"/>
+              </a:rPr>
+              <a:t>•  내릴 때는 열린 상태에서 가능</a:t>
             </a:r>
           </a:p>
         </p:txBody>
@@ -12497,7 +14209,7 @@
                 </a:solidFill>
                 <a:latin typeface="맑은 고딕"/>
               </a:rPr>
-              <a:t>•  LOG_ARCHIVE_DEST_n 하나에 속성을 나열한다</a:t>
+              <a:t>•  리두 소스와 리두 목적지</a:t>
             </a:r>
           </a:p>
           <a:p>
@@ -12513,7 +14225,7 @@
                 </a:solidFill>
                 <a:latin typeface="맑은 고딕"/>
               </a:rPr>
-              <a:t>•  파라미터가 아니라 V$ARCHIVE_DEST 로 확인한다</a:t>
+              <a:t>•  전송 프로세스와 SRL</a:t>
             </a:r>
           </a:p>
           <a:p>
@@ -12529,7 +14241,2374 @@
                 </a:solidFill>
                 <a:latin typeface="맑은 고딕"/>
               </a:rPr>
-              <a:t>•  동기와 비동기는 담당 프로세스가 다르다</a:t>
+              <a:t>•  전송 모드와 보호 모드의 관계</a:t>
+            </a:r>
+          </a:p>
+        </p:txBody>
+      </p:sp>
+    </p:spTree>
+  </p:cSld>
+  <p:clrMapOvr>
+    <a:masterClrMapping/>
+  </p:clrMapOvr>
+</p:sld>
+</file>
+
+<file path=ppt/slides/slide40.xml><?xml version="1.0" encoding="utf-8"?>
+<p:sld xmlns:a="http://schemas.openxmlformats.org/drawingml/2006/main" xmlns:p="http://schemas.openxmlformats.org/presentationml/2006/main" xmlns:r="http://schemas.openxmlformats.org/officeDocument/2006/relationships">
+  <p:cSld>
+    <p:spTree>
+      <p:nvGrpSpPr>
+        <p:cNvPr id="1" name=""/>
+        <p:cNvGrpSpPr/>
+        <p:nvPr/>
+      </p:nvGrpSpPr>
+      <p:grpSpPr/>
+      <p:sp>
+        <p:nvSpPr>
+          <p:cNvPr id="2" name="Rectangle 1"/>
+          <p:cNvSpPr/>
+          <p:nvPr/>
+        </p:nvSpPr>
+        <p:spPr>
+          <a:xfrm>
+            <a:off x="0" y="0"/>
+            <a:ext cx="12191695" cy="1005840"/>
+          </a:xfrm>
+          <a:prstGeom prst="rect">
+            <a:avLst/>
+          </a:prstGeom>
+          <a:solidFill>
+            <a:srgbClr val="C0392B"/>
+          </a:solidFill>
+          <a:ln>
+            <a:noFill/>
+          </a:ln>
+          <a:effectLst/>
+        </p:spPr>
+        <p:style>
+          <a:lnRef idx="1">
+            <a:schemeClr val="accent1"/>
+          </a:lnRef>
+          <a:fillRef idx="3">
+            <a:schemeClr val="accent1"/>
+          </a:fillRef>
+          <a:effectRef idx="2">
+            <a:schemeClr val="accent1"/>
+          </a:effectRef>
+          <a:fontRef idx="minor">
+            <a:schemeClr val="lt1"/>
+          </a:fontRef>
+        </p:style>
+        <p:txBody>
+          <a:bodyPr rtlCol="0" anchor="ctr"/>
+          <a:lstStyle/>
+          <a:p>
+            <a:pPr algn="ctr"/>
+          </a:p>
+        </p:txBody>
+      </p:sp>
+      <p:sp>
+        <p:nvSpPr>
+          <p:cNvPr id="3" name="TextBox 2"/>
+          <p:cNvSpPr txBox="1"/>
+          <p:nvPr/>
+        </p:nvSpPr>
+        <p:spPr>
+          <a:xfrm>
+            <a:off x="548640" y="91440"/>
+            <a:ext cx="10972800" cy="777240"/>
+          </a:xfrm>
+          <a:prstGeom prst="rect">
+            <a:avLst/>
+          </a:prstGeom>
+          <a:noFill/>
+        </p:spPr>
+        <p:txBody>
+          <a:bodyPr wrap="square">
+            <a:spAutoFit/>
+          </a:bodyPr>
+          <a:lstStyle/>
+          <a:p>
+            <a:pPr algn="l">
+              <a:spcAft>
+                <a:spcPts val="600"/>
+              </a:spcAft>
+            </a:pPr>
+            <a:r>
+              <a:rPr sz="2600" b="1">
+                <a:solidFill>
+                  <a:srgbClr val="FFFFFF"/>
+                </a:solidFill>
+                <a:latin typeface="맑은 고딕"/>
+              </a:rPr>
+              <a:t>Broker로 설정할 때</a:t>
+            </a:r>
+          </a:p>
+        </p:txBody>
+      </p:sp>
+      <p:sp>
+        <p:nvSpPr>
+          <p:cNvPr id="4" name="TextBox 3"/>
+          <p:cNvSpPr txBox="1"/>
+          <p:nvPr/>
+        </p:nvSpPr>
+        <p:spPr>
+          <a:xfrm>
+            <a:off x="640080" y="1078992"/>
+            <a:ext cx="10881360" cy="457200"/>
+          </a:xfrm>
+          <a:prstGeom prst="rect">
+            <a:avLst/>
+          </a:prstGeom>
+          <a:noFill/>
+        </p:spPr>
+        <p:txBody>
+          <a:bodyPr wrap="square">
+            <a:spAutoFit/>
+          </a:bodyPr>
+          <a:lstStyle/>
+          <a:p>
+            <a:pPr algn="l">
+              <a:spcAft>
+                <a:spcPts val="600"/>
+              </a:spcAft>
+            </a:pPr>
+            <a:r>
+              <a:rPr sz="1500" b="0">
+                <a:solidFill>
+                  <a:srgbClr val="5A6672"/>
+                </a:solidFill>
+                <a:latin typeface="맑은 고딕"/>
+              </a:rPr>
+              <a:t>LogXptMode와 PROTECTION MODE</a:t>
+            </a:r>
+          </a:p>
+        </p:txBody>
+      </p:sp>
+      <p:sp>
+        <p:nvSpPr>
+          <p:cNvPr id="5" name="TextBox 4"/>
+          <p:cNvSpPr txBox="1"/>
+          <p:nvPr/>
+        </p:nvSpPr>
+        <p:spPr>
+          <a:xfrm>
+            <a:off x="640080" y="1737360"/>
+            <a:ext cx="10881360" cy="4754880"/>
+          </a:xfrm>
+          <a:prstGeom prst="rect">
+            <a:avLst/>
+          </a:prstGeom>
+          <a:noFill/>
+        </p:spPr>
+        <p:txBody>
+          <a:bodyPr wrap="square">
+            <a:spAutoFit/>
+          </a:bodyPr>
+          <a:lstStyle/>
+          <a:p>
+            <a:pPr algn="l">
+              <a:spcAft>
+                <a:spcPts val="1000"/>
+              </a:spcAft>
+            </a:pPr>
+            <a:r>
+              <a:rPr sz="1700" b="0">
+                <a:solidFill>
+                  <a:srgbClr val="222222"/>
+                </a:solidFill>
+                <a:latin typeface="맑은 고딕"/>
+              </a:rPr>
+              <a:t>•  순서는 같다: SRL, 전송 방식, 보호 모드</a:t>
+            </a:r>
+          </a:p>
+          <a:p>
+            <a:pPr algn="l">
+              <a:spcAft>
+                <a:spcPts val="1000"/>
+              </a:spcAft>
+            </a:pPr>
+            <a:r>
+              <a:rPr sz="1700" b="0">
+                <a:solidFill>
+                  <a:srgbClr val="222222"/>
+                </a:solidFill>
+                <a:latin typeface="맑은 고딕"/>
+              </a:rPr>
+              <a:t>•  LogXptMode: SYNC, FASTSYNC, ASYNC</a:t>
+            </a:r>
+          </a:p>
+          <a:p>
+            <a:pPr algn="l">
+              <a:spcAft>
+                <a:spcPts val="1000"/>
+              </a:spcAft>
+            </a:pPr>
+            <a:r>
+              <a:rPr sz="1700" b="0">
+                <a:solidFill>
+                  <a:srgbClr val="222222"/>
+                </a:solidFill>
+                <a:latin typeface="맑은 고딕"/>
+              </a:rPr>
+              <a:t>•  EDIT CONFIGURATION SET PROTECTION MODE AS ...</a:t>
+            </a:r>
+          </a:p>
+          <a:p>
+            <a:pPr algn="l">
+              <a:spcAft>
+                <a:spcPts val="1000"/>
+              </a:spcAft>
+            </a:pPr>
+            <a:r>
+              <a:rPr sz="1700" b="0">
+                <a:solidFill>
+                  <a:srgbClr val="222222"/>
+                </a:solidFill>
+                <a:latin typeface="맑은 고딕"/>
+              </a:rPr>
+              <a:t>•  Primary의 LogXptMode도 함께 설정</a:t>
+            </a:r>
+          </a:p>
+          <a:p>
+            <a:pPr algn="l">
+              <a:spcAft>
+                <a:spcPts val="1000"/>
+              </a:spcAft>
+            </a:pPr>
+            <a:r>
+              <a:rPr sz="1700" b="0">
+                <a:solidFill>
+                  <a:srgbClr val="222222"/>
+                </a:solidFill>
+                <a:latin typeface="맑은 고딕"/>
+              </a:rPr>
+              <a:t>•  RedoRoutes가 있으면 그 값이 우선</a:t>
+            </a:r>
+          </a:p>
+        </p:txBody>
+      </p:sp>
+    </p:spTree>
+  </p:cSld>
+  <p:clrMapOvr>
+    <a:masterClrMapping/>
+  </p:clrMapOvr>
+</p:sld>
+</file>
+
+<file path=ppt/slides/slide41.xml><?xml version="1.0" encoding="utf-8"?>
+<p:sld xmlns:a="http://schemas.openxmlformats.org/drawingml/2006/main" xmlns:p="http://schemas.openxmlformats.org/presentationml/2006/main" xmlns:r="http://schemas.openxmlformats.org/officeDocument/2006/relationships">
+  <p:cSld>
+    <p:spTree>
+      <p:nvGrpSpPr>
+        <p:cNvPr id="1" name=""/>
+        <p:cNvGrpSpPr/>
+        <p:nvPr/>
+      </p:nvGrpSpPr>
+      <p:grpSpPr/>
+      <p:sp>
+        <p:nvSpPr>
+          <p:cNvPr id="2" name="Rectangle 1"/>
+          <p:cNvSpPr/>
+          <p:nvPr/>
+        </p:nvSpPr>
+        <p:spPr>
+          <a:xfrm>
+            <a:off x="0" y="0"/>
+            <a:ext cx="12191695" cy="6858000"/>
+          </a:xfrm>
+          <a:prstGeom prst="rect">
+            <a:avLst/>
+          </a:prstGeom>
+          <a:solidFill>
+            <a:srgbClr val="C0392B"/>
+          </a:solidFill>
+          <a:ln>
+            <a:noFill/>
+          </a:ln>
+          <a:effectLst/>
+        </p:spPr>
+        <p:style>
+          <a:lnRef idx="1">
+            <a:schemeClr val="accent1"/>
+          </a:lnRef>
+          <a:fillRef idx="3">
+            <a:schemeClr val="accent1"/>
+          </a:fillRef>
+          <a:effectRef idx="2">
+            <a:schemeClr val="accent1"/>
+          </a:effectRef>
+          <a:fontRef idx="minor">
+            <a:schemeClr val="lt1"/>
+          </a:fontRef>
+        </p:style>
+        <p:txBody>
+          <a:bodyPr rtlCol="0" anchor="ctr"/>
+          <a:lstStyle/>
+          <a:p>
+            <a:pPr algn="ctr"/>
+          </a:p>
+        </p:txBody>
+      </p:sp>
+      <p:sp>
+        <p:nvSpPr>
+          <p:cNvPr id="3" name="TextBox 2"/>
+          <p:cNvSpPr txBox="1"/>
+          <p:nvPr/>
+        </p:nvSpPr>
+        <p:spPr>
+          <a:xfrm>
+            <a:off x="822960" y="2011680"/>
+            <a:ext cx="10515600" cy="1097280"/>
+          </a:xfrm>
+          <a:prstGeom prst="rect">
+            <a:avLst/>
+          </a:prstGeom>
+          <a:noFill/>
+        </p:spPr>
+        <p:txBody>
+          <a:bodyPr wrap="square">
+            <a:spAutoFit/>
+          </a:bodyPr>
+          <a:lstStyle/>
+          <a:p>
+            <a:pPr algn="l">
+              <a:spcAft>
+                <a:spcPts val="600"/>
+              </a:spcAft>
+            </a:pPr>
+            <a:r>
+              <a:rPr sz="4000" b="1">
+                <a:solidFill>
+                  <a:srgbClr val="FFFFFF"/>
+                </a:solidFill>
+                <a:latin typeface="맑은 고딕"/>
+              </a:rPr>
+              <a:t>2.7</a:t>
+            </a:r>
+          </a:p>
+        </p:txBody>
+      </p:sp>
+      <p:sp>
+        <p:nvSpPr>
+          <p:cNvPr id="4" name="TextBox 3"/>
+          <p:cNvSpPr txBox="1"/>
+          <p:nvPr/>
+        </p:nvSpPr>
+        <p:spPr>
+          <a:xfrm>
+            <a:off x="822960" y="3017520"/>
+            <a:ext cx="10515600" cy="914400"/>
+          </a:xfrm>
+          <a:prstGeom prst="rect">
+            <a:avLst/>
+          </a:prstGeom>
+          <a:noFill/>
+        </p:spPr>
+        <p:txBody>
+          <a:bodyPr wrap="square">
+            <a:spAutoFit/>
+          </a:bodyPr>
+          <a:lstStyle/>
+          <a:p>
+            <a:pPr algn="l">
+              <a:spcAft>
+                <a:spcPts val="600"/>
+              </a:spcAft>
+            </a:pPr>
+            <a:r>
+              <a:rPr sz="2800" b="1">
+                <a:solidFill>
+                  <a:srgbClr val="FFFFFF"/>
+                </a:solidFill>
+                <a:latin typeface="맑은 고딕"/>
+              </a:rPr>
+              <a:t>보호 모드 선택 기준</a:t>
+            </a:r>
+          </a:p>
+        </p:txBody>
+      </p:sp>
+      <p:sp>
+        <p:nvSpPr>
+          <p:cNvPr id="5" name="Rectangle 4"/>
+          <p:cNvSpPr/>
+          <p:nvPr/>
+        </p:nvSpPr>
+        <p:spPr>
+          <a:xfrm>
+            <a:off x="822960" y="4114800"/>
+            <a:ext cx="5486400" cy="54864"/>
+          </a:xfrm>
+          <a:prstGeom prst="rect">
+            <a:avLst/>
+          </a:prstGeom>
+          <a:solidFill>
+            <a:srgbClr val="FFFFFF"/>
+          </a:solidFill>
+          <a:ln>
+            <a:noFill/>
+          </a:ln>
+          <a:effectLst/>
+        </p:spPr>
+        <p:style>
+          <a:lnRef idx="1">
+            <a:schemeClr val="accent1"/>
+          </a:lnRef>
+          <a:fillRef idx="3">
+            <a:schemeClr val="accent1"/>
+          </a:fillRef>
+          <a:effectRef idx="2">
+            <a:schemeClr val="accent1"/>
+          </a:effectRef>
+          <a:fontRef idx="minor">
+            <a:schemeClr val="lt1"/>
+          </a:fontRef>
+        </p:style>
+        <p:txBody>
+          <a:bodyPr rtlCol="0" anchor="ctr"/>
+          <a:lstStyle/>
+          <a:p>
+            <a:pPr algn="ctr"/>
+          </a:p>
+        </p:txBody>
+      </p:sp>
+      <p:sp>
+        <p:nvSpPr>
+          <p:cNvPr id="6" name="TextBox 5"/>
+          <p:cNvSpPr txBox="1"/>
+          <p:nvPr/>
+        </p:nvSpPr>
+        <p:spPr>
+          <a:xfrm>
+            <a:off x="822960" y="4297680"/>
+            <a:ext cx="10058400" cy="2011680"/>
+          </a:xfrm>
+          <a:prstGeom prst="rect">
+            <a:avLst/>
+          </a:prstGeom>
+          <a:noFill/>
+        </p:spPr>
+        <p:txBody>
+          <a:bodyPr wrap="square">
+            <a:spAutoFit/>
+          </a:bodyPr>
+          <a:lstStyle/>
+          <a:p>
+            <a:pPr algn="l">
+              <a:spcAft>
+                <a:spcPts val="800"/>
+              </a:spcAft>
+            </a:pPr>
+            <a:r>
+              <a:rPr sz="1600" b="0">
+                <a:solidFill>
+                  <a:srgbClr val="FFFFFF"/>
+                </a:solidFill>
+                <a:latin typeface="맑은 고딕"/>
+              </a:rPr>
+              <a:t>•  허용 손실과 커밋 지연</a:t>
+            </a:r>
+          </a:p>
+          <a:p>
+            <a:pPr algn="l">
+              <a:spcAft>
+                <a:spcPts val="800"/>
+              </a:spcAft>
+            </a:pPr>
+            <a:r>
+              <a:rPr sz="1600" b="0">
+                <a:solidFill>
+                  <a:srgbClr val="FFFFFF"/>
+                </a:solidFill>
+                <a:latin typeface="맑은 고딕"/>
+              </a:rPr>
+              <a:t>•  거리, Standby 수, 자동 Failover</a:t>
+            </a:r>
+          </a:p>
+          <a:p>
+            <a:pPr algn="l">
+              <a:spcAft>
+                <a:spcPts val="800"/>
+              </a:spcAft>
+            </a:pPr>
+            <a:r>
+              <a:rPr sz="1600" b="0">
+                <a:solidFill>
+                  <a:srgbClr val="FFFFFF"/>
+                </a:solidFill>
+                <a:latin typeface="맑은 고딕"/>
+              </a:rPr>
+              <a:t>•  업무 유형별 예</a:t>
+            </a:r>
+          </a:p>
+        </p:txBody>
+      </p:sp>
+    </p:spTree>
+  </p:cSld>
+  <p:clrMapOvr>
+    <a:masterClrMapping/>
+  </p:clrMapOvr>
+</p:sld>
+</file>
+
+<file path=ppt/slides/slide42.xml><?xml version="1.0" encoding="utf-8"?>
+<p:sld xmlns:a="http://schemas.openxmlformats.org/drawingml/2006/main" xmlns:p="http://schemas.openxmlformats.org/presentationml/2006/main" xmlns:r="http://schemas.openxmlformats.org/officeDocument/2006/relationships">
+  <p:cSld>
+    <p:spTree>
+      <p:nvGrpSpPr>
+        <p:cNvPr id="1" name=""/>
+        <p:cNvGrpSpPr/>
+        <p:nvPr/>
+      </p:nvGrpSpPr>
+      <p:grpSpPr/>
+      <p:sp>
+        <p:nvSpPr>
+          <p:cNvPr id="2" name="Rectangle 1"/>
+          <p:cNvSpPr/>
+          <p:nvPr/>
+        </p:nvSpPr>
+        <p:spPr>
+          <a:xfrm>
+            <a:off x="0" y="0"/>
+            <a:ext cx="12191695" cy="1005840"/>
+          </a:xfrm>
+          <a:prstGeom prst="rect">
+            <a:avLst/>
+          </a:prstGeom>
+          <a:solidFill>
+            <a:srgbClr val="C0392B"/>
+          </a:solidFill>
+          <a:ln>
+            <a:noFill/>
+          </a:ln>
+          <a:effectLst/>
+        </p:spPr>
+        <p:style>
+          <a:lnRef idx="1">
+            <a:schemeClr val="accent1"/>
+          </a:lnRef>
+          <a:fillRef idx="3">
+            <a:schemeClr val="accent1"/>
+          </a:fillRef>
+          <a:effectRef idx="2">
+            <a:schemeClr val="accent1"/>
+          </a:effectRef>
+          <a:fontRef idx="minor">
+            <a:schemeClr val="lt1"/>
+          </a:fontRef>
+        </p:style>
+        <p:txBody>
+          <a:bodyPr rtlCol="0" anchor="ctr"/>
+          <a:lstStyle/>
+          <a:p>
+            <a:pPr algn="ctr"/>
+          </a:p>
+        </p:txBody>
+      </p:sp>
+      <p:sp>
+        <p:nvSpPr>
+          <p:cNvPr id="3" name="TextBox 2"/>
+          <p:cNvSpPr txBox="1"/>
+          <p:nvPr/>
+        </p:nvSpPr>
+        <p:spPr>
+          <a:xfrm>
+            <a:off x="548640" y="91440"/>
+            <a:ext cx="10972800" cy="777240"/>
+          </a:xfrm>
+          <a:prstGeom prst="rect">
+            <a:avLst/>
+          </a:prstGeom>
+          <a:noFill/>
+        </p:spPr>
+        <p:txBody>
+          <a:bodyPr wrap="square">
+            <a:spAutoFit/>
+          </a:bodyPr>
+          <a:lstStyle/>
+          <a:p>
+            <a:pPr algn="l">
+              <a:spcAft>
+                <a:spcPts val="600"/>
+              </a:spcAft>
+            </a:pPr>
+            <a:r>
+              <a:rPr sz="2600" b="1">
+                <a:solidFill>
+                  <a:srgbClr val="FFFFFF"/>
+                </a:solidFill>
+                <a:latin typeface="맑은 고딕"/>
+              </a:rPr>
+              <a:t>허용 손실과 커밋 지연</a:t>
+            </a:r>
+          </a:p>
+        </p:txBody>
+      </p:sp>
+      <p:sp>
+        <p:nvSpPr>
+          <p:cNvPr id="4" name="TextBox 3"/>
+          <p:cNvSpPr txBox="1"/>
+          <p:nvPr/>
+        </p:nvSpPr>
+        <p:spPr>
+          <a:xfrm>
+            <a:off x="640080" y="1078992"/>
+            <a:ext cx="10881360" cy="457200"/>
+          </a:xfrm>
+          <a:prstGeom prst="rect">
+            <a:avLst/>
+          </a:prstGeom>
+          <a:noFill/>
+        </p:spPr>
+        <p:txBody>
+          <a:bodyPr wrap="square">
+            <a:spAutoFit/>
+          </a:bodyPr>
+          <a:lstStyle/>
+          <a:p>
+            <a:pPr algn="l">
+              <a:spcAft>
+                <a:spcPts val="600"/>
+              </a:spcAft>
+            </a:pPr>
+            <a:r>
+              <a:rPr sz="1500" b="0">
+                <a:solidFill>
+                  <a:srgbClr val="5A6672"/>
+                </a:solidFill>
+                <a:latin typeface="맑은 고딕"/>
+              </a:rPr>
+              <a:t>기술 설정이기 전에 업무 결정</a:t>
+            </a:r>
+          </a:p>
+        </p:txBody>
+      </p:sp>
+      <p:sp>
+        <p:nvSpPr>
+          <p:cNvPr id="5" name="TextBox 4"/>
+          <p:cNvSpPr txBox="1"/>
+          <p:nvPr/>
+        </p:nvSpPr>
+        <p:spPr>
+          <a:xfrm>
+            <a:off x="640080" y="1737360"/>
+            <a:ext cx="10881360" cy="4754880"/>
+          </a:xfrm>
+          <a:prstGeom prst="rect">
+            <a:avLst/>
+          </a:prstGeom>
+          <a:noFill/>
+        </p:spPr>
+        <p:txBody>
+          <a:bodyPr wrap="square">
+            <a:spAutoFit/>
+          </a:bodyPr>
+          <a:lstStyle/>
+          <a:p>
+            <a:pPr algn="l">
+              <a:spcAft>
+                <a:spcPts val="1000"/>
+              </a:spcAft>
+            </a:pPr>
+            <a:r>
+              <a:rPr sz="1700" b="0">
+                <a:solidFill>
+                  <a:srgbClr val="222222"/>
+                </a:solidFill>
+                <a:latin typeface="맑은 고딕"/>
+              </a:rPr>
+              <a:t>•  몇 초 손실을 허용하는가 → Performance</a:t>
+            </a:r>
+          </a:p>
+          <a:p>
+            <a:pPr algn="l">
+              <a:spcAft>
+                <a:spcPts val="1000"/>
+              </a:spcAft>
+            </a:pPr>
+            <a:r>
+              <a:rPr sz="1700" b="0">
+                <a:solidFill>
+                  <a:srgbClr val="222222"/>
+                </a:solidFill>
+                <a:latin typeface="맑은 고딕"/>
+              </a:rPr>
+              <a:t>•  한 건도 못 잃는가 → Availability + SYNC</a:t>
+            </a:r>
+          </a:p>
+          <a:p>
+            <a:pPr algn="l">
+              <a:spcAft>
+                <a:spcPts val="1000"/>
+              </a:spcAft>
+            </a:pPr>
+            <a:r>
+              <a:rPr sz="1700" b="0">
+                <a:solidFill>
+                  <a:srgbClr val="222222"/>
+                </a:solidFill>
+                <a:latin typeface="맑은 고딕"/>
+              </a:rPr>
+              <a:t>•  Primary 정지도 감수하는가 → Protection</a:t>
+            </a:r>
+          </a:p>
+          <a:p>
+            <a:pPr algn="l">
+              <a:spcAft>
+                <a:spcPts val="1000"/>
+              </a:spcAft>
+            </a:pPr>
+            <a:r>
+              <a:rPr sz="1700" b="0">
+                <a:solidFill>
+                  <a:srgbClr val="222222"/>
+                </a:solidFill>
+                <a:latin typeface="맑은 고딕"/>
+              </a:rPr>
+              <a:t>•  손실 비용과 중단 비용을 비교</a:t>
+            </a:r>
+          </a:p>
+        </p:txBody>
+      </p:sp>
+    </p:spTree>
+  </p:cSld>
+  <p:clrMapOvr>
+    <a:masterClrMapping/>
+  </p:clrMapOvr>
+</p:sld>
+</file>
+
+<file path=ppt/slides/slide43.xml><?xml version="1.0" encoding="utf-8"?>
+<p:sld xmlns:a="http://schemas.openxmlformats.org/drawingml/2006/main" xmlns:p="http://schemas.openxmlformats.org/presentationml/2006/main" xmlns:r="http://schemas.openxmlformats.org/officeDocument/2006/relationships">
+  <p:cSld>
+    <p:spTree>
+      <p:nvGrpSpPr>
+        <p:cNvPr id="1" name=""/>
+        <p:cNvGrpSpPr/>
+        <p:nvPr/>
+      </p:nvGrpSpPr>
+      <p:grpSpPr/>
+      <p:sp>
+        <p:nvSpPr>
+          <p:cNvPr id="2" name="Rectangle 1"/>
+          <p:cNvSpPr/>
+          <p:nvPr/>
+        </p:nvSpPr>
+        <p:spPr>
+          <a:xfrm>
+            <a:off x="0" y="0"/>
+            <a:ext cx="12191695" cy="1005840"/>
+          </a:xfrm>
+          <a:prstGeom prst="rect">
+            <a:avLst/>
+          </a:prstGeom>
+          <a:solidFill>
+            <a:srgbClr val="C0392B"/>
+          </a:solidFill>
+          <a:ln>
+            <a:noFill/>
+          </a:ln>
+          <a:effectLst/>
+        </p:spPr>
+        <p:style>
+          <a:lnRef idx="1">
+            <a:schemeClr val="accent1"/>
+          </a:lnRef>
+          <a:fillRef idx="3">
+            <a:schemeClr val="accent1"/>
+          </a:fillRef>
+          <a:effectRef idx="2">
+            <a:schemeClr val="accent1"/>
+          </a:effectRef>
+          <a:fontRef idx="minor">
+            <a:schemeClr val="lt1"/>
+          </a:fontRef>
+        </p:style>
+        <p:txBody>
+          <a:bodyPr rtlCol="0" anchor="ctr"/>
+          <a:lstStyle/>
+          <a:p>
+            <a:pPr algn="ctr"/>
+          </a:p>
+        </p:txBody>
+      </p:sp>
+      <p:sp>
+        <p:nvSpPr>
+          <p:cNvPr id="3" name="TextBox 2"/>
+          <p:cNvSpPr txBox="1"/>
+          <p:nvPr/>
+        </p:nvSpPr>
+        <p:spPr>
+          <a:xfrm>
+            <a:off x="548640" y="91440"/>
+            <a:ext cx="10972800" cy="777240"/>
+          </a:xfrm>
+          <a:prstGeom prst="rect">
+            <a:avLst/>
+          </a:prstGeom>
+          <a:noFill/>
+        </p:spPr>
+        <p:txBody>
+          <a:bodyPr wrap="square">
+            <a:spAutoFit/>
+          </a:bodyPr>
+          <a:lstStyle/>
+          <a:p>
+            <a:pPr algn="l">
+              <a:spcAft>
+                <a:spcPts val="600"/>
+              </a:spcAft>
+            </a:pPr>
+            <a:r>
+              <a:rPr sz="2600" b="1">
+                <a:solidFill>
+                  <a:srgbClr val="FFFFFF"/>
+                </a:solidFill>
+                <a:latin typeface="맑은 고딕"/>
+              </a:rPr>
+              <a:t>거리와 네트워크</a:t>
+            </a:r>
+          </a:p>
+        </p:txBody>
+      </p:sp>
+      <p:sp>
+        <p:nvSpPr>
+          <p:cNvPr id="4" name="TextBox 3"/>
+          <p:cNvSpPr txBox="1"/>
+          <p:nvPr/>
+        </p:nvSpPr>
+        <p:spPr>
+          <a:xfrm>
+            <a:off x="640080" y="1078992"/>
+            <a:ext cx="10881360" cy="457200"/>
+          </a:xfrm>
+          <a:prstGeom prst="rect">
+            <a:avLst/>
+          </a:prstGeom>
+          <a:noFill/>
+        </p:spPr>
+        <p:txBody>
+          <a:bodyPr wrap="square">
+            <a:spAutoFit/>
+          </a:bodyPr>
+          <a:lstStyle/>
+          <a:p>
+            <a:pPr algn="l">
+              <a:spcAft>
+                <a:spcPts val="600"/>
+              </a:spcAft>
+            </a:pPr>
+            <a:r>
+              <a:rPr sz="1500" b="0">
+                <a:solidFill>
+                  <a:srgbClr val="5A6672"/>
+                </a:solidFill>
+                <a:latin typeface="맑은 고딕"/>
+              </a:rPr>
+              <a:t>SYNC는 커밋마다 왕복 지연을 낸다</a:t>
+            </a:r>
+          </a:p>
+        </p:txBody>
+      </p:sp>
+      <p:sp>
+        <p:nvSpPr>
+          <p:cNvPr id="5" name="TextBox 4"/>
+          <p:cNvSpPr txBox="1"/>
+          <p:nvPr/>
+        </p:nvSpPr>
+        <p:spPr>
+          <a:xfrm>
+            <a:off x="640080" y="1737360"/>
+            <a:ext cx="10881360" cy="4754880"/>
+          </a:xfrm>
+          <a:prstGeom prst="rect">
+            <a:avLst/>
+          </a:prstGeom>
+          <a:noFill/>
+        </p:spPr>
+        <p:txBody>
+          <a:bodyPr wrap="square">
+            <a:spAutoFit/>
+          </a:bodyPr>
+          <a:lstStyle/>
+          <a:p>
+            <a:pPr algn="l">
+              <a:spcAft>
+                <a:spcPts val="1000"/>
+              </a:spcAft>
+            </a:pPr>
+            <a:r>
+              <a:rPr sz="1700" b="0">
+                <a:solidFill>
+                  <a:srgbClr val="222222"/>
+                </a:solidFill>
+                <a:latin typeface="맑은 고딕"/>
+              </a:rPr>
+              <a:t>•  같은 도시 안: 대개 감당 가능</a:t>
+            </a:r>
+          </a:p>
+          <a:p>
+            <a:pPr algn="l">
+              <a:spcAft>
+                <a:spcPts val="1000"/>
+              </a:spcAft>
+            </a:pPr>
+            <a:r>
+              <a:rPr sz="1700" b="0">
+                <a:solidFill>
+                  <a:srgbClr val="222222"/>
+                </a:solidFill>
+                <a:latin typeface="맑은 고딕"/>
+              </a:rPr>
+              <a:t>•  수백 km 이상: OLTP 응답 시간 증가</a:t>
+            </a:r>
+          </a:p>
+          <a:p>
+            <a:pPr algn="l">
+              <a:spcAft>
+                <a:spcPts val="1000"/>
+              </a:spcAft>
+            </a:pPr>
+            <a:r>
+              <a:rPr sz="1700" b="0">
+                <a:solidFill>
+                  <a:srgbClr val="222222"/>
+                </a:solidFill>
+                <a:latin typeface="맑은 고딕"/>
+              </a:rPr>
+              <a:t>•  FASTSYNC는 디스크 시간만 줄임</a:t>
+            </a:r>
+          </a:p>
+          <a:p>
+            <a:pPr algn="l">
+              <a:spcAft>
+                <a:spcPts val="1000"/>
+              </a:spcAft>
+            </a:pPr>
+            <a:r>
+              <a:rPr sz="1700" b="0">
+                <a:solidFill>
+                  <a:srgbClr val="222222"/>
+                </a:solidFill>
+                <a:latin typeface="맑은 고딕"/>
+              </a:rPr>
+              <a:t>•  원거리 무손실: Far Sync(ADG 옵션, 10장)</a:t>
+            </a:r>
+          </a:p>
+          <a:p>
+            <a:pPr algn="l">
+              <a:spcAft>
+                <a:spcPts val="1000"/>
+              </a:spcAft>
+            </a:pPr>
+            <a:r>
+              <a:rPr sz="1700" b="0">
+                <a:solidFill>
+                  <a:srgbClr val="222222"/>
+                </a:solidFill>
+                <a:latin typeface="맑은 고딕"/>
+              </a:rPr>
+              <a:t>•  대역폭 부족 시 ASYNC도 lag 누적</a:t>
+            </a:r>
+          </a:p>
+        </p:txBody>
+      </p:sp>
+    </p:spTree>
+  </p:cSld>
+  <p:clrMapOvr>
+    <a:masterClrMapping/>
+  </p:clrMapOvr>
+</p:sld>
+</file>
+
+<file path=ppt/slides/slide44.xml><?xml version="1.0" encoding="utf-8"?>
+<p:sld xmlns:a="http://schemas.openxmlformats.org/drawingml/2006/main" xmlns:p="http://schemas.openxmlformats.org/presentationml/2006/main" xmlns:r="http://schemas.openxmlformats.org/officeDocument/2006/relationships">
+  <p:cSld>
+    <p:spTree>
+      <p:nvGrpSpPr>
+        <p:cNvPr id="1" name=""/>
+        <p:cNvGrpSpPr/>
+        <p:nvPr/>
+      </p:nvGrpSpPr>
+      <p:grpSpPr/>
+      <p:sp>
+        <p:nvSpPr>
+          <p:cNvPr id="2" name="Rectangle 1"/>
+          <p:cNvSpPr/>
+          <p:nvPr/>
+        </p:nvSpPr>
+        <p:spPr>
+          <a:xfrm>
+            <a:off x="0" y="0"/>
+            <a:ext cx="12191695" cy="1005840"/>
+          </a:xfrm>
+          <a:prstGeom prst="rect">
+            <a:avLst/>
+          </a:prstGeom>
+          <a:solidFill>
+            <a:srgbClr val="C0392B"/>
+          </a:solidFill>
+          <a:ln>
+            <a:noFill/>
+          </a:ln>
+          <a:effectLst/>
+        </p:spPr>
+        <p:style>
+          <a:lnRef idx="1">
+            <a:schemeClr val="accent1"/>
+          </a:lnRef>
+          <a:fillRef idx="3">
+            <a:schemeClr val="accent1"/>
+          </a:fillRef>
+          <a:effectRef idx="2">
+            <a:schemeClr val="accent1"/>
+          </a:effectRef>
+          <a:fontRef idx="minor">
+            <a:schemeClr val="lt1"/>
+          </a:fontRef>
+        </p:style>
+        <p:txBody>
+          <a:bodyPr rtlCol="0" anchor="ctr"/>
+          <a:lstStyle/>
+          <a:p>
+            <a:pPr algn="ctr"/>
+          </a:p>
+        </p:txBody>
+      </p:sp>
+      <p:sp>
+        <p:nvSpPr>
+          <p:cNvPr id="3" name="TextBox 2"/>
+          <p:cNvSpPr txBox="1"/>
+          <p:nvPr/>
+        </p:nvSpPr>
+        <p:spPr>
+          <a:xfrm>
+            <a:off x="548640" y="91440"/>
+            <a:ext cx="10972800" cy="777240"/>
+          </a:xfrm>
+          <a:prstGeom prst="rect">
+            <a:avLst/>
+          </a:prstGeom>
+          <a:noFill/>
+        </p:spPr>
+        <p:txBody>
+          <a:bodyPr wrap="square">
+            <a:spAutoFit/>
+          </a:bodyPr>
+          <a:lstStyle/>
+          <a:p>
+            <a:pPr algn="l">
+              <a:spcAft>
+                <a:spcPts val="600"/>
+              </a:spcAft>
+            </a:pPr>
+            <a:r>
+              <a:rPr sz="2600" b="1">
+                <a:solidFill>
+                  <a:srgbClr val="FFFFFF"/>
+                </a:solidFill>
+                <a:latin typeface="맑은 고딕"/>
+              </a:rPr>
+              <a:t>Standby 수와 구성</a:t>
+            </a:r>
+          </a:p>
+        </p:txBody>
+      </p:sp>
+      <p:sp>
+        <p:nvSpPr>
+          <p:cNvPr id="4" name="TextBox 3"/>
+          <p:cNvSpPr txBox="1"/>
+          <p:nvPr/>
+        </p:nvSpPr>
+        <p:spPr>
+          <a:xfrm>
+            <a:off x="640080" y="1078992"/>
+            <a:ext cx="10881360" cy="457200"/>
+          </a:xfrm>
+          <a:prstGeom prst="rect">
+            <a:avLst/>
+          </a:prstGeom>
+          <a:noFill/>
+        </p:spPr>
+        <p:txBody>
+          <a:bodyPr wrap="square">
+            <a:spAutoFit/>
+          </a:bodyPr>
+          <a:lstStyle/>
+          <a:p>
+            <a:pPr algn="l">
+              <a:spcAft>
+                <a:spcPts val="600"/>
+              </a:spcAft>
+            </a:pPr>
+            <a:r>
+              <a:rPr sz="1500" b="0">
+                <a:solidFill>
+                  <a:srgbClr val="5A6672"/>
+                </a:solidFill>
+                <a:latin typeface="맑은 고딕"/>
+              </a:rPr>
+              <a:t>보호 모드는 구성 전체에 하나</a:t>
+            </a:r>
+          </a:p>
+        </p:txBody>
+      </p:sp>
+      <p:sp>
+        <p:nvSpPr>
+          <p:cNvPr id="5" name="TextBox 4"/>
+          <p:cNvSpPr txBox="1"/>
+          <p:nvPr/>
+        </p:nvSpPr>
+        <p:spPr>
+          <a:xfrm>
+            <a:off x="640080" y="1737360"/>
+            <a:ext cx="10881360" cy="4754880"/>
+          </a:xfrm>
+          <a:prstGeom prst="rect">
+            <a:avLst/>
+          </a:prstGeom>
+          <a:noFill/>
+        </p:spPr>
+        <p:txBody>
+          <a:bodyPr wrap="square">
+            <a:spAutoFit/>
+          </a:bodyPr>
+          <a:lstStyle/>
+          <a:p>
+            <a:pPr algn="l">
+              <a:spcAft>
+                <a:spcPts val="1000"/>
+              </a:spcAft>
+            </a:pPr>
+            <a:r>
+              <a:rPr sz="1700" b="0">
+                <a:solidFill>
+                  <a:srgbClr val="222222"/>
+                </a:solidFill>
+                <a:latin typeface="맑은 고딕"/>
+              </a:rPr>
+              <a:t>•  Protection은 SYNC AFFIRM Standby 2개 이상</a:t>
+            </a:r>
+          </a:p>
+          <a:p>
+            <a:pPr algn="l">
+              <a:spcAft>
+                <a:spcPts val="1000"/>
+              </a:spcAft>
+            </a:pPr>
+            <a:r>
+              <a:rPr sz="1700" b="0">
+                <a:solidFill>
+                  <a:srgbClr val="222222"/>
+                </a:solidFill>
+                <a:latin typeface="맑은 고딕"/>
+              </a:rPr>
+              <a:t>•  흔한 구성: 근거리 SYNC + 원거리 ASYNC</a:t>
+            </a:r>
+          </a:p>
+          <a:p>
+            <a:pPr algn="l">
+              <a:spcAft>
+                <a:spcPts val="1000"/>
+              </a:spcAft>
+            </a:pPr>
+            <a:r>
+              <a:rPr sz="1700" b="0">
+                <a:solidFill>
+                  <a:srgbClr val="222222"/>
+                </a:solidFill>
+                <a:latin typeface="맑은 고딕"/>
+              </a:rPr>
+              <a:t>•  모드는 하나, 전송 방식은 목적지별</a:t>
+            </a:r>
+          </a:p>
+          <a:p>
+            <a:pPr algn="l">
+              <a:spcAft>
+                <a:spcPts val="1000"/>
+              </a:spcAft>
+            </a:pPr>
+            <a:r>
+              <a:rPr sz="1700" b="0">
+                <a:solidFill>
+                  <a:srgbClr val="222222"/>
+                </a:solidFill>
+                <a:latin typeface="맑은 고딕"/>
+              </a:rPr>
+              <a:t>•  ASYNC 쪽이 끊겨도 보호 수준 유지</a:t>
+            </a:r>
+          </a:p>
+        </p:txBody>
+      </p:sp>
+    </p:spTree>
+  </p:cSld>
+  <p:clrMapOvr>
+    <a:masterClrMapping/>
+  </p:clrMapOvr>
+</p:sld>
+</file>
+
+<file path=ppt/slides/slide45.xml><?xml version="1.0" encoding="utf-8"?>
+<p:sld xmlns:a="http://schemas.openxmlformats.org/drawingml/2006/main" xmlns:p="http://schemas.openxmlformats.org/presentationml/2006/main" xmlns:r="http://schemas.openxmlformats.org/officeDocument/2006/relationships">
+  <p:cSld>
+    <p:spTree>
+      <p:nvGrpSpPr>
+        <p:cNvPr id="1" name=""/>
+        <p:cNvGrpSpPr/>
+        <p:nvPr/>
+      </p:nvGrpSpPr>
+      <p:grpSpPr/>
+      <p:sp>
+        <p:nvSpPr>
+          <p:cNvPr id="2" name="Rectangle 1"/>
+          <p:cNvSpPr/>
+          <p:nvPr/>
+        </p:nvSpPr>
+        <p:spPr>
+          <a:xfrm>
+            <a:off x="0" y="0"/>
+            <a:ext cx="12191695" cy="1005840"/>
+          </a:xfrm>
+          <a:prstGeom prst="rect">
+            <a:avLst/>
+          </a:prstGeom>
+          <a:solidFill>
+            <a:srgbClr val="C0392B"/>
+          </a:solidFill>
+          <a:ln>
+            <a:noFill/>
+          </a:ln>
+          <a:effectLst/>
+        </p:spPr>
+        <p:style>
+          <a:lnRef idx="1">
+            <a:schemeClr val="accent1"/>
+          </a:lnRef>
+          <a:fillRef idx="3">
+            <a:schemeClr val="accent1"/>
+          </a:fillRef>
+          <a:effectRef idx="2">
+            <a:schemeClr val="accent1"/>
+          </a:effectRef>
+          <a:fontRef idx="minor">
+            <a:schemeClr val="lt1"/>
+          </a:fontRef>
+        </p:style>
+        <p:txBody>
+          <a:bodyPr rtlCol="0" anchor="ctr"/>
+          <a:lstStyle/>
+          <a:p>
+            <a:pPr algn="ctr"/>
+          </a:p>
+        </p:txBody>
+      </p:sp>
+      <p:sp>
+        <p:nvSpPr>
+          <p:cNvPr id="3" name="TextBox 2"/>
+          <p:cNvSpPr txBox="1"/>
+          <p:nvPr/>
+        </p:nvSpPr>
+        <p:spPr>
+          <a:xfrm>
+            <a:off x="548640" y="91440"/>
+            <a:ext cx="10972800" cy="777240"/>
+          </a:xfrm>
+          <a:prstGeom prst="rect">
+            <a:avLst/>
+          </a:prstGeom>
+          <a:noFill/>
+        </p:spPr>
+        <p:txBody>
+          <a:bodyPr wrap="square">
+            <a:spAutoFit/>
+          </a:bodyPr>
+          <a:lstStyle/>
+          <a:p>
+            <a:pPr algn="l">
+              <a:spcAft>
+                <a:spcPts val="600"/>
+              </a:spcAft>
+            </a:pPr>
+            <a:r>
+              <a:rPr sz="2600" b="1">
+                <a:solidFill>
+                  <a:srgbClr val="FFFFFF"/>
+                </a:solidFill>
+                <a:latin typeface="맑은 고딕"/>
+              </a:rPr>
+              <a:t>자동 Failover와의 관계</a:t>
+            </a:r>
+          </a:p>
+        </p:txBody>
+      </p:sp>
+      <p:sp>
+        <p:nvSpPr>
+          <p:cNvPr id="4" name="TextBox 3"/>
+          <p:cNvSpPr txBox="1"/>
+          <p:nvPr/>
+        </p:nvSpPr>
+        <p:spPr>
+          <a:xfrm>
+            <a:off x="640080" y="1078992"/>
+            <a:ext cx="10881360" cy="457200"/>
+          </a:xfrm>
+          <a:prstGeom prst="rect">
+            <a:avLst/>
+          </a:prstGeom>
+          <a:noFill/>
+        </p:spPr>
+        <p:txBody>
+          <a:bodyPr wrap="square">
+            <a:spAutoFit/>
+          </a:bodyPr>
+          <a:lstStyle/>
+          <a:p>
+            <a:pPr algn="l">
+              <a:spcAft>
+                <a:spcPts val="600"/>
+              </a:spcAft>
+            </a:pPr>
+            <a:r>
+              <a:rPr sz="1500" b="0">
+                <a:solidFill>
+                  <a:srgbClr val="5A6672"/>
+                </a:solidFill>
+                <a:latin typeface="맑은 고딕"/>
+              </a:rPr>
+              <a:t>Fast-Start Failover와 보호 모드</a:t>
+            </a:r>
+          </a:p>
+        </p:txBody>
+      </p:sp>
+      <p:sp>
+        <p:nvSpPr>
+          <p:cNvPr id="5" name="TextBox 4"/>
+          <p:cNvSpPr txBox="1"/>
+          <p:nvPr/>
+        </p:nvSpPr>
+        <p:spPr>
+          <a:xfrm>
+            <a:off x="640080" y="1737360"/>
+            <a:ext cx="10881360" cy="4754880"/>
+          </a:xfrm>
+          <a:prstGeom prst="rect">
+            <a:avLst/>
+          </a:prstGeom>
+          <a:noFill/>
+        </p:spPr>
+        <p:txBody>
+          <a:bodyPr wrap="square">
+            <a:spAutoFit/>
+          </a:bodyPr>
+          <a:lstStyle/>
+          <a:p>
+            <a:pPr algn="l">
+              <a:spcAft>
+                <a:spcPts val="1000"/>
+              </a:spcAft>
+            </a:pPr>
+            <a:r>
+              <a:rPr sz="1700" b="0">
+                <a:solidFill>
+                  <a:srgbClr val="222222"/>
+                </a:solidFill>
+                <a:latin typeface="맑은 고딕"/>
+              </a:rPr>
+              <a:t>•  교재: Availability나 Performance에서 사용</a:t>
+            </a:r>
+          </a:p>
+          <a:p>
+            <a:pPr algn="l">
+              <a:spcAft>
+                <a:spcPts val="1000"/>
+              </a:spcAft>
+            </a:pPr>
+            <a:r>
+              <a:rPr sz="1700" b="0">
+                <a:solidFill>
+                  <a:srgbClr val="222222"/>
+                </a:solidFill>
+                <a:latin typeface="맑은 고딕"/>
+              </a:rPr>
+              <a:t>•  12.2부터 Protection도 가능, Standby 2개 이상</a:t>
+            </a:r>
+          </a:p>
+          <a:p>
+            <a:pPr algn="l">
+              <a:spcAft>
+                <a:spcPts val="1000"/>
+              </a:spcAft>
+            </a:pPr>
+            <a:r>
+              <a:rPr sz="1700" b="0">
+                <a:solidFill>
+                  <a:srgbClr val="222222"/>
+                </a:solidFill>
+                <a:latin typeface="맑은 고딕"/>
+              </a:rPr>
+              <a:t>•  Availability: 무손실 자동 Failover</a:t>
+            </a:r>
+          </a:p>
+          <a:p>
+            <a:pPr algn="l">
+              <a:spcAft>
+                <a:spcPts val="1000"/>
+              </a:spcAft>
+            </a:pPr>
+            <a:r>
+              <a:rPr sz="1700" b="0">
+                <a:solidFill>
+                  <a:srgbClr val="222222"/>
+                </a:solidFill>
+                <a:latin typeface="맑은 고딕"/>
+              </a:rPr>
+              <a:t>•  Performance: FastStartFailoverLagLimit 안에서만</a:t>
+            </a:r>
+          </a:p>
+        </p:txBody>
+      </p:sp>
+    </p:spTree>
+  </p:cSld>
+  <p:clrMapOvr>
+    <a:masterClrMapping/>
+  </p:clrMapOvr>
+</p:sld>
+</file>
+
+<file path=ppt/slides/slide46.xml><?xml version="1.0" encoding="utf-8"?>
+<p:sld xmlns:a="http://schemas.openxmlformats.org/drawingml/2006/main" xmlns:p="http://schemas.openxmlformats.org/presentationml/2006/main" xmlns:r="http://schemas.openxmlformats.org/officeDocument/2006/relationships">
+  <p:cSld>
+    <p:spTree>
+      <p:nvGrpSpPr>
+        <p:cNvPr id="1" name=""/>
+        <p:cNvGrpSpPr/>
+        <p:nvPr/>
+      </p:nvGrpSpPr>
+      <p:grpSpPr/>
+      <p:sp>
+        <p:nvSpPr>
+          <p:cNvPr id="2" name="Rectangle 1"/>
+          <p:cNvSpPr/>
+          <p:nvPr/>
+        </p:nvSpPr>
+        <p:spPr>
+          <a:xfrm>
+            <a:off x="0" y="0"/>
+            <a:ext cx="12191695" cy="1005840"/>
+          </a:xfrm>
+          <a:prstGeom prst="rect">
+            <a:avLst/>
+          </a:prstGeom>
+          <a:solidFill>
+            <a:srgbClr val="C0392B"/>
+          </a:solidFill>
+          <a:ln>
+            <a:noFill/>
+          </a:ln>
+          <a:effectLst/>
+        </p:spPr>
+        <p:style>
+          <a:lnRef idx="1">
+            <a:schemeClr val="accent1"/>
+          </a:lnRef>
+          <a:fillRef idx="3">
+            <a:schemeClr val="accent1"/>
+          </a:fillRef>
+          <a:effectRef idx="2">
+            <a:schemeClr val="accent1"/>
+          </a:effectRef>
+          <a:fontRef idx="minor">
+            <a:schemeClr val="lt1"/>
+          </a:fontRef>
+        </p:style>
+        <p:txBody>
+          <a:bodyPr rtlCol="0" anchor="ctr"/>
+          <a:lstStyle/>
+          <a:p>
+            <a:pPr algn="ctr"/>
+          </a:p>
+        </p:txBody>
+      </p:sp>
+      <p:sp>
+        <p:nvSpPr>
+          <p:cNvPr id="3" name="TextBox 2"/>
+          <p:cNvSpPr txBox="1"/>
+          <p:nvPr/>
+        </p:nvSpPr>
+        <p:spPr>
+          <a:xfrm>
+            <a:off x="548640" y="91440"/>
+            <a:ext cx="10972800" cy="777240"/>
+          </a:xfrm>
+          <a:prstGeom prst="rect">
+            <a:avLst/>
+          </a:prstGeom>
+          <a:noFill/>
+        </p:spPr>
+        <p:txBody>
+          <a:bodyPr wrap="square">
+            <a:spAutoFit/>
+          </a:bodyPr>
+          <a:lstStyle/>
+          <a:p>
+            <a:pPr algn="l">
+              <a:spcAft>
+                <a:spcPts val="600"/>
+              </a:spcAft>
+            </a:pPr>
+            <a:r>
+              <a:rPr sz="2600" b="1">
+                <a:solidFill>
+                  <a:srgbClr val="FFFFFF"/>
+                </a:solidFill>
+                <a:latin typeface="맑은 고딕"/>
+              </a:rPr>
+              <a:t>업무 유형별 선택 예</a:t>
+            </a:r>
+          </a:p>
+        </p:txBody>
+      </p:sp>
+      <p:sp>
+        <p:nvSpPr>
+          <p:cNvPr id="4" name="TextBox 3"/>
+          <p:cNvSpPr txBox="1"/>
+          <p:nvPr/>
+        </p:nvSpPr>
+        <p:spPr>
+          <a:xfrm>
+            <a:off x="640080" y="1078992"/>
+            <a:ext cx="10881360" cy="457200"/>
+          </a:xfrm>
+          <a:prstGeom prst="rect">
+            <a:avLst/>
+          </a:prstGeom>
+          <a:noFill/>
+        </p:spPr>
+        <p:txBody>
+          <a:bodyPr wrap="square">
+            <a:spAutoFit/>
+          </a:bodyPr>
+          <a:lstStyle/>
+          <a:p>
+            <a:pPr algn="l">
+              <a:spcAft>
+                <a:spcPts val="600"/>
+              </a:spcAft>
+            </a:pPr>
+            <a:r>
+              <a:rPr sz="1500" b="0">
+                <a:solidFill>
+                  <a:srgbClr val="5A6672"/>
+                </a:solidFill>
+                <a:latin typeface="맑은 고딕"/>
+              </a:rPr>
+              <a:t>출발점일 뿐, 측정으로 확정한다</a:t>
+            </a:r>
+          </a:p>
+        </p:txBody>
+      </p:sp>
+      <p:sp>
+        <p:nvSpPr>
+          <p:cNvPr id="5" name="TextBox 4"/>
+          <p:cNvSpPr txBox="1"/>
+          <p:nvPr/>
+        </p:nvSpPr>
+        <p:spPr>
+          <a:xfrm>
+            <a:off x="640080" y="1737360"/>
+            <a:ext cx="10881360" cy="4754880"/>
+          </a:xfrm>
+          <a:prstGeom prst="rect">
+            <a:avLst/>
+          </a:prstGeom>
+          <a:noFill/>
+        </p:spPr>
+        <p:txBody>
+          <a:bodyPr wrap="square">
+            <a:spAutoFit/>
+          </a:bodyPr>
+          <a:lstStyle/>
+          <a:p>
+            <a:pPr algn="l">
+              <a:spcAft>
+                <a:spcPts val="1000"/>
+              </a:spcAft>
+            </a:pPr>
+            <a:r>
+              <a:rPr sz="1700" b="0">
+                <a:solidFill>
+                  <a:srgbClr val="222222"/>
+                </a:solidFill>
+                <a:latin typeface="맑은 고딕"/>
+              </a:rPr>
+              <a:t>•  그룹웨어·리포팅: Performance + ASYNC</a:t>
+            </a:r>
+          </a:p>
+          <a:p>
+            <a:pPr algn="l">
+              <a:spcAft>
+                <a:spcPts val="1000"/>
+              </a:spcAft>
+            </a:pPr>
+            <a:r>
+              <a:rPr sz="1700" b="0">
+                <a:solidFill>
+                  <a:srgbClr val="222222"/>
+                </a:solidFill>
+                <a:latin typeface="맑은 고딕"/>
+              </a:rPr>
+              <a:t>•  온라인 주문·회원: Availability + SYNC/FASTSYNC</a:t>
+            </a:r>
+          </a:p>
+          <a:p>
+            <a:pPr algn="l">
+              <a:spcAft>
+                <a:spcPts val="1000"/>
+              </a:spcAft>
+            </a:pPr>
+            <a:r>
+              <a:rPr sz="1700" b="0">
+                <a:solidFill>
+                  <a:srgbClr val="222222"/>
+                </a:solidFill>
+                <a:latin typeface="맑은 고딕"/>
+              </a:rPr>
+              <a:t>•  결제 원장: Availability + SYNC AFFIRM 이상</a:t>
+            </a:r>
+          </a:p>
+          <a:p>
+            <a:pPr algn="l">
+              <a:spcAft>
+                <a:spcPts val="1000"/>
+              </a:spcAft>
+            </a:pPr>
+            <a:r>
+              <a:rPr sz="1700" b="0">
+                <a:solidFill>
+                  <a:srgbClr val="222222"/>
+                </a:solidFill>
+                <a:latin typeface="맑은 고딕"/>
+              </a:rPr>
+              <a:t>•  원거리 DR 전용: Performance + ASYNC(+압축)</a:t>
+            </a:r>
+          </a:p>
+        </p:txBody>
+      </p:sp>
+    </p:spTree>
+  </p:cSld>
+  <p:clrMapOvr>
+    <a:masterClrMapping/>
+  </p:clrMapOvr>
+</p:sld>
+</file>
+
+<file path=ppt/slides/slide47.xml><?xml version="1.0" encoding="utf-8"?>
+<p:sld xmlns:a="http://schemas.openxmlformats.org/drawingml/2006/main" xmlns:p="http://schemas.openxmlformats.org/presentationml/2006/main" xmlns:r="http://schemas.openxmlformats.org/officeDocument/2006/relationships">
+  <p:cSld>
+    <p:spTree>
+      <p:nvGrpSpPr>
+        <p:cNvPr id="1" name=""/>
+        <p:cNvGrpSpPr/>
+        <p:nvPr/>
+      </p:nvGrpSpPr>
+      <p:grpSpPr/>
+      <p:sp>
+        <p:nvSpPr>
+          <p:cNvPr id="2" name="Rectangle 1"/>
+          <p:cNvSpPr/>
+          <p:nvPr/>
+        </p:nvSpPr>
+        <p:spPr>
+          <a:xfrm>
+            <a:off x="0" y="0"/>
+            <a:ext cx="12191695" cy="6858000"/>
+          </a:xfrm>
+          <a:prstGeom prst="rect">
+            <a:avLst/>
+          </a:prstGeom>
+          <a:solidFill>
+            <a:srgbClr val="C0392B"/>
+          </a:solidFill>
+          <a:ln>
+            <a:noFill/>
+          </a:ln>
+          <a:effectLst/>
+        </p:spPr>
+        <p:style>
+          <a:lnRef idx="1">
+            <a:schemeClr val="accent1"/>
+          </a:lnRef>
+          <a:fillRef idx="3">
+            <a:schemeClr val="accent1"/>
+          </a:fillRef>
+          <a:effectRef idx="2">
+            <a:schemeClr val="accent1"/>
+          </a:effectRef>
+          <a:fontRef idx="minor">
+            <a:schemeClr val="lt1"/>
+          </a:fontRef>
+        </p:style>
+        <p:txBody>
+          <a:bodyPr rtlCol="0" anchor="ctr"/>
+          <a:lstStyle/>
+          <a:p>
+            <a:pPr algn="ctr"/>
+          </a:p>
+        </p:txBody>
+      </p:sp>
+      <p:sp>
+        <p:nvSpPr>
+          <p:cNvPr id="3" name="TextBox 2"/>
+          <p:cNvSpPr txBox="1"/>
+          <p:nvPr/>
+        </p:nvSpPr>
+        <p:spPr>
+          <a:xfrm>
+            <a:off x="822960" y="2011680"/>
+            <a:ext cx="10515600" cy="1097280"/>
+          </a:xfrm>
+          <a:prstGeom prst="rect">
+            <a:avLst/>
+          </a:prstGeom>
+          <a:noFill/>
+        </p:spPr>
+        <p:txBody>
+          <a:bodyPr wrap="square">
+            <a:spAutoFit/>
+          </a:bodyPr>
+          <a:lstStyle/>
+          <a:p>
+            <a:pPr algn="l">
+              <a:spcAft>
+                <a:spcPts val="600"/>
+              </a:spcAft>
+            </a:pPr>
+            <a:r>
+              <a:rPr sz="4000" b="1">
+                <a:solidFill>
+                  <a:srgbClr val="FFFFFF"/>
+                </a:solidFill>
+                <a:latin typeface="맑은 고딕"/>
+              </a:rPr>
+              <a:t>2.8</a:t>
+            </a:r>
+          </a:p>
+        </p:txBody>
+      </p:sp>
+      <p:sp>
+        <p:nvSpPr>
+          <p:cNvPr id="4" name="TextBox 3"/>
+          <p:cNvSpPr txBox="1"/>
+          <p:nvPr/>
+        </p:nvSpPr>
+        <p:spPr>
+          <a:xfrm>
+            <a:off x="822960" y="3017520"/>
+            <a:ext cx="10515600" cy="914400"/>
+          </a:xfrm>
+          <a:prstGeom prst="rect">
+            <a:avLst/>
+          </a:prstGeom>
+          <a:noFill/>
+        </p:spPr>
+        <p:txBody>
+          <a:bodyPr wrap="square">
+            <a:spAutoFit/>
+          </a:bodyPr>
+          <a:lstStyle/>
+          <a:p>
+            <a:pPr algn="l">
+              <a:spcAft>
+                <a:spcPts val="600"/>
+              </a:spcAft>
+            </a:pPr>
+            <a:r>
+              <a:rPr sz="2800" b="1">
+                <a:solidFill>
+                  <a:srgbClr val="FFFFFF"/>
+                </a:solidFill>
+                <a:latin typeface="맑은 고딕"/>
+              </a:rPr>
+              <a:t>운영 시 주의점</a:t>
+            </a:r>
+          </a:p>
+        </p:txBody>
+      </p:sp>
+      <p:sp>
+        <p:nvSpPr>
+          <p:cNvPr id="5" name="Rectangle 4"/>
+          <p:cNvSpPr/>
+          <p:nvPr/>
+        </p:nvSpPr>
+        <p:spPr>
+          <a:xfrm>
+            <a:off x="822960" y="4114800"/>
+            <a:ext cx="5486400" cy="54864"/>
+          </a:xfrm>
+          <a:prstGeom prst="rect">
+            <a:avLst/>
+          </a:prstGeom>
+          <a:solidFill>
+            <a:srgbClr val="FFFFFF"/>
+          </a:solidFill>
+          <a:ln>
+            <a:noFill/>
+          </a:ln>
+          <a:effectLst/>
+        </p:spPr>
+        <p:style>
+          <a:lnRef idx="1">
+            <a:schemeClr val="accent1"/>
+          </a:lnRef>
+          <a:fillRef idx="3">
+            <a:schemeClr val="accent1"/>
+          </a:fillRef>
+          <a:effectRef idx="2">
+            <a:schemeClr val="accent1"/>
+          </a:effectRef>
+          <a:fontRef idx="minor">
+            <a:schemeClr val="lt1"/>
+          </a:fontRef>
+        </p:style>
+        <p:txBody>
+          <a:bodyPr rtlCol="0" anchor="ctr"/>
+          <a:lstStyle/>
+          <a:p>
+            <a:pPr algn="ctr"/>
+          </a:p>
+        </p:txBody>
+      </p:sp>
+      <p:sp>
+        <p:nvSpPr>
+          <p:cNvPr id="6" name="TextBox 5"/>
+          <p:cNvSpPr txBox="1"/>
+          <p:nvPr/>
+        </p:nvSpPr>
+        <p:spPr>
+          <a:xfrm>
+            <a:off x="822960" y="4297680"/>
+            <a:ext cx="10058400" cy="2011680"/>
+          </a:xfrm>
+          <a:prstGeom prst="rect">
+            <a:avLst/>
+          </a:prstGeom>
+          <a:noFill/>
+        </p:spPr>
+        <p:txBody>
+          <a:bodyPr wrap="square">
+            <a:spAutoFit/>
+          </a:bodyPr>
+          <a:lstStyle/>
+          <a:p>
+            <a:pPr algn="l">
+              <a:spcAft>
+                <a:spcPts val="800"/>
+              </a:spcAft>
+            </a:pPr>
+            <a:r>
+              <a:rPr sz="1600" b="0">
+                <a:solidFill>
+                  <a:srgbClr val="FFFFFF"/>
+                </a:solidFill>
+                <a:latin typeface="맑은 고딕"/>
+              </a:rPr>
+              <a:t>•  모드와 속성은 짝으로 변경</a:t>
+            </a:r>
+          </a:p>
+          <a:p>
+            <a:pPr algn="l">
+              <a:spcAft>
+                <a:spcPts val="800"/>
+              </a:spcAft>
+            </a:pPr>
+            <a:r>
+              <a:rPr sz="1600" b="0">
+                <a:solidFill>
+                  <a:srgbClr val="FFFFFF"/>
+                </a:solidFill>
+                <a:latin typeface="맑은 고딕"/>
+              </a:rPr>
+              <a:t>•  MODE와 LEVEL 감시</a:t>
+            </a:r>
+          </a:p>
+          <a:p>
+            <a:pPr algn="l">
+              <a:spcAft>
+                <a:spcPts val="800"/>
+              </a:spcAft>
+            </a:pPr>
+            <a:r>
+              <a:rPr sz="1600" b="0">
+                <a:solidFill>
+                  <a:srgbClr val="FFFFFF"/>
+                </a:solidFill>
+                <a:latin typeface="맑은 고딕"/>
+              </a:rPr>
+              <a:t>•  대칭 구성과 Broker 일원화</a:t>
+            </a:r>
+          </a:p>
+        </p:txBody>
+      </p:sp>
+    </p:spTree>
+  </p:cSld>
+  <p:clrMapOvr>
+    <a:masterClrMapping/>
+  </p:clrMapOvr>
+</p:sld>
+</file>
+
+<file path=ppt/slides/slide48.xml><?xml version="1.0" encoding="utf-8"?>
+<p:sld xmlns:a="http://schemas.openxmlformats.org/drawingml/2006/main" xmlns:p="http://schemas.openxmlformats.org/presentationml/2006/main" xmlns:r="http://schemas.openxmlformats.org/officeDocument/2006/relationships">
+  <p:cSld>
+    <p:spTree>
+      <p:nvGrpSpPr>
+        <p:cNvPr id="1" name=""/>
+        <p:cNvGrpSpPr/>
+        <p:nvPr/>
+      </p:nvGrpSpPr>
+      <p:grpSpPr/>
+      <p:sp>
+        <p:nvSpPr>
+          <p:cNvPr id="2" name="Rectangle 1"/>
+          <p:cNvSpPr/>
+          <p:nvPr/>
+        </p:nvSpPr>
+        <p:spPr>
+          <a:xfrm>
+            <a:off x="0" y="0"/>
+            <a:ext cx="12191695" cy="1005840"/>
+          </a:xfrm>
+          <a:prstGeom prst="rect">
+            <a:avLst/>
+          </a:prstGeom>
+          <a:solidFill>
+            <a:srgbClr val="C0392B"/>
+          </a:solidFill>
+          <a:ln>
+            <a:noFill/>
+          </a:ln>
+          <a:effectLst/>
+        </p:spPr>
+        <p:style>
+          <a:lnRef idx="1">
+            <a:schemeClr val="accent1"/>
+          </a:lnRef>
+          <a:fillRef idx="3">
+            <a:schemeClr val="accent1"/>
+          </a:fillRef>
+          <a:effectRef idx="2">
+            <a:schemeClr val="accent1"/>
+          </a:effectRef>
+          <a:fontRef idx="minor">
+            <a:schemeClr val="lt1"/>
+          </a:fontRef>
+        </p:style>
+        <p:txBody>
+          <a:bodyPr rtlCol="0" anchor="ctr"/>
+          <a:lstStyle/>
+          <a:p>
+            <a:pPr algn="ctr"/>
+          </a:p>
+        </p:txBody>
+      </p:sp>
+      <p:sp>
+        <p:nvSpPr>
+          <p:cNvPr id="3" name="TextBox 2"/>
+          <p:cNvSpPr txBox="1"/>
+          <p:nvPr/>
+        </p:nvSpPr>
+        <p:spPr>
+          <a:xfrm>
+            <a:off x="548640" y="91440"/>
+            <a:ext cx="10972800" cy="777240"/>
+          </a:xfrm>
+          <a:prstGeom prst="rect">
+            <a:avLst/>
+          </a:prstGeom>
+          <a:noFill/>
+        </p:spPr>
+        <p:txBody>
+          <a:bodyPr wrap="square">
+            <a:spAutoFit/>
+          </a:bodyPr>
+          <a:lstStyle/>
+          <a:p>
+            <a:pPr algn="l">
+              <a:spcAft>
+                <a:spcPts val="600"/>
+              </a:spcAft>
+            </a:pPr>
+            <a:r>
+              <a:rPr sz="2600" b="1">
+                <a:solidFill>
+                  <a:srgbClr val="FFFFFF"/>
+                </a:solidFill>
+                <a:latin typeface="맑은 고딕"/>
+              </a:rPr>
+              <a:t>운영 시 주의점</a:t>
+            </a:r>
+          </a:p>
+        </p:txBody>
+      </p:sp>
+      <p:sp>
+        <p:nvSpPr>
+          <p:cNvPr id="4" name="TextBox 3"/>
+          <p:cNvSpPr txBox="1"/>
+          <p:nvPr/>
+        </p:nvSpPr>
+        <p:spPr>
+          <a:xfrm>
+            <a:off x="640080" y="1078992"/>
+            <a:ext cx="10881360" cy="457200"/>
+          </a:xfrm>
+          <a:prstGeom prst="rect">
+            <a:avLst/>
+          </a:prstGeom>
+          <a:noFill/>
+        </p:spPr>
+        <p:txBody>
+          <a:bodyPr wrap="square">
+            <a:spAutoFit/>
+          </a:bodyPr>
+          <a:lstStyle/>
+          <a:p>
+            <a:pPr algn="l">
+              <a:spcAft>
+                <a:spcPts val="600"/>
+              </a:spcAft>
+            </a:pPr>
+            <a:r>
+              <a:rPr sz="1500" b="0">
+                <a:solidFill>
+                  <a:srgbClr val="5A6672"/>
+                </a:solidFill>
+                <a:latin typeface="맑은 고딕"/>
+              </a:rPr>
+              <a:t>조용히 무너지는 보호</a:t>
+            </a:r>
+          </a:p>
+        </p:txBody>
+      </p:sp>
+      <p:sp>
+        <p:nvSpPr>
+          <p:cNvPr id="5" name="TextBox 4"/>
+          <p:cNvSpPr txBox="1"/>
+          <p:nvPr/>
+        </p:nvSpPr>
+        <p:spPr>
+          <a:xfrm>
+            <a:off x="640080" y="1737360"/>
+            <a:ext cx="10881360" cy="4754880"/>
+          </a:xfrm>
+          <a:prstGeom prst="rect">
+            <a:avLst/>
+          </a:prstGeom>
+          <a:noFill/>
+        </p:spPr>
+        <p:txBody>
+          <a:bodyPr wrap="square">
+            <a:spAutoFit/>
+          </a:bodyPr>
+          <a:lstStyle/>
+          <a:p>
+            <a:pPr algn="l">
+              <a:spcAft>
+                <a:spcPts val="1000"/>
+              </a:spcAft>
+            </a:pPr>
+            <a:r>
+              <a:rPr sz="1700" b="0">
+                <a:solidFill>
+                  <a:srgbClr val="222222"/>
+                </a:solidFill>
+                <a:latin typeface="맑은 고딕"/>
+              </a:rPr>
+              <a:t>•  올릴 때 속성 먼저, 내릴 때 모드 먼저</a:t>
+            </a:r>
+          </a:p>
+          <a:p>
+            <a:pPr algn="l">
+              <a:spcAft>
+                <a:spcPts val="1000"/>
+              </a:spcAft>
+            </a:pPr>
+            <a:r>
+              <a:rPr sz="1700" b="0">
+                <a:solidFill>
+                  <a:srgbClr val="222222"/>
+                </a:solidFill>
+                <a:latin typeface="맑은 고딕"/>
+              </a:rPr>
+              <a:t>•  PROTECTION_MODE와 LEVEL 일치 여부 감시</a:t>
+            </a:r>
+          </a:p>
+          <a:p>
+            <a:pPr algn="l">
+              <a:spcAft>
+                <a:spcPts val="1000"/>
+              </a:spcAft>
+            </a:pPr>
+            <a:r>
+              <a:rPr sz="1700" b="0">
+                <a:solidFill>
+                  <a:srgbClr val="222222"/>
+                </a:solidFill>
+                <a:latin typeface="맑은 고딕"/>
+              </a:rPr>
+              <a:t>•  Protection 구성의 Standby 작업은 모드 하향부터</a:t>
+            </a:r>
+          </a:p>
+          <a:p>
+            <a:pPr algn="l">
+              <a:spcAft>
+                <a:spcPts val="1000"/>
+              </a:spcAft>
+            </a:pPr>
+            <a:r>
+              <a:rPr sz="1700" b="0">
+                <a:solidFill>
+                  <a:srgbClr val="222222"/>
+                </a:solidFill>
+                <a:latin typeface="맑은 고딕"/>
+              </a:rPr>
+              <a:t>•  Broker 구성에서는 ALTER SYSTEM으로 목적지 수정 금지</a:t>
+            </a:r>
+          </a:p>
+          <a:p>
+            <a:pPr algn="l">
+              <a:spcAft>
+                <a:spcPts val="1000"/>
+              </a:spcAft>
+            </a:pPr>
+            <a:r>
+              <a:rPr sz="1700" b="0">
+                <a:solidFill>
+                  <a:srgbClr val="222222"/>
+                </a:solidFill>
+                <a:latin typeface="맑은 고딕"/>
+              </a:rPr>
+              <a:t>•  압축·Far Sync는 라이선스 확인 후 설정</a:t>
+            </a:r>
+          </a:p>
+        </p:txBody>
+      </p:sp>
+    </p:spTree>
+  </p:cSld>
+  <p:clrMapOvr>
+    <a:masterClrMapping/>
+  </p:clrMapOvr>
+</p:sld>
+</file>
+
+<file path=ppt/slides/slide49.xml><?xml version="1.0" encoding="utf-8"?>
+<p:sld xmlns:a="http://schemas.openxmlformats.org/drawingml/2006/main" xmlns:p="http://schemas.openxmlformats.org/presentationml/2006/main" xmlns:r="http://schemas.openxmlformats.org/officeDocument/2006/relationships">
+  <p:cSld>
+    <p:spTree>
+      <p:nvGrpSpPr>
+        <p:cNvPr id="1" name=""/>
+        <p:cNvGrpSpPr/>
+        <p:nvPr/>
+      </p:nvGrpSpPr>
+      <p:grpSpPr/>
+      <p:sp>
+        <p:nvSpPr>
+          <p:cNvPr id="2" name="Rectangle 1"/>
+          <p:cNvSpPr/>
+          <p:nvPr/>
+        </p:nvSpPr>
+        <p:spPr>
+          <a:xfrm>
+            <a:off x="0" y="0"/>
+            <a:ext cx="12191695" cy="1005840"/>
+          </a:xfrm>
+          <a:prstGeom prst="rect">
+            <a:avLst/>
+          </a:prstGeom>
+          <a:solidFill>
+            <a:srgbClr val="C0392B"/>
+          </a:solidFill>
+          <a:ln>
+            <a:noFill/>
+          </a:ln>
+          <a:effectLst/>
+        </p:spPr>
+        <p:style>
+          <a:lnRef idx="1">
+            <a:schemeClr val="accent1"/>
+          </a:lnRef>
+          <a:fillRef idx="3">
+            <a:schemeClr val="accent1"/>
+          </a:fillRef>
+          <a:effectRef idx="2">
+            <a:schemeClr val="accent1"/>
+          </a:effectRef>
+          <a:fontRef idx="minor">
+            <a:schemeClr val="lt1"/>
+          </a:fontRef>
+        </p:style>
+        <p:txBody>
+          <a:bodyPr rtlCol="0" anchor="ctr"/>
+          <a:lstStyle/>
+          <a:p>
+            <a:pPr algn="ctr"/>
+          </a:p>
+        </p:txBody>
+      </p:sp>
+      <p:sp>
+        <p:nvSpPr>
+          <p:cNvPr id="3" name="TextBox 2"/>
+          <p:cNvSpPr txBox="1"/>
+          <p:nvPr/>
+        </p:nvSpPr>
+        <p:spPr>
+          <a:xfrm>
+            <a:off x="548640" y="91440"/>
+            <a:ext cx="10972800" cy="777240"/>
+          </a:xfrm>
+          <a:prstGeom prst="rect">
+            <a:avLst/>
+          </a:prstGeom>
+          <a:noFill/>
+        </p:spPr>
+        <p:txBody>
+          <a:bodyPr wrap="square">
+            <a:spAutoFit/>
+          </a:bodyPr>
+          <a:lstStyle/>
+          <a:p>
+            <a:pPr algn="l">
+              <a:spcAft>
+                <a:spcPts val="600"/>
+              </a:spcAft>
+            </a:pPr>
+            <a:r>
+              <a:rPr sz="2600" b="1">
+                <a:solidFill>
+                  <a:srgbClr val="FFFFFF"/>
+                </a:solidFill>
+                <a:latin typeface="맑은 고딕"/>
+              </a:rPr>
+              <a:t>요약</a:t>
+            </a:r>
+          </a:p>
+        </p:txBody>
+      </p:sp>
+      <p:sp>
+        <p:nvSpPr>
+          <p:cNvPr id="4" name="TextBox 3"/>
+          <p:cNvSpPr txBox="1"/>
+          <p:nvPr/>
+        </p:nvSpPr>
+        <p:spPr>
+          <a:xfrm>
+            <a:off x="640080" y="1371600"/>
+            <a:ext cx="10881360" cy="5120640"/>
+          </a:xfrm>
+          <a:prstGeom prst="rect">
+            <a:avLst/>
+          </a:prstGeom>
+          <a:noFill/>
+        </p:spPr>
+        <p:txBody>
+          <a:bodyPr wrap="square">
+            <a:spAutoFit/>
+          </a:bodyPr>
+          <a:lstStyle/>
+          <a:p>
+            <a:pPr algn="l">
+              <a:spcAft>
+                <a:spcPts val="1000"/>
+              </a:spcAft>
+            </a:pPr>
+            <a:r>
+              <a:rPr sz="1600" b="0">
+                <a:solidFill>
+                  <a:srgbClr val="222222"/>
+                </a:solidFill>
+                <a:latin typeface="맑은 고딕"/>
+              </a:rPr>
+              <a:t>•  목적지마다 LOG_ARCHIVE_DEST_n, SYNC는 NSS, ASYNC는 TTnn</a:t>
+            </a:r>
+          </a:p>
+          <a:p>
+            <a:pPr algn="l">
+              <a:spcAft>
+                <a:spcPts val="1000"/>
+              </a:spcAft>
+            </a:pPr>
+            <a:r>
+              <a:rPr sz="1600" b="0">
+                <a:solidFill>
+                  <a:srgbClr val="222222"/>
+                </a:solidFill>
+                <a:latin typeface="맑은 고딕"/>
+              </a:rPr>
+              <a:t>•  AFFIRM은 SRL 기록 후 확인, SYNC NOAFFIRM이 FASTSYNC</a:t>
+            </a:r>
+          </a:p>
+          <a:p>
+            <a:pPr algn="l">
+              <a:spcAft>
+                <a:spcPts val="1000"/>
+              </a:spcAft>
+            </a:pPr>
+            <a:r>
+              <a:rPr sz="1600" b="0">
+                <a:solidFill>
+                  <a:srgbClr val="222222"/>
+                </a:solidFill>
+                <a:latin typeface="맑은 고딕"/>
+              </a:rPr>
+              <a:t>•  원격 목적지: SERVICE, DB_UNIQUE_NAME, VALID_FOR 필수</a:t>
+            </a:r>
+          </a:p>
+          <a:p>
+            <a:pPr algn="l">
+              <a:spcAft>
+                <a:spcPts val="1000"/>
+              </a:spcAft>
+            </a:pPr>
+            <a:r>
+              <a:rPr sz="1600" b="0">
+                <a:solidFill>
+                  <a:srgbClr val="222222"/>
+                </a:solidFill>
+                <a:latin typeface="맑은 고딕"/>
+              </a:rPr>
+              <a:t>•  Performance 기본, Availability 단일 장애 무손실, Protection 이중 장애 무손실</a:t>
+            </a:r>
+          </a:p>
+          <a:p>
+            <a:pPr algn="l">
+              <a:spcAft>
+                <a:spcPts val="1000"/>
+              </a:spcAft>
+            </a:pPr>
+            <a:r>
+              <a:rPr sz="1600" b="0">
+                <a:solidFill>
+                  <a:srgbClr val="222222"/>
+                </a:solidFill>
+                <a:latin typeface="맑은 고딕"/>
+              </a:rPr>
+              <a:t>•  Protection은 동기화된 Availability에서만 올림(ORA-01126)</a:t>
+            </a:r>
+          </a:p>
+          <a:p>
+            <a:pPr algn="l">
+              <a:spcAft>
+                <a:spcPts val="1000"/>
+              </a:spcAft>
+            </a:pPr>
+            <a:r>
+              <a:rPr sz="1600" b="0">
+                <a:solidFill>
+                  <a:srgbClr val="222222"/>
+                </a:solidFill>
+                <a:latin typeface="맑은 고딕"/>
+              </a:rPr>
+              <a:t>•  MODE는 설정값, LEVEL은 실제 수준</a:t>
             </a:r>
           </a:p>
         </p:txBody>
@@ -12630,7 +16709,7 @@
                 </a:solidFill>
                 <a:latin typeface="맑은 고딕"/>
               </a:rPr>
-              <a:t>LOG_ARCHIVE_DEST_n</a:t>
+              <a:t>리두 소스와 리두 목적지</a:t>
             </a:r>
           </a:p>
         </p:txBody>
@@ -12669,7 +16748,7 @@
                 </a:solidFill>
                 <a:latin typeface="맑은 고딕"/>
               </a:rPr>
-              <a:t>한 줄에 담긴 네 가지 결정</a:t>
+              <a:t>LOG_ARCHIVE_DEST_n 하나가 목적지 하나</a:t>
             </a:r>
           </a:p>
         </p:txBody>
@@ -12708,7 +16787,7 @@
                 </a:solidFill>
                 <a:latin typeface="맑은 고딕"/>
               </a:rPr>
-              <a:t>•  service=boston — 리두를 보낼 대상. tnsnames.ora의 넷 서비스 이름</a:t>
+              <a:t>•  소스: Primary, Far Sync, 캐스케이딩 Standby</a:t>
             </a:r>
           </a:p>
           <a:p>
@@ -12724,7 +16803,7 @@
                 </a:solidFill>
                 <a:latin typeface="맑은 고딕"/>
               </a:rPr>
-              <a:t>•  async / sync — 전송 방식. 커밋을 기다리는지 여부</a:t>
+              <a:t>•  목적지: Standby, Far Sync, 로컬 아카이브</a:t>
             </a:r>
           </a:p>
           <a:p>
@@ -12740,7 +16819,7 @@
                 </a:solidFill>
                 <a:latin typeface="맑은 고딕"/>
               </a:rPr>
-              <a:t>•  valid_for=(로그유형, 역할) — 언제 이 목적지를 쓸 것인가</a:t>
+              <a:t>•  LOG_ARCHIVE_DEST_1~31, 원격은 최대 30개</a:t>
             </a:r>
           </a:p>
           <a:p>
@@ -12756,23 +16835,555 @@
                 </a:solidFill>
                 <a:latin typeface="맑은 고딕"/>
               </a:rPr>
-              <a:t>•  db_unique_name=boston — 오배송을 막는 검증용</a:t>
-            </a:r>
-          </a:p>
-          <a:p>
-            <a:pPr algn="l">
-              <a:spcAft>
-                <a:spcPts val="1000"/>
-              </a:spcAft>
-            </a:pPr>
-            <a:r>
-              <a:rPr sz="1700" b="0">
-                <a:solidFill>
-                  <a:srgbClr val="222222"/>
-                </a:solidFill>
-                <a:latin typeface="맑은 고딕"/>
-              </a:rPr>
-              <a:t>•  목적지는 최대 31개. 하나는 로컬 아카이브가 쓰므로 원격용 30개</a:t>
+              <a:t>•  전송은 SRL·아카이브 로그 기록으로 끝난다</a:t>
+            </a:r>
+          </a:p>
+        </p:txBody>
+      </p:sp>
+    </p:spTree>
+  </p:cSld>
+  <p:clrMapOvr>
+    <a:masterClrMapping/>
+  </p:clrMapOvr>
+</p:sld>
+</file>
+
+<file path=ppt/slides/slide50.xml><?xml version="1.0" encoding="utf-8"?>
+<p:sld xmlns:a="http://schemas.openxmlformats.org/drawingml/2006/main" xmlns:p="http://schemas.openxmlformats.org/presentationml/2006/main" xmlns:r="http://schemas.openxmlformats.org/officeDocument/2006/relationships">
+  <p:cSld>
+    <p:spTree>
+      <p:nvGrpSpPr>
+        <p:cNvPr id="1" name=""/>
+        <p:cNvGrpSpPr/>
+        <p:nvPr/>
+      </p:nvGrpSpPr>
+      <p:grpSpPr/>
+      <p:sp>
+        <p:nvSpPr>
+          <p:cNvPr id="2" name="Rectangle 1"/>
+          <p:cNvSpPr/>
+          <p:nvPr/>
+        </p:nvSpPr>
+        <p:spPr>
+          <a:xfrm>
+            <a:off x="0" y="0"/>
+            <a:ext cx="12191695" cy="1005840"/>
+          </a:xfrm>
+          <a:prstGeom prst="rect">
+            <a:avLst/>
+          </a:prstGeom>
+          <a:solidFill>
+            <a:srgbClr val="C0392B"/>
+          </a:solidFill>
+          <a:ln>
+            <a:noFill/>
+          </a:ln>
+          <a:effectLst/>
+        </p:spPr>
+        <p:style>
+          <a:lnRef idx="1">
+            <a:schemeClr val="accent1"/>
+          </a:lnRef>
+          <a:fillRef idx="3">
+            <a:schemeClr val="accent1"/>
+          </a:fillRef>
+          <a:effectRef idx="2">
+            <a:schemeClr val="accent1"/>
+          </a:effectRef>
+          <a:fontRef idx="minor">
+            <a:schemeClr val="lt1"/>
+          </a:fontRef>
+        </p:style>
+        <p:txBody>
+          <a:bodyPr rtlCol="0" anchor="ctr"/>
+          <a:lstStyle/>
+          <a:p>
+            <a:pPr algn="ctr"/>
+          </a:p>
+        </p:txBody>
+      </p:sp>
+      <p:sp>
+        <p:nvSpPr>
+          <p:cNvPr id="3" name="TextBox 2"/>
+          <p:cNvSpPr txBox="1"/>
+          <p:nvPr/>
+        </p:nvSpPr>
+        <p:spPr>
+          <a:xfrm>
+            <a:off x="548640" y="91440"/>
+            <a:ext cx="10972800" cy="777240"/>
+          </a:xfrm>
+          <a:prstGeom prst="rect">
+            <a:avLst/>
+          </a:prstGeom>
+          <a:noFill/>
+        </p:spPr>
+        <p:txBody>
+          <a:bodyPr wrap="square">
+            <a:spAutoFit/>
+          </a:bodyPr>
+          <a:lstStyle/>
+          <a:p>
+            <a:pPr algn="l">
+              <a:spcAft>
+                <a:spcPts val="600"/>
+              </a:spcAft>
+            </a:pPr>
+            <a:r>
+              <a:rPr sz="2600" b="1">
+                <a:solidFill>
+                  <a:srgbClr val="FFFFFF"/>
+                </a:solidFill>
+                <a:latin typeface="맑은 고딕"/>
+              </a:rPr>
+              <a:t>퀴즈 (1/2)</a:t>
+            </a:r>
+          </a:p>
+        </p:txBody>
+      </p:sp>
+      <p:sp>
+        <p:nvSpPr>
+          <p:cNvPr id="4" name="TextBox 3"/>
+          <p:cNvSpPr txBox="1"/>
+          <p:nvPr/>
+        </p:nvSpPr>
+        <p:spPr>
+          <a:xfrm>
+            <a:off x="640080" y="1371600"/>
+            <a:ext cx="10881360" cy="5120640"/>
+          </a:xfrm>
+          <a:prstGeom prst="rect">
+            <a:avLst/>
+          </a:prstGeom>
+          <a:noFill/>
+        </p:spPr>
+        <p:txBody>
+          <a:bodyPr wrap="square">
+            <a:spAutoFit/>
+          </a:bodyPr>
+          <a:lstStyle/>
+          <a:p>
+            <a:pPr algn="l">
+              <a:spcAft>
+                <a:spcPts val="1000"/>
+              </a:spcAft>
+            </a:pPr>
+            <a:r>
+              <a:rPr sz="1600" b="0">
+                <a:solidFill>
+                  <a:srgbClr val="222222"/>
+                </a:solidFill>
+                <a:latin typeface="맑은 고딕"/>
+              </a:rPr>
+              <a:t>•  Q1. SYNC AFFIRM + Performance에서 Standby 장애 시? → NET_TIMEOUT 후 계속 진행</a:t>
+            </a:r>
+          </a:p>
+          <a:p>
+            <a:pPr algn="l">
+              <a:spcAft>
+                <a:spcPts val="1000"/>
+              </a:spcAft>
+            </a:pPr>
+            <a:r>
+              <a:rPr sz="1600" b="0">
+                <a:solidFill>
+                  <a:srgbClr val="222222"/>
+                </a:solidFill>
+                <a:latin typeface="맑은 고딕"/>
+              </a:rPr>
+              <a:t>•  Q2. FASTSYNC의 실체는? → SYNC NOAFFIRM</a:t>
+            </a:r>
+          </a:p>
+          <a:p>
+            <a:pPr algn="l">
+              <a:spcAft>
+                <a:spcPts val="1000"/>
+              </a:spcAft>
+            </a:pPr>
+            <a:r>
+              <a:rPr sz="1600" b="0">
+                <a:solidFill>
+                  <a:srgbClr val="222222"/>
+                </a:solidFill>
+                <a:latin typeface="맑은 고딕"/>
+              </a:rPr>
+              <a:t>•  Q3. Standby의 PRIMARY_ROLE 목적지는? → 오류 없이 무시</a:t>
+            </a:r>
+          </a:p>
+        </p:txBody>
+      </p:sp>
+    </p:spTree>
+  </p:cSld>
+  <p:clrMapOvr>
+    <a:masterClrMapping/>
+  </p:clrMapOvr>
+</p:sld>
+</file>
+
+<file path=ppt/slides/slide51.xml><?xml version="1.0" encoding="utf-8"?>
+<p:sld xmlns:a="http://schemas.openxmlformats.org/drawingml/2006/main" xmlns:p="http://schemas.openxmlformats.org/presentationml/2006/main" xmlns:r="http://schemas.openxmlformats.org/officeDocument/2006/relationships">
+  <p:cSld>
+    <p:spTree>
+      <p:nvGrpSpPr>
+        <p:cNvPr id="1" name=""/>
+        <p:cNvGrpSpPr/>
+        <p:nvPr/>
+      </p:nvGrpSpPr>
+      <p:grpSpPr/>
+      <p:sp>
+        <p:nvSpPr>
+          <p:cNvPr id="2" name="Rectangle 1"/>
+          <p:cNvSpPr/>
+          <p:nvPr/>
+        </p:nvSpPr>
+        <p:spPr>
+          <a:xfrm>
+            <a:off x="0" y="0"/>
+            <a:ext cx="12191695" cy="1005840"/>
+          </a:xfrm>
+          <a:prstGeom prst="rect">
+            <a:avLst/>
+          </a:prstGeom>
+          <a:solidFill>
+            <a:srgbClr val="C0392B"/>
+          </a:solidFill>
+          <a:ln>
+            <a:noFill/>
+          </a:ln>
+          <a:effectLst/>
+        </p:spPr>
+        <p:style>
+          <a:lnRef idx="1">
+            <a:schemeClr val="accent1"/>
+          </a:lnRef>
+          <a:fillRef idx="3">
+            <a:schemeClr val="accent1"/>
+          </a:fillRef>
+          <a:effectRef idx="2">
+            <a:schemeClr val="accent1"/>
+          </a:effectRef>
+          <a:fontRef idx="minor">
+            <a:schemeClr val="lt1"/>
+          </a:fontRef>
+        </p:style>
+        <p:txBody>
+          <a:bodyPr rtlCol="0" anchor="ctr"/>
+          <a:lstStyle/>
+          <a:p>
+            <a:pPr algn="ctr"/>
+          </a:p>
+        </p:txBody>
+      </p:sp>
+      <p:sp>
+        <p:nvSpPr>
+          <p:cNvPr id="3" name="TextBox 2"/>
+          <p:cNvSpPr txBox="1"/>
+          <p:nvPr/>
+        </p:nvSpPr>
+        <p:spPr>
+          <a:xfrm>
+            <a:off x="548640" y="91440"/>
+            <a:ext cx="10972800" cy="777240"/>
+          </a:xfrm>
+          <a:prstGeom prst="rect">
+            <a:avLst/>
+          </a:prstGeom>
+          <a:noFill/>
+        </p:spPr>
+        <p:txBody>
+          <a:bodyPr wrap="square">
+            <a:spAutoFit/>
+          </a:bodyPr>
+          <a:lstStyle/>
+          <a:p>
+            <a:pPr algn="l">
+              <a:spcAft>
+                <a:spcPts val="600"/>
+              </a:spcAft>
+            </a:pPr>
+            <a:r>
+              <a:rPr sz="2600" b="1">
+                <a:solidFill>
+                  <a:srgbClr val="FFFFFF"/>
+                </a:solidFill>
+                <a:latin typeface="맑은 고딕"/>
+              </a:rPr>
+              <a:t>퀴즈 (2/2)</a:t>
+            </a:r>
+          </a:p>
+        </p:txBody>
+      </p:sp>
+      <p:sp>
+        <p:nvSpPr>
+          <p:cNvPr id="4" name="TextBox 3"/>
+          <p:cNvSpPr txBox="1"/>
+          <p:nvPr/>
+        </p:nvSpPr>
+        <p:spPr>
+          <a:xfrm>
+            <a:off x="640080" y="1371600"/>
+            <a:ext cx="10881360" cy="5120640"/>
+          </a:xfrm>
+          <a:prstGeom prst="rect">
+            <a:avLst/>
+          </a:prstGeom>
+          <a:noFill/>
+        </p:spPr>
+        <p:txBody>
+          <a:bodyPr wrap="square">
+            <a:spAutoFit/>
+          </a:bodyPr>
+          <a:lstStyle/>
+          <a:p>
+            <a:pPr algn="l">
+              <a:spcAft>
+                <a:spcPts val="1000"/>
+              </a:spcAft>
+            </a:pPr>
+            <a:r>
+              <a:rPr sz="1600" b="0">
+                <a:solidFill>
+                  <a:srgbClr val="222222"/>
+                </a:solidFill>
+                <a:latin typeface="맑은 고딕"/>
+              </a:rPr>
+              <a:t>•  Q4. MODE는 AVAILABILITY, LEVEL은 RESYNC면? → 무손실 보장 상실</a:t>
+            </a:r>
+          </a:p>
+          <a:p>
+            <a:pPr algn="l">
+              <a:spcAft>
+                <a:spcPts val="1000"/>
+              </a:spcAft>
+            </a:pPr>
+            <a:r>
+              <a:rPr sz="1600" b="0">
+                <a:solidFill>
+                  <a:srgbClr val="222222"/>
+                </a:solidFill>
+                <a:latin typeface="맑은 고딕"/>
+              </a:rPr>
+              <a:t>•  Q5. Performance에서 Protection 직행 시 ORA-01126 대응? → Availability 경유</a:t>
+            </a:r>
+          </a:p>
+          <a:p>
+            <a:pPr algn="l">
+              <a:spcAft>
+                <a:spcPts val="1000"/>
+              </a:spcAft>
+            </a:pPr>
+            <a:r>
+              <a:rPr sz="1600" b="0">
+                <a:solidFill>
+                  <a:srgbClr val="222222"/>
+                </a:solidFill>
+                <a:latin typeface="맑은 고딕"/>
+              </a:rPr>
+              <a:t>•  Q6. Protection 위험 완화와 거리가 먼 것? → 원격 목적지 MANDATORY</a:t>
+            </a:r>
+          </a:p>
+        </p:txBody>
+      </p:sp>
+    </p:spTree>
+  </p:cSld>
+  <p:clrMapOvr>
+    <a:masterClrMapping/>
+  </p:clrMapOvr>
+</p:sld>
+</file>
+
+<file path=ppt/slides/slide52.xml><?xml version="1.0" encoding="utf-8"?>
+<p:sld xmlns:a="http://schemas.openxmlformats.org/drawingml/2006/main" xmlns:p="http://schemas.openxmlformats.org/presentationml/2006/main" xmlns:r="http://schemas.openxmlformats.org/officeDocument/2006/relationships">
+  <p:cSld>
+    <p:spTree>
+      <p:nvGrpSpPr>
+        <p:cNvPr id="1" name=""/>
+        <p:cNvGrpSpPr/>
+        <p:nvPr/>
+      </p:nvGrpSpPr>
+      <p:grpSpPr/>
+      <p:sp>
+        <p:nvSpPr>
+          <p:cNvPr id="2" name="Rectangle 1"/>
+          <p:cNvSpPr/>
+          <p:nvPr/>
+        </p:nvSpPr>
+        <p:spPr>
+          <a:xfrm>
+            <a:off x="0" y="0"/>
+            <a:ext cx="12191695" cy="1005840"/>
+          </a:xfrm>
+          <a:prstGeom prst="rect">
+            <a:avLst/>
+          </a:prstGeom>
+          <a:solidFill>
+            <a:srgbClr val="C0392B"/>
+          </a:solidFill>
+          <a:ln>
+            <a:noFill/>
+          </a:ln>
+          <a:effectLst/>
+        </p:spPr>
+        <p:style>
+          <a:lnRef idx="1">
+            <a:schemeClr val="accent1"/>
+          </a:lnRef>
+          <a:fillRef idx="3">
+            <a:schemeClr val="accent1"/>
+          </a:fillRef>
+          <a:effectRef idx="2">
+            <a:schemeClr val="accent1"/>
+          </a:effectRef>
+          <a:fontRef idx="minor">
+            <a:schemeClr val="lt1"/>
+          </a:fontRef>
+        </p:style>
+        <p:txBody>
+          <a:bodyPr rtlCol="0" anchor="ctr"/>
+          <a:lstStyle/>
+          <a:p>
+            <a:pPr algn="ctr"/>
+          </a:p>
+        </p:txBody>
+      </p:sp>
+      <p:sp>
+        <p:nvSpPr>
+          <p:cNvPr id="3" name="TextBox 2"/>
+          <p:cNvSpPr txBox="1"/>
+          <p:nvPr/>
+        </p:nvSpPr>
+        <p:spPr>
+          <a:xfrm>
+            <a:off x="548640" y="91440"/>
+            <a:ext cx="10972800" cy="777240"/>
+          </a:xfrm>
+          <a:prstGeom prst="rect">
+            <a:avLst/>
+          </a:prstGeom>
+          <a:noFill/>
+        </p:spPr>
+        <p:txBody>
+          <a:bodyPr wrap="square">
+            <a:spAutoFit/>
+          </a:bodyPr>
+          <a:lstStyle/>
+          <a:p>
+            <a:pPr algn="l">
+              <a:spcAft>
+                <a:spcPts val="600"/>
+              </a:spcAft>
+            </a:pPr>
+            <a:r>
+              <a:rPr sz="2600" b="1">
+                <a:solidFill>
+                  <a:srgbClr val="FFFFFF"/>
+                </a:solidFill>
+                <a:latin typeface="맑은 고딕"/>
+              </a:rPr>
+              <a:t>실습 개요</a:t>
+            </a:r>
+          </a:p>
+        </p:txBody>
+      </p:sp>
+      <p:sp>
+        <p:nvSpPr>
+          <p:cNvPr id="4" name="TextBox 3"/>
+          <p:cNvSpPr txBox="1"/>
+          <p:nvPr/>
+        </p:nvSpPr>
+        <p:spPr>
+          <a:xfrm>
+            <a:off x="640080" y="1371600"/>
+            <a:ext cx="10881360" cy="5120640"/>
+          </a:xfrm>
+          <a:prstGeom prst="rect">
+            <a:avLst/>
+          </a:prstGeom>
+          <a:noFill/>
+        </p:spPr>
+        <p:txBody>
+          <a:bodyPr wrap="square">
+            <a:spAutoFit/>
+          </a:bodyPr>
+          <a:lstStyle/>
+          <a:p>
+            <a:pPr algn="l">
+              <a:spcAft>
+                <a:spcPts val="1000"/>
+              </a:spcAft>
+            </a:pPr>
+            <a:r>
+              <a:rPr sz="1600" b="0">
+                <a:solidFill>
+                  <a:srgbClr val="222222"/>
+                </a:solidFill>
+                <a:latin typeface="맑은 고딕"/>
+              </a:rPr>
+              <a:t>•  01 보호 모드 확인 — MODE와 LEVEL, 모드별 요건 (2.5, 2.6)</a:t>
+            </a:r>
+          </a:p>
+          <a:p>
+            <a:pPr algn="l">
+              <a:spcAft>
+                <a:spcPts val="1000"/>
+              </a:spcAft>
+            </a:pPr>
+            <a:r>
+              <a:rPr sz="1600" b="0">
+                <a:solidFill>
+                  <a:srgbClr val="222222"/>
+                </a:solidFill>
+                <a:latin typeface="맑은 고딕"/>
+              </a:rPr>
+              <a:t>•  02 LOG_ARCHIVE_DEST 속성 해부 — 속성과 뷰 열 대응 (2.4)</a:t>
+            </a:r>
+          </a:p>
+          <a:p>
+            <a:pPr algn="l">
+              <a:spcAft>
+                <a:spcPts val="1000"/>
+              </a:spcAft>
+            </a:pPr>
+            <a:r>
+              <a:rPr sz="1600" b="0">
+                <a:solidFill>
+                  <a:srgbClr val="222222"/>
+                </a:solidFill>
+                <a:latin typeface="맑은 고딕"/>
+              </a:rPr>
+              <a:t>•  03 보호 모드 전환 — Protection 경로, ORA-01126 (2.6)</a:t>
+            </a:r>
+          </a:p>
+          <a:p>
+            <a:pPr algn="l">
+              <a:spcAft>
+                <a:spcPts val="1000"/>
+              </a:spcAft>
+            </a:pPr>
+            <a:r>
+              <a:rPr sz="1600" b="0">
+                <a:solidFill>
+                  <a:srgbClr val="222222"/>
+                </a:solidFill>
+                <a:latin typeface="맑은 고딕"/>
+              </a:rPr>
+              <a:t>•  04 모드별 Primary 동작 — Standby 상실 시 대비 (2.5)</a:t>
+            </a:r>
+          </a:p>
+          <a:p>
+            <a:pPr algn="l">
+              <a:spcAft>
+                <a:spcPts val="1000"/>
+              </a:spcAft>
+            </a:pPr>
+            <a:r>
+              <a:rPr sz="1600" b="0">
+                <a:solidFill>
+                  <a:srgbClr val="222222"/>
+                </a:solidFill>
+                <a:latin typeface="맑은 고딕"/>
+              </a:rPr>
+              <a:t>•  05 MODE와 LEVEL 어긋남 — RESYNCHRONIZATION 판별 (2.5, 2.8)</a:t>
             </a:r>
           </a:p>
         </p:txBody>
@@ -12873,7 +17484,7 @@
                 </a:solidFill>
                 <a:latin typeface="맑은 고딕"/>
               </a:rPr>
-              <a:t>V$ARCHIVE_DEST 로 확인한다</a:t>
+              <a:t>Primary 쪽 전송 프로세스</a:t>
             </a:r>
           </a:p>
         </p:txBody>
@@ -12912,7 +17523,7 @@
                 </a:solidFill>
                 <a:latin typeface="맑은 고딕"/>
               </a:rPr>
-              <a:t>파라미터는 사람의 표현, 뷰는 오라클의 해석</a:t>
+              <a:t>방식에 따라 일하는 프로세스가 다르다</a:t>
             </a:r>
           </a:p>
         </p:txBody>
@@ -12951,7 +17562,7 @@
                 </a:solidFill>
                 <a:latin typeface="맑은 고딕"/>
               </a:rPr>
-              <a:t>•  DESTINATION — service 속성의 값</a:t>
+              <a:t>•  LGWR: 로컬 기록, SYNC면 NSS 확인을 기다림</a:t>
             </a:r>
           </a:p>
           <a:p>
@@ -12967,7 +17578,7 @@
                 </a:solidFill>
                 <a:latin typeface="맑은 고딕"/>
               </a:rPr>
-              <a:t>•  TRANSMIT_MODE — ASYNCHRONOUS / PARALLELSYNC(동기)</a:t>
+              <a:t>•  NSSn: SYNC 목적지마다 하나, RFS로 즉시 전송</a:t>
             </a:r>
           </a:p>
           <a:p>
@@ -12983,7 +17594,7 @@
                 </a:solidFill>
                 <a:latin typeface="맑은 고딕"/>
               </a:rPr>
-              <a:t>•  AFFIRM — YES / NO</a:t>
+              <a:t>•  TTnn: ASYNC 목적지, 버퍼나 온라인 로그에서 읽음</a:t>
             </a:r>
           </a:p>
           <a:p>
@@ -12999,23 +17610,7 @@
                 </a:solidFill>
                 <a:latin typeface="맑은 고딕"/>
               </a:rPr>
-              <a:t>•  VALID_TYPE, VALID_ROLE — valid_for의 두 값이 나뉘어 들어간다</a:t>
-            </a:r>
-          </a:p>
-          <a:p>
-            <a:pPr algn="l">
-              <a:spcAft>
-                <a:spcPts val="1000"/>
-              </a:spcAft>
-            </a:pPr>
-            <a:r>
-              <a:rPr sz="1700" b="0">
-                <a:solidFill>
-                  <a:srgbClr val="222222"/>
-                </a:solidFill>
-                <a:latin typeface="맑은 고딕"/>
-              </a:rPr>
-              <a:t>•  VALID_NOW — 지금 이 목적지를 실제로 쓰는가</a:t>
+              <a:t>•  ARCn: 로컬 아카이브와 갭 해소</a:t>
             </a:r>
           </a:p>
         </p:txBody>
@@ -13116,7 +17711,7 @@
                 </a:solidFill>
                 <a:latin typeface="맑은 고딕"/>
               </a:rPr>
-              <a:t>SYNC로 바꾸면 무엇이 달라지는가</a:t>
+              <a:t>Standby 수신과 SRL</a:t>
             </a:r>
           </a:p>
         </p:txBody>
@@ -13155,7 +17750,7 @@
                 </a:solidFill>
                 <a:latin typeface="맑은 고딕"/>
               </a:rPr>
-              <a:t>실측</a:t>
+              <a:t>RFS가 받아 SRL에 쓴다</a:t>
             </a:r>
           </a:p>
         </p:txBody>
@@ -13194,7 +17789,7 @@
                 </a:solidFill>
                 <a:latin typeface="맑은 고딕"/>
               </a:rPr>
-              <a:t>•  ALTER SYSTEM SET log_archive_dest_2 = '... SYNC AFFIRM ...'</a:t>
+              <a:t>•  Primary 전송 프로세스마다 RFS 하나</a:t>
             </a:r>
           </a:p>
           <a:p>
@@ -13210,7 +17805,7 @@
                 </a:solidFill>
                 <a:latin typeface="맑은 고딕"/>
               </a:rPr>
-              <a:t>•  TRANSMIT_MODE : ASYNCHRONOUS → PARALLELSYNC</a:t>
+              <a:t>•  SRL: 받은 리두 전용, 온라인 로그와 같은 크기</a:t>
             </a:r>
           </a:p>
           <a:p>
@@ -13226,7 +17821,7 @@
                 </a:solidFill>
                 <a:latin typeface="맑은 고딕"/>
               </a:rPr>
-              <a:t>•  AFFIRM : NO → YES</a:t>
+              <a:t>•  SRL이 없으면 아카이브 로그에 직접 기록</a:t>
             </a:r>
           </a:p>
           <a:p>
@@ -13242,23 +17837,7 @@
                 </a:solidFill>
                 <a:latin typeface="맑은 고딕"/>
               </a:rPr>
-              <a:t>•  프로세스 : NSS2 'sync' 등장, TT02·TT04 'async ORL' 은 CLOSING</a:t>
-            </a:r>
-          </a:p>
-          <a:p>
-            <a:pPr algn="l">
-              <a:spcAft>
-                <a:spcPts val="1000"/>
-              </a:spcAft>
-            </a:pPr>
-            <a:r>
-              <a:rPr sz="1700" b="0">
-                <a:solidFill>
-                  <a:srgbClr val="222222"/>
-                </a:solidFill>
-                <a:latin typeface="맑은 고딕"/>
-              </a:rPr>
-              <a:t>•  커밋 경로 : LGWR → NSS2 → 네트워크 → RFS → SRL 기록 → 확인 → 커밋 완료</a:t>
+              <a:t>•  세 보호 모드 모두 SRL을 요건으로 둠</a:t>
             </a:r>
           </a:p>
         </p:txBody>
@@ -13359,7 +17938,7 @@
                 </a:solidFill>
                 <a:latin typeface="맑은 고딕"/>
               </a:rPr>
-              <a:t>VALID_FOR</a:t>
+              <a:t>전송 모드와 보호 모드</a:t>
             </a:r>
           </a:p>
         </p:txBody>
@@ -13398,7 +17977,7 @@
                 </a:solidFill>
                 <a:latin typeface="맑은 고딕"/>
               </a:rPr>
-              <a:t>가장 조용한 함정</a:t>
+              <a:t>둘은 따로 설정한다</a:t>
             </a:r>
           </a:p>
         </p:txBody>
@@ -13437,7 +18016,7 @@
                 </a:solidFill>
                 <a:latin typeface="맑은 고딕"/>
               </a:rPr>
-              <a:t>•  앞은 로그 유형, 뒤는 데이터베이스 역할</a:t>
+              <a:t>•  전송 모드: 목적지별 SYNC/ASYNC, AFFIRM</a:t>
             </a:r>
           </a:p>
           <a:p>
@@ -13453,7 +18032,7 @@
                 </a:solidFill>
                 <a:latin typeface="맑은 고딕"/>
               </a:rPr>
-              <a:t>•  "이 DB가 뒤의 역할일 때 앞의 로그를 이 목적지로 보낸다"</a:t>
+              <a:t>•  보호 모드: 구성 전체 규칙, ALTER DATABASE로 설정</a:t>
             </a:r>
           </a:p>
           <a:p>
@@ -13469,7 +18048,7 @@
                 </a:solidFill>
                 <a:latin typeface="맑은 고딕"/>
               </a:rPr>
-              <a:t>•  역할 전환 시 목적지가 자동으로 켜지고 꺼지도록 하는 장치</a:t>
+              <a:t>•  보호 모드는 특정 전송 모드를 요구한다</a:t>
             </a:r>
           </a:p>
           <a:p>
@@ -13485,7 +18064,7 @@
                 </a:solidFill>
                 <a:latin typeface="맑은 고딕"/>
               </a:rPr>
-              <a:t>•  실측: primary인데 standby_role로 지정 → VALID_NOW = WRONG VALID_ROLE</a:t>
+              <a:t>•  전송 모드만 바꿔서는 보호 모드가 정해지지 않음</a:t>
             </a:r>
           </a:p>
           <a:p>
@@ -13501,7 +18080,7 @@
                 </a:solidFill>
                 <a:latin typeface="맑은 고딕"/>
               </a:rPr>
-              <a:t>•  ALTER SYSTEM은 성공, STATUS는 VALID, ERROR도 없음 — 그런데 전송만 멈춘다</a:t>
+              <a:t>•  올릴 때 속성 먼저, 내릴 때 모드 먼저</a:t>
             </a:r>
           </a:p>
         </p:txBody>
@@ -13602,7 +18181,7 @@
                 </a:solidFill>
                 <a:latin typeface="맑은 고딕"/>
               </a:rPr>
-              <a:t>그 밖의 주요 속성</a:t>
+              <a:t>커밋 하나가 지나가는 경로</a:t>
             </a:r>
           </a:p>
         </p:txBody>
@@ -13641,7 +18220,7 @@
                 </a:solidFill>
                 <a:latin typeface="맑은 고딕"/>
               </a:rPr>
-              <a:t>남의 설정을 읽을 때</a:t>
+              <a:t>Maximum Availability + SYNC 기준</a:t>
             </a:r>
           </a:p>
         </p:txBody>
@@ -13680,7 +18259,7 @@
                 </a:solidFill>
                 <a:latin typeface="맑은 고딕"/>
               </a:rPr>
-              <a:t>•  NET_TIMEOUT=n — 동기 전송에서 응답을 기다리는 최대 초 (기본 30)</a:t>
+              <a:t>•  LGWR가 로컬 쓰기와 NSS 전달을 동시에 시작</a:t>
             </a:r>
           </a:p>
           <a:p>
@@ -13696,7 +18275,7 @@
                 </a:solidFill>
                 <a:latin typeface="맑은 고딕"/>
               </a:rPr>
-              <a:t>•  REOPEN=n — 실패한 목적지를 다시 열기까지 대기 초 (기본 300)</a:t>
+              <a:t>•  NSS가 RFS로 리두 전송</a:t>
             </a:r>
           </a:p>
           <a:p>
@@ -13712,7 +18291,7 @@
                 </a:solidFill>
                 <a:latin typeface="맑은 고딕"/>
               </a:rPr>
-              <a:t>•  MAX_FAILURE=n — 연속 실패 재시도 한도</a:t>
+              <a:t>•  NOAFFIRM은 수신 즉시, AFFIRM은 SRL 기록 후 확인</a:t>
             </a:r>
           </a:p>
           <a:p>
@@ -13728,7 +18307,7 @@
                 </a:solidFill>
                 <a:latin typeface="맑은 고딕"/>
               </a:rPr>
-              <a:t>•  COMPRESSION=ENABLE — 리두 압축 (Advanced Compression 옵션)</a:t>
+              <a:t>•  로컬 쓰기와 원격 확인이 모두 끝나야 커밋 완료</a:t>
             </a:r>
           </a:p>
           <a:p>
@@ -13744,23 +18323,7 @@
                 </a:solidFill>
                 <a:latin typeface="맑은 고딕"/>
               </a:rPr>
-              <a:t>•  ALTERNATE — 실패 시 대신 쓸 목적지</a:t>
-            </a:r>
-          </a:p>
-          <a:p>
-            <a:pPr algn="l">
-              <a:spcAft>
-                <a:spcPts val="1000"/>
-              </a:spcAft>
-            </a:pPr>
-            <a:r>
-              <a:rPr sz="1700" b="0">
-                <a:solidFill>
-                  <a:srgbClr val="222222"/>
-                </a:solidFill>
-                <a:latin typeface="맑은 고딕"/>
-              </a:rPr>
-              <a:t>•  DELAY=n — Standby 적용을 n분 지연 (ADG 실시간 조회와 상충)</a:t>
+              <a:t>•  ASYNC면 로컬 쓰기에서 커밋이 끝난다</a:t>
             </a:r>
           </a:p>
         </p:txBody>
